--- a/sunum/EAETIS_Staj_Sunumu_Taslak.pptx
+++ b/sunum/EAETIS_Staj_Sunumu_Taslak.pptx
@@ -19,6 +19,7 @@
     <p:sldId id="267" r:id="rId18"/>
     <p:sldId id="268" r:id="rId19"/>
     <p:sldId id="269" r:id="rId20"/>
+    <p:sldId id="270" r:id="rId21"/>
   </p:sldIdLst>
   <p:sldSz cx="12191695" cy="6858000" type="screen4x3"/>
   <p:notesSz cx="6858000" cy="9144000"/>
@@ -3333,7 +3334,7 @@
                 </a:solidFill>
                 <a:latin typeface="Calibri"/>
               </a:rPr>
-              <a:t>10 / 14</a:t>
+              <a:t>10 / 15</a:t>
             </a:r>
           </a:p>
         </p:txBody>
@@ -3969,7 +3970,7 @@
                 </a:solidFill>
                 <a:latin typeface="Calibri"/>
               </a:rPr>
-              <a:t>11 / 14</a:t>
+              <a:t>11 / 15</a:t>
             </a:r>
           </a:p>
         </p:txBody>
@@ -4310,7 +4311,7 @@
                 </a:solidFill>
                 <a:latin typeface="Calibri"/>
               </a:rPr>
-              <a:t>12 / 14</a:t>
+              <a:t>12 / 15</a:t>
             </a:r>
           </a:p>
         </p:txBody>
@@ -4744,7 +4745,7 @@
                 </a:solidFill>
                 <a:latin typeface="Consolas"/>
               </a:rPr>
-              <a:t>12 · ARAÇLAR &amp; TEKNOLOJILER</a:t>
+              <a:t>12 · ENTEGRASYON</a:t>
             </a:r>
           </a:p>
         </p:txBody>
@@ -4778,7 +4779,7 @@
                 </a:solidFill>
                 <a:latin typeface="Calibri"/>
               </a:rPr>
-              <a:t>Tek projede birçok farklı teknolojiyi bir araya getirdim</a:t>
+              <a:t>Başka Bir Kullanıcı Bu Projeyi Nasıl Kullanır?</a:t>
             </a:r>
           </a:p>
         </p:txBody>
@@ -4791,8 +4792,8 @@
         </p:nvSpPr>
         <p:spPr>
           <a:xfrm>
-            <a:off x="502920" y="1417320"/>
-            <a:ext cx="10241280" cy="548640"/>
+            <a:off x="502920" y="6446520"/>
+            <a:ext cx="5486400" cy="274320"/>
           </a:xfrm>
           <a:prstGeom prst="rect">
             <a:avLst/>
@@ -4806,13 +4807,13 @@
           <a:lstStyle/>
           <a:p>
             <a:r>
-              <a:rPr sz="1350" b="0" i="0">
+              <a:rPr sz="900" b="0" i="0">
                 <a:solidFill>
                   <a:srgbClr val="5B6B80"/>
                 </a:solidFill>
                 <a:latin typeface="Calibri"/>
               </a:rPr>
-              <a:t>Sadece C kodu yazmadım; geliştirme ortamından donanım protokollerine kadar birçok konuda uygulamalı pratik yaptım.</a:t>
+              <a:t>E-AETIS · Staj Sunumu</a:t>
             </a:r>
           </a:p>
         </p:txBody>
@@ -4825,8 +4826,8 @@
         </p:nvSpPr>
         <p:spPr>
           <a:xfrm>
-            <a:off x="502920" y="6446520"/>
-            <a:ext cx="5486400" cy="274320"/>
+            <a:off x="10042855" y="6446520"/>
+            <a:ext cx="1828800" cy="274320"/>
           </a:xfrm>
           <a:prstGeom prst="rect">
             <a:avLst/>
@@ -4839,6 +4840,7 @@
           </a:bodyPr>
           <a:lstStyle/>
           <a:p>
+            <a:pPr algn="r"/>
             <a:r>
               <a:rPr sz="900" b="0" i="0">
                 <a:solidFill>
@@ -4846,7 +4848,7 @@
                 </a:solidFill>
                 <a:latin typeface="Calibri"/>
               </a:rPr>
-              <a:t>E-AETIS · Staj Sunumu</a:t>
+              <a:t>13 / 15</a:t>
             </a:r>
           </a:p>
         </p:txBody>
@@ -4859,8 +4861,8 @@
         </p:nvSpPr>
         <p:spPr>
           <a:xfrm>
-            <a:off x="10042855" y="6446520"/>
-            <a:ext cx="1828800" cy="274320"/>
+            <a:off x="502920" y="1463040"/>
+            <a:ext cx="5464911" cy="201168"/>
           </a:xfrm>
           <a:prstGeom prst="rect">
             <a:avLst/>
@@ -4873,15 +4875,14 @@
           </a:bodyPr>
           <a:lstStyle/>
           <a:p>
-            <a:pPr algn="r"/>
-            <a:r>
-              <a:rPr sz="900" b="0" i="0">
-                <a:solidFill>
-                  <a:srgbClr val="5B6B80"/>
-                </a:solidFill>
-                <a:latin typeface="Calibri"/>
-              </a:rPr>
-              <a:t>13 / 14</a:t>
+            <a:r>
+              <a:rPr sz="950" b="1" i="0">
+                <a:solidFill>
+                  <a:srgbClr val="0E93B4"/>
+                </a:solidFill>
+                <a:latin typeface="Consolas"/>
+              </a:rPr>
+              <a:t>ETH_CONFIG.H  ·  SEÇIM</a:t>
             </a:r>
           </a:p>
         </p:txBody>
@@ -4894,21 +4895,19 @@
         </p:nvSpPr>
         <p:spPr>
           <a:xfrm>
-            <a:off x="502920" y="2103120"/>
-            <a:ext cx="5455767" cy="2834640"/>
+            <a:off x="502920" y="1700784"/>
+            <a:ext cx="5464911" cy="2080260"/>
           </a:xfrm>
           <a:prstGeom prst="roundRect">
             <a:avLst>
-              <a:gd name="adj" fmla="val 4500"/>
+              <a:gd name="adj" fmla="val 3500"/>
             </a:avLst>
           </a:prstGeom>
           <a:solidFill>
-            <a:srgbClr val="F6F8FB"/>
+            <a:srgbClr val="10233F"/>
           </a:solidFill>
-          <a:ln w="12700">
-            <a:solidFill>
-              <a:srgbClr val="DBE1EA"/>
-            </a:solidFill>
+          <a:ln>
+            <a:noFill/>
           </a:ln>
           <a:effectLst/>
         </p:spPr>
@@ -4942,8 +4941,8 @@
         </p:nvSpPr>
         <p:spPr>
           <a:xfrm>
-            <a:off x="704088" y="2304288"/>
-            <a:ext cx="5053431" cy="219456"/>
+            <a:off x="704088" y="1901952"/>
+            <a:ext cx="5062575" cy="1677924"/>
           </a:xfrm>
           <a:prstGeom prst="rect">
             <a:avLst/>
@@ -4956,14 +4955,147 @@
           </a:bodyPr>
           <a:lstStyle/>
           <a:p>
-            <a:r>
-              <a:rPr sz="950" b="1" i="0">
-                <a:solidFill>
-                  <a:srgbClr val="0E93B4"/>
+            <a:pPr>
+              <a:spcAft>
+                <a:spcPts val="100"/>
+              </a:spcAft>
+            </a:pPr>
+            <a:r>
+              <a:rPr sz="900" b="0" i="0">
+                <a:solidFill>
+                  <a:srgbClr val="DBE8FB"/>
                 </a:solidFill>
                 <a:latin typeface="Consolas"/>
               </a:rPr>
-              <a:t>GELIŞTIRME ORTAMI</a:t>
+              <a:t>/* 1) Hedef islemci (sadece birini birakin) */</a:t>
+            </a:r>
+          </a:p>
+          <a:p>
+            <a:pPr>
+              <a:spcAft>
+                <a:spcPts val="100"/>
+              </a:spcAft>
+            </a:pPr>
+            <a:r>
+              <a:rPr sz="900" b="0" i="0">
+                <a:solidFill>
+                  <a:srgbClr val="DBE8FB"/>
+                </a:solidFill>
+                <a:latin typeface="Consolas"/>
+              </a:rPr>
+              <a:t>#define ETH_TARGET_STM32H563</a:t>
+            </a:r>
+          </a:p>
+          <a:p>
+            <a:pPr>
+              <a:spcAft>
+                <a:spcPts val="100"/>
+              </a:spcAft>
+            </a:pPr>
+            <a:r>
+              <a:rPr sz="900" b="0" i="0">
+                <a:solidFill>
+                  <a:srgbClr val="DBE8FB"/>
+                </a:solidFill>
+                <a:latin typeface="Consolas"/>
+              </a:rPr>
+              <a:t>/* #define ETH_TARGET_STM32H743 */</a:t>
+            </a:r>
+          </a:p>
+          <a:p>
+            <a:pPr>
+              <a:spcAft>
+                <a:spcPts val="100"/>
+              </a:spcAft>
+            </a:pPr>
+            <a:r>
+              <a:rPr sz="900" b="0" i="0">
+                <a:solidFill>
+                  <a:srgbClr val="DBE8FB"/>
+                </a:solidFill>
+                <a:latin typeface="Consolas"/>
+              </a:rPr>
+              <a:t>/* #define ETH_TARGET_STM32F407 */</a:t>
+            </a:r>
+          </a:p>
+          <a:p>
+            <a:pPr>
+              <a:spcAft>
+                <a:spcPts val="100"/>
+              </a:spcAft>
+            </a:pPr>
+            <a:r>
+              <a:rPr sz="900" b="0" i="0">
+                <a:solidFill>
+                  <a:srgbClr val="DBE8FB"/>
+                </a:solidFill>
+                <a:latin typeface="Consolas"/>
+              </a:rPr>
+              <a:t> </a:t>
+            </a:r>
+          </a:p>
+          <a:p>
+            <a:pPr>
+              <a:spcAft>
+                <a:spcPts val="100"/>
+              </a:spcAft>
+            </a:pPr>
+            <a:r>
+              <a:rPr sz="900" b="0" i="0">
+                <a:solidFill>
+                  <a:srgbClr val="DBE8FB"/>
+                </a:solidFill>
+                <a:latin typeface="Consolas"/>
+              </a:rPr>
+              <a:t>/* 2) PHY cipi (sadece birini birakin) */</a:t>
+            </a:r>
+          </a:p>
+          <a:p>
+            <a:pPr>
+              <a:spcAft>
+                <a:spcPts val="100"/>
+              </a:spcAft>
+            </a:pPr>
+            <a:r>
+              <a:rPr sz="900" b="0" i="0">
+                <a:solidFill>
+                  <a:srgbClr val="DBE8FB"/>
+                </a:solidFill>
+                <a:latin typeface="Consolas"/>
+              </a:rPr>
+              <a:t>#define ETH_PHY_LAN8720A</a:t>
+            </a:r>
+          </a:p>
+          <a:p>
+            <a:pPr>
+              <a:spcAft>
+                <a:spcPts val="100"/>
+              </a:spcAft>
+            </a:pPr>
+            <a:r>
+              <a:rPr sz="900" b="0" i="0">
+                <a:solidFill>
+                  <a:srgbClr val="DBE8FB"/>
+                </a:solidFill>
+                <a:latin typeface="Consolas"/>
+              </a:rPr>
+              <a:t>/* #define ETH_PHY_LAN8742A */</a:t>
+            </a:r>
+          </a:p>
+          <a:p>
+            <a:pPr>
+              <a:spcAft>
+                <a:spcPts val="100"/>
+              </a:spcAft>
+            </a:pPr>
+            <a:r>
+              <a:rPr sz="900" b="0" i="0">
+                <a:solidFill>
+                  <a:srgbClr val="DBE8FB"/>
+                </a:solidFill>
+                <a:latin typeface="Consolas"/>
+              </a:rPr>
+              <a:t>/* #define ETH_PHY_KSZ8081  */</a:t>
             </a:r>
           </a:p>
         </p:txBody>
@@ -4976,8 +5108,8 @@
         </p:nvSpPr>
         <p:spPr>
           <a:xfrm>
-            <a:off x="704088" y="2578608"/>
-            <a:ext cx="5053431" cy="320040"/>
+            <a:off x="6223863" y="1463040"/>
+            <a:ext cx="5464911" cy="201168"/>
           </a:xfrm>
           <a:prstGeom prst="rect">
             <a:avLst/>
@@ -4991,13 +5123,13 @@
           <a:lstStyle/>
           <a:p>
             <a:r>
-              <a:rPr sz="1500" b="1" i="0">
-                <a:solidFill>
-                  <a:srgbClr val="101826"/>
-                </a:solidFill>
-                <a:latin typeface="Calibri"/>
-              </a:rPr>
-              <a:t>Araçlar &amp; İş Akışı</a:t>
+              <a:rPr sz="950" b="1" i="0">
+                <a:solidFill>
+                  <a:srgbClr val="0E93B4"/>
+                </a:solidFill>
+                <a:latin typeface="Consolas"/>
+              </a:rPr>
+              <a:t>MAIN.C  ·  BAŞLATMA</a:t>
             </a:r>
           </a:p>
         </p:txBody>
@@ -5010,21 +5142,19 @@
         </p:nvSpPr>
         <p:spPr>
           <a:xfrm>
-            <a:off x="704088" y="2962656"/>
-            <a:ext cx="914400" cy="274320"/>
+            <a:off x="6223863" y="1700784"/>
+            <a:ext cx="5464911" cy="2080260"/>
           </a:xfrm>
           <a:prstGeom prst="roundRect">
             <a:avLst>
-              <a:gd name="adj" fmla="val 50000"/>
+              <a:gd name="adj" fmla="val 3500"/>
             </a:avLst>
           </a:prstGeom>
           <a:solidFill>
-            <a:srgbClr val="E7ECF5"/>
+            <a:srgbClr val="10233F"/>
           </a:solidFill>
-          <a:ln w="9525">
-            <a:solidFill>
-              <a:srgbClr val="004694"/>
-            </a:solidFill>
+          <a:ln>
+            <a:noFill/>
           </a:ln>
           <a:effectLst/>
         </p:spPr>
@@ -5043,45 +5173,267 @@
           </a:fontRef>
         </p:style>
         <p:txBody>
-          <a:bodyPr rtlCol="0" anchor="ctr" lIns="0" rIns="0" tIns="0" bIns="0"/>
+          <a:bodyPr rtlCol="0" anchor="ctr"/>
           <a:lstStyle/>
           <a:p>
             <a:pPr algn="ctr"/>
-            <a:r>
-              <a:rPr sz="1000" b="1" i="0">
-                <a:solidFill>
-                  <a:srgbClr val="004694"/>
+          </a:p>
+        </p:txBody>
+      </p:sp>
+      <p:sp>
+        <p:nvSpPr>
+          <p:cNvPr id="12" name="TextBox 11"/>
+          <p:cNvSpPr txBox="1"/>
+          <p:nvPr/>
+        </p:nvSpPr>
+        <p:spPr>
+          <a:xfrm>
+            <a:off x="6425031" y="1901952"/>
+            <a:ext cx="5062575" cy="1677924"/>
+          </a:xfrm>
+          <a:prstGeom prst="rect">
+            <a:avLst/>
+          </a:prstGeom>
+          <a:noFill/>
+        </p:spPr>
+        <p:txBody>
+          <a:bodyPr wrap="square" lIns="0" rIns="0" tIns="0" bIns="0">
+            <a:spAutoFit/>
+          </a:bodyPr>
+          <a:lstStyle/>
+          <a:p>
+            <a:pPr>
+              <a:spcAft>
+                <a:spcPts val="100"/>
+              </a:spcAft>
+            </a:pPr>
+            <a:r>
+              <a:rPr sz="900" b="0" i="0">
+                <a:solidFill>
+                  <a:srgbClr val="DBE8FB"/>
                 </a:solidFill>
                 <a:latin typeface="Consolas"/>
               </a:rPr>
-              <a:t>CMake</a:t>
-            </a:r>
-          </a:p>
-        </p:txBody>
-      </p:sp>
-      <p:sp>
-        <p:nvSpPr>
-          <p:cNvPr id="12" name="Rounded Rectangle 11"/>
+              <a:t>#include "eth_app.h"</a:t>
+            </a:r>
+          </a:p>
+          <a:p>
+            <a:pPr>
+              <a:spcAft>
+                <a:spcPts val="100"/>
+              </a:spcAft>
+            </a:pPr>
+            <a:r>
+              <a:rPr sz="900" b="0" i="0">
+                <a:solidFill>
+                  <a:srgbClr val="DBE8FB"/>
+                </a:solidFill>
+                <a:latin typeface="Consolas"/>
+              </a:rPr>
+              <a:t> </a:t>
+            </a:r>
+          </a:p>
+          <a:p>
+            <a:pPr>
+              <a:spcAft>
+                <a:spcPts val="100"/>
+              </a:spcAft>
+            </a:pPr>
+            <a:r>
+              <a:rPr sz="900" b="0" i="0">
+                <a:solidFill>
+                  <a:srgbClr val="DBE8FB"/>
+                </a:solidFill>
+                <a:latin typeface="Consolas"/>
+              </a:rPr>
+              <a:t>int main(void) {</a:t>
+            </a:r>
+          </a:p>
+          <a:p>
+            <a:pPr>
+              <a:spcAft>
+                <a:spcPts val="100"/>
+              </a:spcAft>
+            </a:pPr>
+            <a:r>
+              <a:rPr sz="900" b="0" i="0">
+                <a:solidFill>
+                  <a:srgbClr val="DBE8FB"/>
+                </a:solidFill>
+                <a:latin typeface="Consolas"/>
+              </a:rPr>
+              <a:t>    HAL_Init();</a:t>
+            </a:r>
+          </a:p>
+          <a:p>
+            <a:pPr>
+              <a:spcAft>
+                <a:spcPts val="100"/>
+              </a:spcAft>
+            </a:pPr>
+            <a:r>
+              <a:rPr sz="900" b="0" i="0">
+                <a:solidFill>
+                  <a:srgbClr val="DBE8FB"/>
+                </a:solidFill>
+                <a:latin typeface="Consolas"/>
+              </a:rPr>
+              <a:t>    SystemClock_Config();</a:t>
+            </a:r>
+          </a:p>
+          <a:p>
+            <a:pPr>
+              <a:spcAft>
+                <a:spcPts val="100"/>
+              </a:spcAft>
+            </a:pPr>
+            <a:r>
+              <a:rPr sz="900" b="0" i="0">
+                <a:solidFill>
+                  <a:srgbClr val="DBE8FB"/>
+                </a:solidFill>
+                <a:latin typeface="Consolas"/>
+              </a:rPr>
+              <a:t>    ETH_BSP_Init();</a:t>
+            </a:r>
+          </a:p>
+          <a:p>
+            <a:pPr>
+              <a:spcAft>
+                <a:spcPts val="100"/>
+              </a:spcAft>
+            </a:pPr>
+            <a:r>
+              <a:rPr sz="900" b="0" i="0">
+                <a:solidFill>
+                  <a:srgbClr val="DBE8FB"/>
+                </a:solidFill>
+                <a:latin typeface="Consolas"/>
+              </a:rPr>
+              <a:t> </a:t>
+            </a:r>
+          </a:p>
+          <a:p>
+            <a:pPr>
+              <a:spcAft>
+                <a:spcPts val="100"/>
+              </a:spcAft>
+            </a:pPr>
+            <a:r>
+              <a:rPr sz="900" b="0" i="0">
+                <a:solidFill>
+                  <a:srgbClr val="DBE8FB"/>
+                </a:solidFill>
+                <a:latin typeface="Consolas"/>
+              </a:rPr>
+              <a:t>    while (1) {</a:t>
+            </a:r>
+          </a:p>
+          <a:p>
+            <a:pPr>
+              <a:spcAft>
+                <a:spcPts val="100"/>
+              </a:spcAft>
+            </a:pPr>
+            <a:r>
+              <a:rPr sz="900" b="0" i="0">
+                <a:solidFill>
+                  <a:srgbClr val="DBE8FB"/>
+                </a:solidFill>
+                <a:latin typeface="Consolas"/>
+              </a:rPr>
+              <a:t>        ETH_BSP_ProcessEvents();</a:t>
+            </a:r>
+          </a:p>
+          <a:p>
+            <a:pPr>
+              <a:spcAft>
+                <a:spcPts val="100"/>
+              </a:spcAft>
+            </a:pPr>
+            <a:r>
+              <a:rPr sz="900" b="0" i="0">
+                <a:solidFill>
+                  <a:srgbClr val="DBE8FB"/>
+                </a:solidFill>
+                <a:latin typeface="Consolas"/>
+              </a:rPr>
+              <a:t>    }</a:t>
+            </a:r>
+          </a:p>
+          <a:p>
+            <a:pPr>
+              <a:spcAft>
+                <a:spcPts val="100"/>
+              </a:spcAft>
+            </a:pPr>
+            <a:r>
+              <a:rPr sz="900" b="0" i="0">
+                <a:solidFill>
+                  <a:srgbClr val="DBE8FB"/>
+                </a:solidFill>
+                <a:latin typeface="Consolas"/>
+              </a:rPr>
+              <a:t>}</a:t>
+            </a:r>
+          </a:p>
+        </p:txBody>
+      </p:sp>
+      <p:sp>
+        <p:nvSpPr>
+          <p:cNvPr id="13" name="TextBox 12"/>
+          <p:cNvSpPr txBox="1"/>
+          <p:nvPr/>
+        </p:nvSpPr>
+        <p:spPr>
+          <a:xfrm>
+            <a:off x="502920" y="4037076"/>
+            <a:ext cx="5464911" cy="201168"/>
+          </a:xfrm>
+          <a:prstGeom prst="rect">
+            <a:avLst/>
+          </a:prstGeom>
+          <a:noFill/>
+        </p:spPr>
+        <p:txBody>
+          <a:bodyPr wrap="square" lIns="0" rIns="0" tIns="0" bIns="0">
+            <a:spAutoFit/>
+          </a:bodyPr>
+          <a:lstStyle/>
+          <a:p>
+            <a:r>
+              <a:rPr sz="950" b="1" i="0">
+                <a:solidFill>
+                  <a:srgbClr val="0E93B4"/>
+                </a:solidFill>
+                <a:latin typeface="Consolas"/>
+              </a:rPr>
+              <a:t>ETH_DEVICE.H  ·  YENI MCU EKLEME</a:t>
+            </a:r>
+          </a:p>
+        </p:txBody>
+      </p:sp>
+      <p:sp>
+        <p:nvSpPr>
+          <p:cNvPr id="14" name="Rounded Rectangle 13"/>
           <p:cNvSpPr/>
           <p:nvPr/>
         </p:nvSpPr>
         <p:spPr>
           <a:xfrm>
-            <a:off x="1728216" y="2962656"/>
-            <a:ext cx="676656" cy="274320"/>
+            <a:off x="502920" y="4274820"/>
+            <a:ext cx="5464911" cy="2080260"/>
           </a:xfrm>
           <a:prstGeom prst="roundRect">
             <a:avLst>
-              <a:gd name="adj" fmla="val 50000"/>
+              <a:gd name="adj" fmla="val 3500"/>
             </a:avLst>
           </a:prstGeom>
           <a:solidFill>
-            <a:srgbClr val="E7ECF5"/>
+            <a:srgbClr val="10233F"/>
           </a:solidFill>
-          <a:ln w="9525">
-            <a:solidFill>
-              <a:srgbClr val="004694"/>
-            </a:solidFill>
+          <a:ln>
+            <a:noFill/>
           </a:ln>
           <a:effectLst/>
         </p:spPr>
@@ -5100,45 +5452,203 @@
           </a:fontRef>
         </p:style>
         <p:txBody>
-          <a:bodyPr rtlCol="0" anchor="ctr" lIns="0" rIns="0" tIns="0" bIns="0"/>
+          <a:bodyPr rtlCol="0" anchor="ctr"/>
           <a:lstStyle/>
           <a:p>
             <a:pPr algn="ctr"/>
-            <a:r>
-              <a:rPr sz="1000" b="1" i="0">
-                <a:solidFill>
-                  <a:srgbClr val="004694"/>
+          </a:p>
+        </p:txBody>
+      </p:sp>
+      <p:sp>
+        <p:nvSpPr>
+          <p:cNvPr id="15" name="TextBox 14"/>
+          <p:cNvSpPr txBox="1"/>
+          <p:nvPr/>
+        </p:nvSpPr>
+        <p:spPr>
+          <a:xfrm>
+            <a:off x="704088" y="4475988"/>
+            <a:ext cx="5062575" cy="1677924"/>
+          </a:xfrm>
+          <a:prstGeom prst="rect">
+            <a:avLst/>
+          </a:prstGeom>
+          <a:noFill/>
+        </p:spPr>
+        <p:txBody>
+          <a:bodyPr wrap="square" lIns="0" rIns="0" tIns="0" bIns="0">
+            <a:spAutoFit/>
+          </a:bodyPr>
+          <a:lstStyle/>
+          <a:p>
+            <a:pPr>
+              <a:spcAft>
+                <a:spcPts val="100"/>
+              </a:spcAft>
+            </a:pPr>
+            <a:r>
+              <a:rPr sz="900" b="0" i="0">
+                <a:solidFill>
+                  <a:srgbClr val="DBE8FB"/>
                 </a:solidFill>
                 <a:latin typeface="Consolas"/>
               </a:rPr>
-              <a:t>Git</a:t>
-            </a:r>
-          </a:p>
-        </p:txBody>
-      </p:sp>
-      <p:sp>
-        <p:nvSpPr>
-          <p:cNvPr id="13" name="Rounded Rectangle 12"/>
+              <a:t>#elif defined(ETH_TARGET_STM32F429)</a:t>
+            </a:r>
+          </a:p>
+          <a:p>
+            <a:pPr>
+              <a:spcAft>
+                <a:spcPts val="100"/>
+              </a:spcAft>
+            </a:pPr>
+            <a:r>
+              <a:rPr sz="900" b="0" i="0">
+                <a:solidFill>
+                  <a:srgbClr val="DBE8FB"/>
+                </a:solidFill>
+                <a:latin typeface="Consolas"/>
+              </a:rPr>
+              <a:t>  #include "stm32f4xx.h"</a:t>
+            </a:r>
+          </a:p>
+          <a:p>
+            <a:pPr>
+              <a:spcAft>
+                <a:spcPts val="100"/>
+              </a:spcAft>
+            </a:pPr>
+            <a:r>
+              <a:rPr sz="900" b="0" i="0">
+                <a:solidFill>
+                  <a:srgbClr val="DBE8FB"/>
+                </a:solidFill>
+                <a:latin typeface="Consolas"/>
+              </a:rPr>
+              <a:t>  #define ETH_PORT_EQOS          0</a:t>
+            </a:r>
+          </a:p>
+          <a:p>
+            <a:pPr>
+              <a:spcAft>
+                <a:spcPts val="100"/>
+              </a:spcAft>
+            </a:pPr>
+            <a:r>
+              <a:rPr sz="900" b="0" i="0">
+                <a:solidFill>
+                  <a:srgbClr val="DBE8FB"/>
+                </a:solidFill>
+                <a:latin typeface="Consolas"/>
+              </a:rPr>
+              <a:t>  #define ETH_PORT_GMAC          1</a:t>
+            </a:r>
+          </a:p>
+          <a:p>
+            <a:pPr>
+              <a:spcAft>
+                <a:spcPts val="100"/>
+              </a:spcAft>
+            </a:pPr>
+            <a:r>
+              <a:rPr sz="900" b="0" i="0">
+                <a:solidFill>
+                  <a:srgbClr val="DBE8FB"/>
+                </a:solidFill>
+                <a:latin typeface="Consolas"/>
+              </a:rPr>
+              <a:t>  #define ETH_HAS_DCACHE         0</a:t>
+            </a:r>
+          </a:p>
+          <a:p>
+            <a:pPr>
+              <a:spcAft>
+                <a:spcPts val="100"/>
+              </a:spcAft>
+            </a:pPr>
+            <a:r>
+              <a:rPr sz="900" b="0" i="0">
+                <a:solidFill>
+                  <a:srgbClr val="DBE8FB"/>
+                </a:solidFill>
+                <a:latin typeface="Consolas"/>
+              </a:rPr>
+              <a:t>  #define ETH_RMII_VIA_SYSCFG_PMC 1</a:t>
+            </a:r>
+          </a:p>
+          <a:p>
+            <a:pPr>
+              <a:spcAft>
+                <a:spcPts val="100"/>
+              </a:spcAft>
+            </a:pPr>
+            <a:r>
+              <a:rPr sz="900" b="0" i="0">
+                <a:solidFill>
+                  <a:srgbClr val="DBE8FB"/>
+                </a:solidFill>
+                <a:latin typeface="Consolas"/>
+              </a:rPr>
+              <a:t>  #define ETH_DEVICE_NAME        "STM32F429"</a:t>
+            </a:r>
+          </a:p>
+        </p:txBody>
+      </p:sp>
+      <p:sp>
+        <p:nvSpPr>
+          <p:cNvPr id="16" name="TextBox 15"/>
+          <p:cNvSpPr txBox="1"/>
+          <p:nvPr/>
+        </p:nvSpPr>
+        <p:spPr>
+          <a:xfrm>
+            <a:off x="6223863" y="4037076"/>
+            <a:ext cx="5464911" cy="201168"/>
+          </a:xfrm>
+          <a:prstGeom prst="rect">
+            <a:avLst/>
+          </a:prstGeom>
+          <a:noFill/>
+        </p:spPr>
+        <p:txBody>
+          <a:bodyPr wrap="square" lIns="0" rIns="0" tIns="0" bIns="0">
+            <a:spAutoFit/>
+          </a:bodyPr>
+          <a:lstStyle/>
+          <a:p>
+            <a:r>
+              <a:rPr sz="950" b="1" i="0">
+                <a:solidFill>
+                  <a:srgbClr val="0E93B4"/>
+                </a:solidFill>
+                <a:latin typeface="Consolas"/>
+              </a:rPr>
+              <a:t>ETH_PHY_YENI.C  ·  YENI PHY EKLEME</a:t>
+            </a:r>
+          </a:p>
+        </p:txBody>
+      </p:sp>
+      <p:sp>
+        <p:nvSpPr>
+          <p:cNvPr id="17" name="Rounded Rectangle 16"/>
           <p:cNvSpPr/>
           <p:nvPr/>
         </p:nvSpPr>
         <p:spPr>
           <a:xfrm>
-            <a:off x="2514600" y="2962656"/>
-            <a:ext cx="1627632" cy="274320"/>
+            <a:off x="6223863" y="4274820"/>
+            <a:ext cx="5464911" cy="2080260"/>
           </a:xfrm>
           <a:prstGeom prst="roundRect">
             <a:avLst>
-              <a:gd name="adj" fmla="val 50000"/>
+              <a:gd name="adj" fmla="val 3500"/>
             </a:avLst>
           </a:prstGeom>
           <a:solidFill>
-            <a:srgbClr val="E7ECF5"/>
+            <a:srgbClr val="10233F"/>
           </a:solidFill>
-          <a:ln w="9525">
-            <a:solidFill>
-              <a:srgbClr val="004694"/>
-            </a:solidFill>
+          <a:ln>
+            <a:noFill/>
           </a:ln>
           <a:effectLst/>
         </p:spPr>
@@ -5157,194 +5667,23 @@
           </a:fontRef>
         </p:style>
         <p:txBody>
-          <a:bodyPr rtlCol="0" anchor="ctr" lIns="0" rIns="0" tIns="0" bIns="0"/>
+          <a:bodyPr rtlCol="0" anchor="ctr"/>
           <a:lstStyle/>
           <a:p>
             <a:pPr algn="ctr"/>
-            <a:r>
-              <a:rPr sz="1000" b="1" i="0">
-                <a:solidFill>
-                  <a:srgbClr val="004694"/>
-                </a:solidFill>
-                <a:latin typeface="Consolas"/>
-              </a:rPr>
-              <a:t>GCC &amp; Ninja</a:t>
-            </a:r>
-          </a:p>
-        </p:txBody>
-      </p:sp>
-      <p:sp>
-        <p:nvSpPr>
-          <p:cNvPr id="14" name="Rounded Rectangle 13"/>
-          <p:cNvSpPr/>
-          <p:nvPr/>
-        </p:nvSpPr>
-        <p:spPr>
-          <a:xfrm>
-            <a:off x="704088" y="3291840"/>
-            <a:ext cx="1627632" cy="274320"/>
-          </a:xfrm>
-          <a:prstGeom prst="roundRect">
-            <a:avLst>
-              <a:gd name="adj" fmla="val 50000"/>
-            </a:avLst>
-          </a:prstGeom>
-          <a:solidFill>
-            <a:srgbClr val="E7ECF5"/>
-          </a:solidFill>
-          <a:ln w="9525">
-            <a:solidFill>
-              <a:srgbClr val="004694"/>
-            </a:solidFill>
-          </a:ln>
-          <a:effectLst/>
-        </p:spPr>
-        <p:style>
-          <a:lnRef idx="1">
-            <a:schemeClr val="accent1"/>
-          </a:lnRef>
-          <a:fillRef idx="3">
-            <a:schemeClr val="accent1"/>
-          </a:fillRef>
-          <a:effectRef idx="2">
-            <a:schemeClr val="accent1"/>
-          </a:effectRef>
-          <a:fontRef idx="minor">
-            <a:schemeClr val="lt1"/>
-          </a:fontRef>
-        </p:style>
-        <p:txBody>
-          <a:bodyPr rtlCol="0" anchor="ctr" lIns="0" rIns="0" tIns="0" bIns="0"/>
-          <a:lstStyle/>
-          <a:p>
-            <a:pPr algn="ctr"/>
-            <a:r>
-              <a:rPr sz="1000" b="1" i="0">
-                <a:solidFill>
-                  <a:srgbClr val="004694"/>
-                </a:solidFill>
-                <a:latin typeface="Consolas"/>
-              </a:rPr>
-              <a:t>STM32CubeMX</a:t>
-            </a:r>
-          </a:p>
-        </p:txBody>
-      </p:sp>
-      <p:sp>
-        <p:nvSpPr>
-          <p:cNvPr id="15" name="Rounded Rectangle 14"/>
-          <p:cNvSpPr/>
-          <p:nvPr/>
-        </p:nvSpPr>
-        <p:spPr>
-          <a:xfrm>
-            <a:off x="2441448" y="3291840"/>
-            <a:ext cx="1152144" cy="274320"/>
-          </a:xfrm>
-          <a:prstGeom prst="roundRect">
-            <a:avLst>
-              <a:gd name="adj" fmla="val 50000"/>
-            </a:avLst>
-          </a:prstGeom>
-          <a:solidFill>
-            <a:srgbClr val="E7ECF5"/>
-          </a:solidFill>
-          <a:ln w="9525">
-            <a:solidFill>
-              <a:srgbClr val="004694"/>
-            </a:solidFill>
-          </a:ln>
-          <a:effectLst/>
-        </p:spPr>
-        <p:style>
-          <a:lnRef idx="1">
-            <a:schemeClr val="accent1"/>
-          </a:lnRef>
-          <a:fillRef idx="3">
-            <a:schemeClr val="accent1"/>
-          </a:fillRef>
-          <a:effectRef idx="2">
-            <a:schemeClr val="accent1"/>
-          </a:effectRef>
-          <a:fontRef idx="minor">
-            <a:schemeClr val="lt1"/>
-          </a:fontRef>
-        </p:style>
-        <p:txBody>
-          <a:bodyPr rtlCol="0" anchor="ctr" lIns="0" rIns="0" tIns="0" bIns="0"/>
-          <a:lstStyle/>
-          <a:p>
-            <a:pPr algn="ctr"/>
-            <a:r>
-              <a:rPr sz="1000" b="1" i="0">
-                <a:solidFill>
-                  <a:srgbClr val="004694"/>
-                </a:solidFill>
-                <a:latin typeface="Consolas"/>
-              </a:rPr>
-              <a:t>VS Code</a:t>
-            </a:r>
-          </a:p>
-        </p:txBody>
-      </p:sp>
-      <p:sp>
-        <p:nvSpPr>
-          <p:cNvPr id="16" name="Rounded Rectangle 15"/>
-          <p:cNvSpPr/>
-          <p:nvPr/>
-        </p:nvSpPr>
-        <p:spPr>
-          <a:xfrm>
-            <a:off x="6233007" y="2103120"/>
-            <a:ext cx="5455767" cy="2834640"/>
-          </a:xfrm>
-          <a:prstGeom prst="roundRect">
-            <a:avLst>
-              <a:gd name="adj" fmla="val 4500"/>
-            </a:avLst>
-          </a:prstGeom>
-          <a:solidFill>
-            <a:srgbClr val="F6F8FB"/>
-          </a:solidFill>
-          <a:ln w="12700">
-            <a:solidFill>
-              <a:srgbClr val="DBE1EA"/>
-            </a:solidFill>
-          </a:ln>
-          <a:effectLst/>
-        </p:spPr>
-        <p:style>
-          <a:lnRef idx="1">
-            <a:schemeClr val="accent1"/>
-          </a:lnRef>
-          <a:fillRef idx="3">
-            <a:schemeClr val="accent1"/>
-          </a:fillRef>
-          <a:effectRef idx="2">
-            <a:schemeClr val="accent1"/>
-          </a:effectRef>
-          <a:fontRef idx="minor">
-            <a:schemeClr val="lt1"/>
-          </a:fontRef>
-        </p:style>
-        <p:txBody>
-          <a:bodyPr rtlCol="0" anchor="ctr"/>
-          <a:lstStyle/>
-          <a:p>
-            <a:pPr algn="ctr"/>
-          </a:p>
-        </p:txBody>
-      </p:sp>
-      <p:sp>
-        <p:nvSpPr>
-          <p:cNvPr id="17" name="TextBox 16"/>
+          </a:p>
+        </p:txBody>
+      </p:sp>
+      <p:sp>
+        <p:nvSpPr>
+          <p:cNvPr id="18" name="TextBox 17"/>
           <p:cNvSpPr txBox="1"/>
           <p:nvPr/>
         </p:nvSpPr>
         <p:spPr>
           <a:xfrm>
-            <a:off x="6434175" y="2304288"/>
-            <a:ext cx="5053431" cy="219456"/>
+            <a:off x="6425031" y="4475988"/>
+            <a:ext cx="5062575" cy="1677924"/>
           </a:xfrm>
           <a:prstGeom prst="rect">
             <a:avLst/>
@@ -5357,482 +5696,147 @@
           </a:bodyPr>
           <a:lstStyle/>
           <a:p>
-            <a:r>
-              <a:rPr sz="950" b="1" i="0">
-                <a:solidFill>
-                  <a:srgbClr val="0E93B4"/>
+            <a:pPr>
+              <a:spcAft>
+                <a:spcPts val="100"/>
+              </a:spcAft>
+            </a:pPr>
+            <a:r>
+              <a:rPr sz="900" b="0" i="0">
+                <a:solidFill>
+                  <a:srgbClr val="DBE8FB"/>
                 </a:solidFill>
                 <a:latin typeface="Consolas"/>
               </a:rPr>
-              <a:t>DONANIM &amp; PROTOKOLLER</a:t>
-            </a:r>
-          </a:p>
-        </p:txBody>
-      </p:sp>
-      <p:sp>
-        <p:nvSpPr>
-          <p:cNvPr id="18" name="TextBox 17"/>
-          <p:cNvSpPr txBox="1"/>
-          <p:nvPr/>
-        </p:nvSpPr>
-        <p:spPr>
-          <a:xfrm>
-            <a:off x="6434175" y="2578608"/>
-            <a:ext cx="5053431" cy="320040"/>
-          </a:xfrm>
-          <a:prstGeom prst="rect">
-            <a:avLst/>
-          </a:prstGeom>
-          <a:noFill/>
-        </p:spPr>
-        <p:txBody>
-          <a:bodyPr wrap="square" lIns="0" rIns="0" tIns="0" bIns="0">
-            <a:spAutoFit/>
-          </a:bodyPr>
-          <a:lstStyle/>
-          <a:p>
-            <a:r>
-              <a:rPr sz="1500" b="1" i="0">
-                <a:solidFill>
-                  <a:srgbClr val="101826"/>
-                </a:solidFill>
-                <a:latin typeface="Calibri"/>
-              </a:rPr>
-              <a:t>Nasıl Çalıştığını Öğrendiğim Katmanlar</a:t>
-            </a:r>
-          </a:p>
-        </p:txBody>
-      </p:sp>
-      <p:sp>
-        <p:nvSpPr>
-          <p:cNvPr id="19" name="Rounded Rectangle 18"/>
-          <p:cNvSpPr/>
-          <p:nvPr/>
-        </p:nvSpPr>
-        <p:spPr>
-          <a:xfrm>
-            <a:off x="6434175" y="2962656"/>
-            <a:ext cx="676656" cy="274320"/>
-          </a:xfrm>
-          <a:prstGeom prst="roundRect">
-            <a:avLst>
-              <a:gd name="adj" fmla="val 50000"/>
-            </a:avLst>
-          </a:prstGeom>
-          <a:solidFill>
-            <a:srgbClr val="E7ECF5"/>
-          </a:solidFill>
-          <a:ln w="9525">
-            <a:solidFill>
-              <a:srgbClr val="004694"/>
-            </a:solidFill>
-          </a:ln>
-          <a:effectLst/>
-        </p:spPr>
-        <p:style>
-          <a:lnRef idx="1">
-            <a:schemeClr val="accent1"/>
-          </a:lnRef>
-          <a:fillRef idx="3">
-            <a:schemeClr val="accent1"/>
-          </a:fillRef>
-          <a:effectRef idx="2">
-            <a:schemeClr val="accent1"/>
-          </a:effectRef>
-          <a:fontRef idx="minor">
-            <a:schemeClr val="lt1"/>
-          </a:fontRef>
-        </p:style>
-        <p:txBody>
-          <a:bodyPr rtlCol="0" anchor="ctr" lIns="0" rIns="0" tIns="0" bIns="0"/>
-          <a:lstStyle/>
-          <a:p>
-            <a:pPr algn="ctr"/>
-            <a:r>
-              <a:rPr sz="1000" b="1" i="0">
-                <a:solidFill>
-                  <a:srgbClr val="004694"/>
+              <a:t>ETH_Status_t ETH_PHY_Bringup(uint8_t addr) {</a:t>
+            </a:r>
+          </a:p>
+          <a:p>
+            <a:pPr>
+              <a:spcAft>
+                <a:spcPts val="100"/>
+              </a:spcAft>
+            </a:pPr>
+            <a:r>
+              <a:rPr sz="900" b="0" i="0">
+                <a:solidFill>
+                  <a:srgbClr val="DBE8FB"/>
                 </a:solidFill>
                 <a:latin typeface="Consolas"/>
               </a:rPr>
-              <a:t>DMA</a:t>
-            </a:r>
-          </a:p>
-        </p:txBody>
-      </p:sp>
-      <p:sp>
-        <p:nvSpPr>
-          <p:cNvPr id="20" name="Rounded Rectangle 19"/>
-          <p:cNvSpPr/>
-          <p:nvPr/>
-        </p:nvSpPr>
-        <p:spPr>
-          <a:xfrm>
-            <a:off x="7220559" y="2962656"/>
-            <a:ext cx="3054096" cy="274320"/>
-          </a:xfrm>
-          <a:prstGeom prst="roundRect">
-            <a:avLst>
-              <a:gd name="adj" fmla="val 50000"/>
-            </a:avLst>
-          </a:prstGeom>
-          <a:solidFill>
-            <a:srgbClr val="E7ECF5"/>
-          </a:solidFill>
-          <a:ln w="9525">
-            <a:solidFill>
-              <a:srgbClr val="004694"/>
-            </a:solidFill>
-          </a:ln>
-          <a:effectLst/>
-        </p:spPr>
-        <p:style>
-          <a:lnRef idx="1">
-            <a:schemeClr val="accent1"/>
-          </a:lnRef>
-          <a:fillRef idx="3">
-            <a:schemeClr val="accent1"/>
-          </a:fillRef>
-          <a:effectRef idx="2">
-            <a:schemeClr val="accent1"/>
-          </a:effectRef>
-          <a:fontRef idx="minor">
-            <a:schemeClr val="lt1"/>
-          </a:fontRef>
-        </p:style>
-        <p:txBody>
-          <a:bodyPr rtlCol="0" anchor="ctr" lIns="0" rIns="0" tIns="0" bIns="0"/>
-          <a:lstStyle/>
-          <a:p>
-            <a:pPr algn="ctr"/>
-            <a:r>
-              <a:rPr sz="1000" b="1" i="0">
-                <a:solidFill>
-                  <a:srgbClr val="004694"/>
+              <a:t>    /* HW+SW reset, autoneg baslat */</a:t>
+            </a:r>
+          </a:p>
+          <a:p>
+            <a:pPr>
+              <a:spcAft>
+                <a:spcPts val="100"/>
+              </a:spcAft>
+            </a:pPr>
+            <a:r>
+              <a:rPr sz="900" b="0" i="0">
+                <a:solidFill>
+                  <a:srgbClr val="DBE8FB"/>
                 </a:solidFill>
                 <a:latin typeface="Consolas"/>
               </a:rPr>
-              <a:t>Ethernet (MAC/PHY/RMII)</a:t>
-            </a:r>
-          </a:p>
-        </p:txBody>
-      </p:sp>
-      <p:sp>
-        <p:nvSpPr>
-          <p:cNvPr id="21" name="Rounded Rectangle 20"/>
-          <p:cNvSpPr/>
-          <p:nvPr/>
-        </p:nvSpPr>
-        <p:spPr>
-          <a:xfrm>
-            <a:off x="10384383" y="2962656"/>
-            <a:ext cx="676656" cy="274320"/>
-          </a:xfrm>
-          <a:prstGeom prst="roundRect">
-            <a:avLst>
-              <a:gd name="adj" fmla="val 50000"/>
-            </a:avLst>
-          </a:prstGeom>
-          <a:solidFill>
-            <a:srgbClr val="E7ECF5"/>
-          </a:solidFill>
-          <a:ln w="9525">
-            <a:solidFill>
-              <a:srgbClr val="004694"/>
-            </a:solidFill>
-          </a:ln>
-          <a:effectLst/>
-        </p:spPr>
-        <p:style>
-          <a:lnRef idx="1">
-            <a:schemeClr val="accent1"/>
-          </a:lnRef>
-          <a:fillRef idx="3">
-            <a:schemeClr val="accent1"/>
-          </a:fillRef>
-          <a:effectRef idx="2">
-            <a:schemeClr val="accent1"/>
-          </a:effectRef>
-          <a:fontRef idx="minor">
-            <a:schemeClr val="lt1"/>
-          </a:fontRef>
-        </p:style>
-        <p:txBody>
-          <a:bodyPr rtlCol="0" anchor="ctr" lIns="0" rIns="0" tIns="0" bIns="0"/>
-          <a:lstStyle/>
-          <a:p>
-            <a:pPr algn="ctr"/>
-            <a:r>
-              <a:rPr sz="1000" b="1" i="0">
-                <a:solidFill>
-                  <a:srgbClr val="004694"/>
+              <a:t>}</a:t>
+            </a:r>
+          </a:p>
+          <a:p>
+            <a:pPr>
+              <a:spcAft>
+                <a:spcPts val="100"/>
+              </a:spcAft>
+            </a:pPr>
+            <a:r>
+              <a:rPr sz="900" b="0" i="0">
+                <a:solidFill>
+                  <a:srgbClr val="DBE8FB"/>
                 </a:solidFill>
                 <a:latin typeface="Consolas"/>
               </a:rPr>
-              <a:t>I2C</a:t>
-            </a:r>
-          </a:p>
-        </p:txBody>
-      </p:sp>
-      <p:sp>
-        <p:nvSpPr>
-          <p:cNvPr id="22" name="Rounded Rectangle 21"/>
-          <p:cNvSpPr/>
-          <p:nvPr/>
-        </p:nvSpPr>
-        <p:spPr>
-          <a:xfrm>
-            <a:off x="6434175" y="3291840"/>
-            <a:ext cx="676656" cy="274320"/>
-          </a:xfrm>
-          <a:prstGeom prst="roundRect">
-            <a:avLst>
-              <a:gd name="adj" fmla="val 50000"/>
-            </a:avLst>
-          </a:prstGeom>
-          <a:solidFill>
-            <a:srgbClr val="E7ECF5"/>
-          </a:solidFill>
-          <a:ln w="9525">
-            <a:solidFill>
-              <a:srgbClr val="004694"/>
-            </a:solidFill>
-          </a:ln>
-          <a:effectLst/>
-        </p:spPr>
-        <p:style>
-          <a:lnRef idx="1">
-            <a:schemeClr val="accent1"/>
-          </a:lnRef>
-          <a:fillRef idx="3">
-            <a:schemeClr val="accent1"/>
-          </a:fillRef>
-          <a:effectRef idx="2">
-            <a:schemeClr val="accent1"/>
-          </a:effectRef>
-          <a:fontRef idx="minor">
-            <a:schemeClr val="lt1"/>
-          </a:fontRef>
-        </p:style>
-        <p:txBody>
-          <a:bodyPr rtlCol="0" anchor="ctr" lIns="0" rIns="0" tIns="0" bIns="0"/>
-          <a:lstStyle/>
-          <a:p>
-            <a:pPr algn="ctr"/>
-            <a:r>
-              <a:rPr sz="1000" b="1" i="0">
-                <a:solidFill>
-                  <a:srgbClr val="004694"/>
+              <a:t>ETH_Status_t ETH_PHY_GetSpeedDuplex(uint8_t addr,</a:t>
+            </a:r>
+          </a:p>
+          <a:p>
+            <a:pPr>
+              <a:spcAft>
+                <a:spcPts val="100"/>
+              </a:spcAft>
+            </a:pPr>
+            <a:r>
+              <a:rPr sz="900" b="0" i="0">
+                <a:solidFill>
+                  <a:srgbClr val="DBE8FB"/>
                 </a:solidFill>
                 <a:latin typeface="Consolas"/>
               </a:rPr>
-              <a:t>SPI</a:t>
-            </a:r>
-          </a:p>
-        </p:txBody>
-      </p:sp>
-      <p:sp>
-        <p:nvSpPr>
-          <p:cNvPr id="23" name="Rounded Rectangle 22"/>
-          <p:cNvSpPr/>
-          <p:nvPr/>
-        </p:nvSpPr>
-        <p:spPr>
-          <a:xfrm>
-            <a:off x="7220559" y="3291840"/>
-            <a:ext cx="795528" cy="274320"/>
-          </a:xfrm>
-          <a:prstGeom prst="roundRect">
-            <a:avLst>
-              <a:gd name="adj" fmla="val 50000"/>
-            </a:avLst>
-          </a:prstGeom>
-          <a:solidFill>
-            <a:srgbClr val="E7ECF5"/>
-          </a:solidFill>
-          <a:ln w="9525">
-            <a:solidFill>
-              <a:srgbClr val="004694"/>
-            </a:solidFill>
-          </a:ln>
-          <a:effectLst/>
-        </p:spPr>
-        <p:style>
-          <a:lnRef idx="1">
-            <a:schemeClr val="accent1"/>
-          </a:lnRef>
-          <a:fillRef idx="3">
-            <a:schemeClr val="accent1"/>
-          </a:fillRef>
-          <a:effectRef idx="2">
-            <a:schemeClr val="accent1"/>
-          </a:effectRef>
-          <a:fontRef idx="minor">
-            <a:schemeClr val="lt1"/>
-          </a:fontRef>
-        </p:style>
-        <p:txBody>
-          <a:bodyPr rtlCol="0" anchor="ctr" lIns="0" rIns="0" tIns="0" bIns="0"/>
-          <a:lstStyle/>
-          <a:p>
-            <a:pPr algn="ctr"/>
-            <a:r>
-              <a:rPr sz="1000" b="1" i="0">
-                <a:solidFill>
-                  <a:srgbClr val="004694"/>
+              <a:t>        uint16_t *speed, bool *fd) { ... }</a:t>
+            </a:r>
+          </a:p>
+          <a:p>
+            <a:pPr>
+              <a:spcAft>
+                <a:spcPts val="100"/>
+              </a:spcAft>
+            </a:pPr>
+            <a:r>
+              <a:rPr sz="900" b="0" i="0">
+                <a:solidFill>
+                  <a:srgbClr val="DBE8FB"/>
                 </a:solidFill>
                 <a:latin typeface="Consolas"/>
               </a:rPr>
-              <a:t>UART</a:t>
-            </a:r>
-          </a:p>
-        </p:txBody>
-      </p:sp>
-      <p:sp>
-        <p:nvSpPr>
-          <p:cNvPr id="24" name="Rounded Rectangle 23"/>
-          <p:cNvSpPr/>
-          <p:nvPr/>
-        </p:nvSpPr>
-        <p:spPr>
-          <a:xfrm>
-            <a:off x="8125815" y="3291840"/>
-            <a:ext cx="2221992" cy="274320"/>
-          </a:xfrm>
-          <a:prstGeom prst="roundRect">
-            <a:avLst>
-              <a:gd name="adj" fmla="val 50000"/>
-            </a:avLst>
-          </a:prstGeom>
-          <a:solidFill>
-            <a:srgbClr val="E7ECF5"/>
-          </a:solidFill>
-          <a:ln w="9525">
-            <a:solidFill>
-              <a:srgbClr val="004694"/>
-            </a:solidFill>
-          </a:ln>
-          <a:effectLst/>
-        </p:spPr>
-        <p:style>
-          <a:lnRef idx="1">
-            <a:schemeClr val="accent1"/>
-          </a:lnRef>
-          <a:fillRef idx="3">
-            <a:schemeClr val="accent1"/>
-          </a:fillRef>
-          <a:effectRef idx="2">
-            <a:schemeClr val="accent1"/>
-          </a:effectRef>
-          <a:fontRef idx="minor">
-            <a:schemeClr val="lt1"/>
-          </a:fontRef>
-        </p:style>
-        <p:txBody>
-          <a:bodyPr rtlCol="0" anchor="ctr" lIns="0" rIns="0" tIns="0" bIns="0"/>
-          <a:lstStyle/>
-          <a:p>
-            <a:pPr algn="ctr"/>
-            <a:r>
-              <a:rPr sz="1000" b="1" i="0">
-                <a:solidFill>
-                  <a:srgbClr val="004694"/>
+              <a:t>ETH_Status_t ETH_PHY_SetLoopback(uint8_t a, bool e) { ... }</a:t>
+            </a:r>
+          </a:p>
+          <a:p>
+            <a:pPr>
+              <a:spcAft>
+                <a:spcPts val="100"/>
+              </a:spcAft>
+            </a:pPr>
+            <a:r>
+              <a:rPr sz="900" b="0" i="0">
+                <a:solidFill>
+                  <a:srgbClr val="DBE8FB"/>
                 </a:solidFill>
                 <a:latin typeface="Consolas"/>
               </a:rPr>
-              <a:t>Interrupt (NVIC)</a:t>
-            </a:r>
-          </a:p>
-        </p:txBody>
-      </p:sp>
-      <p:sp>
-        <p:nvSpPr>
-          <p:cNvPr id="25" name="Rounded Rectangle 24"/>
-          <p:cNvSpPr/>
-          <p:nvPr/>
-        </p:nvSpPr>
-        <p:spPr>
-          <a:xfrm>
-            <a:off x="6434175" y="3621024"/>
-            <a:ext cx="2459736" cy="274320"/>
-          </a:xfrm>
-          <a:prstGeom prst="roundRect">
-            <a:avLst>
-              <a:gd name="adj" fmla="val 50000"/>
-            </a:avLst>
-          </a:prstGeom>
-          <a:solidFill>
-            <a:srgbClr val="E7ECF5"/>
-          </a:solidFill>
-          <a:ln w="9525">
-            <a:solidFill>
-              <a:srgbClr val="004694"/>
-            </a:solidFill>
-          </a:ln>
-          <a:effectLst/>
-        </p:spPr>
-        <p:style>
-          <a:lnRef idx="1">
-            <a:schemeClr val="accent1"/>
-          </a:lnRef>
-          <a:fillRef idx="3">
-            <a:schemeClr val="accent1"/>
-          </a:fillRef>
-          <a:effectRef idx="2">
-            <a:schemeClr val="accent1"/>
-          </a:effectRef>
-          <a:fontRef idx="minor">
-            <a:schemeClr val="lt1"/>
-          </a:fontRef>
-        </p:style>
-        <p:txBody>
-          <a:bodyPr rtlCol="0" anchor="ctr" lIns="0" rIns="0" tIns="0" bIns="0"/>
-          <a:lstStyle/>
-          <a:p>
-            <a:pPr algn="ctr"/>
-            <a:r>
-              <a:rPr sz="1000" b="1" i="0">
-                <a:solidFill>
-                  <a:srgbClr val="004694"/>
+              <a:t>const char *ETH_PHY_GetName(void) {</a:t>
+            </a:r>
+          </a:p>
+          <a:p>
+            <a:pPr>
+              <a:spcAft>
+                <a:spcPts val="100"/>
+              </a:spcAft>
+            </a:pPr>
+            <a:r>
+              <a:rPr sz="900" b="0" i="0">
+                <a:solidFill>
+                  <a:srgbClr val="DBE8FB"/>
                 </a:solidFill>
                 <a:latin typeface="Consolas"/>
               </a:rPr>
-              <a:t>FreeRTOS temelleri</a:t>
-            </a:r>
-          </a:p>
-        </p:txBody>
-      </p:sp>
-      <p:sp>
-        <p:nvSpPr>
-          <p:cNvPr id="26" name="TextBox 25"/>
-          <p:cNvSpPr txBox="1"/>
-          <p:nvPr/>
-        </p:nvSpPr>
-        <p:spPr>
-          <a:xfrm>
-            <a:off x="502920" y="5120640"/>
-            <a:ext cx="11185855" cy="457200"/>
-          </a:xfrm>
-          <a:prstGeom prst="rect">
-            <a:avLst/>
-          </a:prstGeom>
-          <a:noFill/>
-        </p:spPr>
-        <p:txBody>
-          <a:bodyPr wrap="square" lIns="0" rIns="0" tIns="0" bIns="0">
-            <a:spAutoFit/>
-          </a:bodyPr>
-          <a:lstStyle/>
-          <a:p>
-            <a:pPr algn="ctr"/>
-            <a:r>
-              <a:rPr sz="1150" b="0" i="1">
-                <a:solidFill>
-                  <a:srgbClr val="5B6B80"/>
-                </a:solidFill>
-                <a:latin typeface="Calibri"/>
-              </a:rPr>
-              <a:t>Bare-metal kod yazma pratiği + farklı işlemci çekirdeklerini (Cortex-M4/M7/M33) ve farklı entegreleri tek bir projede bir araya getirme deneyimi.</a:t>
+              <a:t>    return "YENI_PHY";</a:t>
+            </a:r>
+          </a:p>
+          <a:p>
+            <a:pPr>
+              <a:spcAft>
+                <a:spcPts val="100"/>
+              </a:spcAft>
+            </a:pPr>
+            <a:r>
+              <a:rPr sz="900" b="0" i="0">
+                <a:solidFill>
+                  <a:srgbClr val="DBE8FB"/>
+                </a:solidFill>
+                <a:latin typeface="Consolas"/>
+              </a:rPr>
+              <a:t>}</a:t>
             </a:r>
           </a:p>
         </p:txBody>
@@ -5908,7 +5912,7 @@
                 </a:solidFill>
                 <a:latin typeface="Consolas"/>
               </a:rPr>
-              <a:t>13 · KAZANIMLAR</a:t>
+              <a:t>13 · ARAÇLAR &amp; TEKNOLOJILER</a:t>
             </a:r>
           </a:p>
         </p:txBody>
@@ -5942,7 +5946,7 @@
                 </a:solidFill>
                 <a:latin typeface="Calibri"/>
               </a:rPr>
-              <a:t>Bu stajın ve projenin bana kattıkları</a:t>
+              <a:t>Tek projede birçok farklı teknolojiyi bir araya getirdim</a:t>
             </a:r>
           </a:p>
         </p:txBody>
@@ -5976,7 +5980,7 @@
                 </a:solidFill>
                 <a:latin typeface="Calibri"/>
               </a:rPr>
-              <a:t>Eğitimle başlayıp gereksinimden teste uzanan tam bir mühendislik döngüsünü, tek bir projede kendi ellerimle tamamladım — üç boyutta öğrenme ve somut bir çıktı.</a:t>
+              <a:t>Sadece C kodu yazmadım; geliştirme ortamından donanım protokollerine kadar birçok konuda uygulamalı pratik yaptım.</a:t>
             </a:r>
           </a:p>
         </p:txBody>
@@ -6045,7 +6049,1171 @@
                 </a:solidFill>
                 <a:latin typeface="Calibri"/>
               </a:rPr>
-              <a:t>14 / 14</a:t>
+              <a:t>14 / 15</a:t>
+            </a:r>
+          </a:p>
+        </p:txBody>
+      </p:sp>
+      <p:sp>
+        <p:nvSpPr>
+          <p:cNvPr id="8" name="Rounded Rectangle 7"/>
+          <p:cNvSpPr/>
+          <p:nvPr/>
+        </p:nvSpPr>
+        <p:spPr>
+          <a:xfrm>
+            <a:off x="502920" y="2103120"/>
+            <a:ext cx="5455767" cy="2834640"/>
+          </a:xfrm>
+          <a:prstGeom prst="roundRect">
+            <a:avLst>
+              <a:gd name="adj" fmla="val 4500"/>
+            </a:avLst>
+          </a:prstGeom>
+          <a:solidFill>
+            <a:srgbClr val="F6F8FB"/>
+          </a:solidFill>
+          <a:ln w="12700">
+            <a:solidFill>
+              <a:srgbClr val="DBE1EA"/>
+            </a:solidFill>
+          </a:ln>
+          <a:effectLst/>
+        </p:spPr>
+        <p:style>
+          <a:lnRef idx="1">
+            <a:schemeClr val="accent1"/>
+          </a:lnRef>
+          <a:fillRef idx="3">
+            <a:schemeClr val="accent1"/>
+          </a:fillRef>
+          <a:effectRef idx="2">
+            <a:schemeClr val="accent1"/>
+          </a:effectRef>
+          <a:fontRef idx="minor">
+            <a:schemeClr val="lt1"/>
+          </a:fontRef>
+        </p:style>
+        <p:txBody>
+          <a:bodyPr rtlCol="0" anchor="ctr"/>
+          <a:lstStyle/>
+          <a:p>
+            <a:pPr algn="ctr"/>
+          </a:p>
+        </p:txBody>
+      </p:sp>
+      <p:sp>
+        <p:nvSpPr>
+          <p:cNvPr id="9" name="TextBox 8"/>
+          <p:cNvSpPr txBox="1"/>
+          <p:nvPr/>
+        </p:nvSpPr>
+        <p:spPr>
+          <a:xfrm>
+            <a:off x="704088" y="2304288"/>
+            <a:ext cx="5053431" cy="219456"/>
+          </a:xfrm>
+          <a:prstGeom prst="rect">
+            <a:avLst/>
+          </a:prstGeom>
+          <a:noFill/>
+        </p:spPr>
+        <p:txBody>
+          <a:bodyPr wrap="square" lIns="0" rIns="0" tIns="0" bIns="0">
+            <a:spAutoFit/>
+          </a:bodyPr>
+          <a:lstStyle/>
+          <a:p>
+            <a:r>
+              <a:rPr sz="950" b="1" i="0">
+                <a:solidFill>
+                  <a:srgbClr val="0E93B4"/>
+                </a:solidFill>
+                <a:latin typeface="Consolas"/>
+              </a:rPr>
+              <a:t>GELIŞTIRME ORTAMI</a:t>
+            </a:r>
+          </a:p>
+        </p:txBody>
+      </p:sp>
+      <p:sp>
+        <p:nvSpPr>
+          <p:cNvPr id="10" name="TextBox 9"/>
+          <p:cNvSpPr txBox="1"/>
+          <p:nvPr/>
+        </p:nvSpPr>
+        <p:spPr>
+          <a:xfrm>
+            <a:off x="704088" y="2578608"/>
+            <a:ext cx="5053431" cy="320040"/>
+          </a:xfrm>
+          <a:prstGeom prst="rect">
+            <a:avLst/>
+          </a:prstGeom>
+          <a:noFill/>
+        </p:spPr>
+        <p:txBody>
+          <a:bodyPr wrap="square" lIns="0" rIns="0" tIns="0" bIns="0">
+            <a:spAutoFit/>
+          </a:bodyPr>
+          <a:lstStyle/>
+          <a:p>
+            <a:r>
+              <a:rPr sz="1500" b="1" i="0">
+                <a:solidFill>
+                  <a:srgbClr val="101826"/>
+                </a:solidFill>
+                <a:latin typeface="Calibri"/>
+              </a:rPr>
+              <a:t>Araçlar &amp; İş Akışı</a:t>
+            </a:r>
+          </a:p>
+        </p:txBody>
+      </p:sp>
+      <p:sp>
+        <p:nvSpPr>
+          <p:cNvPr id="11" name="Rounded Rectangle 10"/>
+          <p:cNvSpPr/>
+          <p:nvPr/>
+        </p:nvSpPr>
+        <p:spPr>
+          <a:xfrm>
+            <a:off x="704088" y="2962656"/>
+            <a:ext cx="914400" cy="274320"/>
+          </a:xfrm>
+          <a:prstGeom prst="roundRect">
+            <a:avLst>
+              <a:gd name="adj" fmla="val 50000"/>
+            </a:avLst>
+          </a:prstGeom>
+          <a:solidFill>
+            <a:srgbClr val="E7ECF5"/>
+          </a:solidFill>
+          <a:ln w="9525">
+            <a:solidFill>
+              <a:srgbClr val="004694"/>
+            </a:solidFill>
+          </a:ln>
+          <a:effectLst/>
+        </p:spPr>
+        <p:style>
+          <a:lnRef idx="1">
+            <a:schemeClr val="accent1"/>
+          </a:lnRef>
+          <a:fillRef idx="3">
+            <a:schemeClr val="accent1"/>
+          </a:fillRef>
+          <a:effectRef idx="2">
+            <a:schemeClr val="accent1"/>
+          </a:effectRef>
+          <a:fontRef idx="minor">
+            <a:schemeClr val="lt1"/>
+          </a:fontRef>
+        </p:style>
+        <p:txBody>
+          <a:bodyPr rtlCol="0" anchor="ctr" lIns="0" rIns="0" tIns="0" bIns="0"/>
+          <a:lstStyle/>
+          <a:p>
+            <a:pPr algn="ctr"/>
+            <a:r>
+              <a:rPr sz="1000" b="1" i="0">
+                <a:solidFill>
+                  <a:srgbClr val="004694"/>
+                </a:solidFill>
+                <a:latin typeface="Consolas"/>
+              </a:rPr>
+              <a:t>CMake</a:t>
+            </a:r>
+          </a:p>
+        </p:txBody>
+      </p:sp>
+      <p:sp>
+        <p:nvSpPr>
+          <p:cNvPr id="12" name="Rounded Rectangle 11"/>
+          <p:cNvSpPr/>
+          <p:nvPr/>
+        </p:nvSpPr>
+        <p:spPr>
+          <a:xfrm>
+            <a:off x="1728216" y="2962656"/>
+            <a:ext cx="676656" cy="274320"/>
+          </a:xfrm>
+          <a:prstGeom prst="roundRect">
+            <a:avLst>
+              <a:gd name="adj" fmla="val 50000"/>
+            </a:avLst>
+          </a:prstGeom>
+          <a:solidFill>
+            <a:srgbClr val="E7ECF5"/>
+          </a:solidFill>
+          <a:ln w="9525">
+            <a:solidFill>
+              <a:srgbClr val="004694"/>
+            </a:solidFill>
+          </a:ln>
+          <a:effectLst/>
+        </p:spPr>
+        <p:style>
+          <a:lnRef idx="1">
+            <a:schemeClr val="accent1"/>
+          </a:lnRef>
+          <a:fillRef idx="3">
+            <a:schemeClr val="accent1"/>
+          </a:fillRef>
+          <a:effectRef idx="2">
+            <a:schemeClr val="accent1"/>
+          </a:effectRef>
+          <a:fontRef idx="minor">
+            <a:schemeClr val="lt1"/>
+          </a:fontRef>
+        </p:style>
+        <p:txBody>
+          <a:bodyPr rtlCol="0" anchor="ctr" lIns="0" rIns="0" tIns="0" bIns="0"/>
+          <a:lstStyle/>
+          <a:p>
+            <a:pPr algn="ctr"/>
+            <a:r>
+              <a:rPr sz="1000" b="1" i="0">
+                <a:solidFill>
+                  <a:srgbClr val="004694"/>
+                </a:solidFill>
+                <a:latin typeface="Consolas"/>
+              </a:rPr>
+              <a:t>Git</a:t>
+            </a:r>
+          </a:p>
+        </p:txBody>
+      </p:sp>
+      <p:sp>
+        <p:nvSpPr>
+          <p:cNvPr id="13" name="Rounded Rectangle 12"/>
+          <p:cNvSpPr/>
+          <p:nvPr/>
+        </p:nvSpPr>
+        <p:spPr>
+          <a:xfrm>
+            <a:off x="2514600" y="2962656"/>
+            <a:ext cx="1627632" cy="274320"/>
+          </a:xfrm>
+          <a:prstGeom prst="roundRect">
+            <a:avLst>
+              <a:gd name="adj" fmla="val 50000"/>
+            </a:avLst>
+          </a:prstGeom>
+          <a:solidFill>
+            <a:srgbClr val="E7ECF5"/>
+          </a:solidFill>
+          <a:ln w="9525">
+            <a:solidFill>
+              <a:srgbClr val="004694"/>
+            </a:solidFill>
+          </a:ln>
+          <a:effectLst/>
+        </p:spPr>
+        <p:style>
+          <a:lnRef idx="1">
+            <a:schemeClr val="accent1"/>
+          </a:lnRef>
+          <a:fillRef idx="3">
+            <a:schemeClr val="accent1"/>
+          </a:fillRef>
+          <a:effectRef idx="2">
+            <a:schemeClr val="accent1"/>
+          </a:effectRef>
+          <a:fontRef idx="minor">
+            <a:schemeClr val="lt1"/>
+          </a:fontRef>
+        </p:style>
+        <p:txBody>
+          <a:bodyPr rtlCol="0" anchor="ctr" lIns="0" rIns="0" tIns="0" bIns="0"/>
+          <a:lstStyle/>
+          <a:p>
+            <a:pPr algn="ctr"/>
+            <a:r>
+              <a:rPr sz="1000" b="1" i="0">
+                <a:solidFill>
+                  <a:srgbClr val="004694"/>
+                </a:solidFill>
+                <a:latin typeface="Consolas"/>
+              </a:rPr>
+              <a:t>GCC &amp; Ninja</a:t>
+            </a:r>
+          </a:p>
+        </p:txBody>
+      </p:sp>
+      <p:sp>
+        <p:nvSpPr>
+          <p:cNvPr id="14" name="Rounded Rectangle 13"/>
+          <p:cNvSpPr/>
+          <p:nvPr/>
+        </p:nvSpPr>
+        <p:spPr>
+          <a:xfrm>
+            <a:off x="704088" y="3291840"/>
+            <a:ext cx="1627632" cy="274320"/>
+          </a:xfrm>
+          <a:prstGeom prst="roundRect">
+            <a:avLst>
+              <a:gd name="adj" fmla="val 50000"/>
+            </a:avLst>
+          </a:prstGeom>
+          <a:solidFill>
+            <a:srgbClr val="E7ECF5"/>
+          </a:solidFill>
+          <a:ln w="9525">
+            <a:solidFill>
+              <a:srgbClr val="004694"/>
+            </a:solidFill>
+          </a:ln>
+          <a:effectLst/>
+        </p:spPr>
+        <p:style>
+          <a:lnRef idx="1">
+            <a:schemeClr val="accent1"/>
+          </a:lnRef>
+          <a:fillRef idx="3">
+            <a:schemeClr val="accent1"/>
+          </a:fillRef>
+          <a:effectRef idx="2">
+            <a:schemeClr val="accent1"/>
+          </a:effectRef>
+          <a:fontRef idx="minor">
+            <a:schemeClr val="lt1"/>
+          </a:fontRef>
+        </p:style>
+        <p:txBody>
+          <a:bodyPr rtlCol="0" anchor="ctr" lIns="0" rIns="0" tIns="0" bIns="0"/>
+          <a:lstStyle/>
+          <a:p>
+            <a:pPr algn="ctr"/>
+            <a:r>
+              <a:rPr sz="1000" b="1" i="0">
+                <a:solidFill>
+                  <a:srgbClr val="004694"/>
+                </a:solidFill>
+                <a:latin typeface="Consolas"/>
+              </a:rPr>
+              <a:t>STM32CubeMX</a:t>
+            </a:r>
+          </a:p>
+        </p:txBody>
+      </p:sp>
+      <p:sp>
+        <p:nvSpPr>
+          <p:cNvPr id="15" name="Rounded Rectangle 14"/>
+          <p:cNvSpPr/>
+          <p:nvPr/>
+        </p:nvSpPr>
+        <p:spPr>
+          <a:xfrm>
+            <a:off x="2441448" y="3291840"/>
+            <a:ext cx="1152144" cy="274320"/>
+          </a:xfrm>
+          <a:prstGeom prst="roundRect">
+            <a:avLst>
+              <a:gd name="adj" fmla="val 50000"/>
+            </a:avLst>
+          </a:prstGeom>
+          <a:solidFill>
+            <a:srgbClr val="E7ECF5"/>
+          </a:solidFill>
+          <a:ln w="9525">
+            <a:solidFill>
+              <a:srgbClr val="004694"/>
+            </a:solidFill>
+          </a:ln>
+          <a:effectLst/>
+        </p:spPr>
+        <p:style>
+          <a:lnRef idx="1">
+            <a:schemeClr val="accent1"/>
+          </a:lnRef>
+          <a:fillRef idx="3">
+            <a:schemeClr val="accent1"/>
+          </a:fillRef>
+          <a:effectRef idx="2">
+            <a:schemeClr val="accent1"/>
+          </a:effectRef>
+          <a:fontRef idx="minor">
+            <a:schemeClr val="lt1"/>
+          </a:fontRef>
+        </p:style>
+        <p:txBody>
+          <a:bodyPr rtlCol="0" anchor="ctr" lIns="0" rIns="0" tIns="0" bIns="0"/>
+          <a:lstStyle/>
+          <a:p>
+            <a:pPr algn="ctr"/>
+            <a:r>
+              <a:rPr sz="1000" b="1" i="0">
+                <a:solidFill>
+                  <a:srgbClr val="004694"/>
+                </a:solidFill>
+                <a:latin typeface="Consolas"/>
+              </a:rPr>
+              <a:t>VS Code</a:t>
+            </a:r>
+          </a:p>
+        </p:txBody>
+      </p:sp>
+      <p:sp>
+        <p:nvSpPr>
+          <p:cNvPr id="16" name="Rounded Rectangle 15"/>
+          <p:cNvSpPr/>
+          <p:nvPr/>
+        </p:nvSpPr>
+        <p:spPr>
+          <a:xfrm>
+            <a:off x="6233007" y="2103120"/>
+            <a:ext cx="5455767" cy="2834640"/>
+          </a:xfrm>
+          <a:prstGeom prst="roundRect">
+            <a:avLst>
+              <a:gd name="adj" fmla="val 4500"/>
+            </a:avLst>
+          </a:prstGeom>
+          <a:solidFill>
+            <a:srgbClr val="F6F8FB"/>
+          </a:solidFill>
+          <a:ln w="12700">
+            <a:solidFill>
+              <a:srgbClr val="DBE1EA"/>
+            </a:solidFill>
+          </a:ln>
+          <a:effectLst/>
+        </p:spPr>
+        <p:style>
+          <a:lnRef idx="1">
+            <a:schemeClr val="accent1"/>
+          </a:lnRef>
+          <a:fillRef idx="3">
+            <a:schemeClr val="accent1"/>
+          </a:fillRef>
+          <a:effectRef idx="2">
+            <a:schemeClr val="accent1"/>
+          </a:effectRef>
+          <a:fontRef idx="minor">
+            <a:schemeClr val="lt1"/>
+          </a:fontRef>
+        </p:style>
+        <p:txBody>
+          <a:bodyPr rtlCol="0" anchor="ctr"/>
+          <a:lstStyle/>
+          <a:p>
+            <a:pPr algn="ctr"/>
+          </a:p>
+        </p:txBody>
+      </p:sp>
+      <p:sp>
+        <p:nvSpPr>
+          <p:cNvPr id="17" name="TextBox 16"/>
+          <p:cNvSpPr txBox="1"/>
+          <p:nvPr/>
+        </p:nvSpPr>
+        <p:spPr>
+          <a:xfrm>
+            <a:off x="6434175" y="2304288"/>
+            <a:ext cx="5053431" cy="219456"/>
+          </a:xfrm>
+          <a:prstGeom prst="rect">
+            <a:avLst/>
+          </a:prstGeom>
+          <a:noFill/>
+        </p:spPr>
+        <p:txBody>
+          <a:bodyPr wrap="square" lIns="0" rIns="0" tIns="0" bIns="0">
+            <a:spAutoFit/>
+          </a:bodyPr>
+          <a:lstStyle/>
+          <a:p>
+            <a:r>
+              <a:rPr sz="950" b="1" i="0">
+                <a:solidFill>
+                  <a:srgbClr val="0E93B4"/>
+                </a:solidFill>
+                <a:latin typeface="Consolas"/>
+              </a:rPr>
+              <a:t>DONANIM &amp; PROTOKOLLER</a:t>
+            </a:r>
+          </a:p>
+        </p:txBody>
+      </p:sp>
+      <p:sp>
+        <p:nvSpPr>
+          <p:cNvPr id="18" name="TextBox 17"/>
+          <p:cNvSpPr txBox="1"/>
+          <p:nvPr/>
+        </p:nvSpPr>
+        <p:spPr>
+          <a:xfrm>
+            <a:off x="6434175" y="2578608"/>
+            <a:ext cx="5053431" cy="320040"/>
+          </a:xfrm>
+          <a:prstGeom prst="rect">
+            <a:avLst/>
+          </a:prstGeom>
+          <a:noFill/>
+        </p:spPr>
+        <p:txBody>
+          <a:bodyPr wrap="square" lIns="0" rIns="0" tIns="0" bIns="0">
+            <a:spAutoFit/>
+          </a:bodyPr>
+          <a:lstStyle/>
+          <a:p>
+            <a:r>
+              <a:rPr sz="1500" b="1" i="0">
+                <a:solidFill>
+                  <a:srgbClr val="101826"/>
+                </a:solidFill>
+                <a:latin typeface="Calibri"/>
+              </a:rPr>
+              <a:t>Nasıl Çalıştığını Öğrendiğim Katmanlar</a:t>
+            </a:r>
+          </a:p>
+        </p:txBody>
+      </p:sp>
+      <p:sp>
+        <p:nvSpPr>
+          <p:cNvPr id="19" name="Rounded Rectangle 18"/>
+          <p:cNvSpPr/>
+          <p:nvPr/>
+        </p:nvSpPr>
+        <p:spPr>
+          <a:xfrm>
+            <a:off x="6434175" y="2962656"/>
+            <a:ext cx="676656" cy="274320"/>
+          </a:xfrm>
+          <a:prstGeom prst="roundRect">
+            <a:avLst>
+              <a:gd name="adj" fmla="val 50000"/>
+            </a:avLst>
+          </a:prstGeom>
+          <a:solidFill>
+            <a:srgbClr val="E7ECF5"/>
+          </a:solidFill>
+          <a:ln w="9525">
+            <a:solidFill>
+              <a:srgbClr val="004694"/>
+            </a:solidFill>
+          </a:ln>
+          <a:effectLst/>
+        </p:spPr>
+        <p:style>
+          <a:lnRef idx="1">
+            <a:schemeClr val="accent1"/>
+          </a:lnRef>
+          <a:fillRef idx="3">
+            <a:schemeClr val="accent1"/>
+          </a:fillRef>
+          <a:effectRef idx="2">
+            <a:schemeClr val="accent1"/>
+          </a:effectRef>
+          <a:fontRef idx="minor">
+            <a:schemeClr val="lt1"/>
+          </a:fontRef>
+        </p:style>
+        <p:txBody>
+          <a:bodyPr rtlCol="0" anchor="ctr" lIns="0" rIns="0" tIns="0" bIns="0"/>
+          <a:lstStyle/>
+          <a:p>
+            <a:pPr algn="ctr"/>
+            <a:r>
+              <a:rPr sz="1000" b="1" i="0">
+                <a:solidFill>
+                  <a:srgbClr val="004694"/>
+                </a:solidFill>
+                <a:latin typeface="Consolas"/>
+              </a:rPr>
+              <a:t>DMA</a:t>
+            </a:r>
+          </a:p>
+        </p:txBody>
+      </p:sp>
+      <p:sp>
+        <p:nvSpPr>
+          <p:cNvPr id="20" name="Rounded Rectangle 19"/>
+          <p:cNvSpPr/>
+          <p:nvPr/>
+        </p:nvSpPr>
+        <p:spPr>
+          <a:xfrm>
+            <a:off x="7220559" y="2962656"/>
+            <a:ext cx="3054096" cy="274320"/>
+          </a:xfrm>
+          <a:prstGeom prst="roundRect">
+            <a:avLst>
+              <a:gd name="adj" fmla="val 50000"/>
+            </a:avLst>
+          </a:prstGeom>
+          <a:solidFill>
+            <a:srgbClr val="E7ECF5"/>
+          </a:solidFill>
+          <a:ln w="9525">
+            <a:solidFill>
+              <a:srgbClr val="004694"/>
+            </a:solidFill>
+          </a:ln>
+          <a:effectLst/>
+        </p:spPr>
+        <p:style>
+          <a:lnRef idx="1">
+            <a:schemeClr val="accent1"/>
+          </a:lnRef>
+          <a:fillRef idx="3">
+            <a:schemeClr val="accent1"/>
+          </a:fillRef>
+          <a:effectRef idx="2">
+            <a:schemeClr val="accent1"/>
+          </a:effectRef>
+          <a:fontRef idx="minor">
+            <a:schemeClr val="lt1"/>
+          </a:fontRef>
+        </p:style>
+        <p:txBody>
+          <a:bodyPr rtlCol="0" anchor="ctr" lIns="0" rIns="0" tIns="0" bIns="0"/>
+          <a:lstStyle/>
+          <a:p>
+            <a:pPr algn="ctr"/>
+            <a:r>
+              <a:rPr sz="1000" b="1" i="0">
+                <a:solidFill>
+                  <a:srgbClr val="004694"/>
+                </a:solidFill>
+                <a:latin typeface="Consolas"/>
+              </a:rPr>
+              <a:t>Ethernet (MAC/PHY/RMII)</a:t>
+            </a:r>
+          </a:p>
+        </p:txBody>
+      </p:sp>
+      <p:sp>
+        <p:nvSpPr>
+          <p:cNvPr id="21" name="Rounded Rectangle 20"/>
+          <p:cNvSpPr/>
+          <p:nvPr/>
+        </p:nvSpPr>
+        <p:spPr>
+          <a:xfrm>
+            <a:off x="10384383" y="2962656"/>
+            <a:ext cx="676656" cy="274320"/>
+          </a:xfrm>
+          <a:prstGeom prst="roundRect">
+            <a:avLst>
+              <a:gd name="adj" fmla="val 50000"/>
+            </a:avLst>
+          </a:prstGeom>
+          <a:solidFill>
+            <a:srgbClr val="E7ECF5"/>
+          </a:solidFill>
+          <a:ln w="9525">
+            <a:solidFill>
+              <a:srgbClr val="004694"/>
+            </a:solidFill>
+          </a:ln>
+          <a:effectLst/>
+        </p:spPr>
+        <p:style>
+          <a:lnRef idx="1">
+            <a:schemeClr val="accent1"/>
+          </a:lnRef>
+          <a:fillRef idx="3">
+            <a:schemeClr val="accent1"/>
+          </a:fillRef>
+          <a:effectRef idx="2">
+            <a:schemeClr val="accent1"/>
+          </a:effectRef>
+          <a:fontRef idx="minor">
+            <a:schemeClr val="lt1"/>
+          </a:fontRef>
+        </p:style>
+        <p:txBody>
+          <a:bodyPr rtlCol="0" anchor="ctr" lIns="0" rIns="0" tIns="0" bIns="0"/>
+          <a:lstStyle/>
+          <a:p>
+            <a:pPr algn="ctr"/>
+            <a:r>
+              <a:rPr sz="1000" b="1" i="0">
+                <a:solidFill>
+                  <a:srgbClr val="004694"/>
+                </a:solidFill>
+                <a:latin typeface="Consolas"/>
+              </a:rPr>
+              <a:t>I2C</a:t>
+            </a:r>
+          </a:p>
+        </p:txBody>
+      </p:sp>
+      <p:sp>
+        <p:nvSpPr>
+          <p:cNvPr id="22" name="Rounded Rectangle 21"/>
+          <p:cNvSpPr/>
+          <p:nvPr/>
+        </p:nvSpPr>
+        <p:spPr>
+          <a:xfrm>
+            <a:off x="6434175" y="3291840"/>
+            <a:ext cx="676656" cy="274320"/>
+          </a:xfrm>
+          <a:prstGeom prst="roundRect">
+            <a:avLst>
+              <a:gd name="adj" fmla="val 50000"/>
+            </a:avLst>
+          </a:prstGeom>
+          <a:solidFill>
+            <a:srgbClr val="E7ECF5"/>
+          </a:solidFill>
+          <a:ln w="9525">
+            <a:solidFill>
+              <a:srgbClr val="004694"/>
+            </a:solidFill>
+          </a:ln>
+          <a:effectLst/>
+        </p:spPr>
+        <p:style>
+          <a:lnRef idx="1">
+            <a:schemeClr val="accent1"/>
+          </a:lnRef>
+          <a:fillRef idx="3">
+            <a:schemeClr val="accent1"/>
+          </a:fillRef>
+          <a:effectRef idx="2">
+            <a:schemeClr val="accent1"/>
+          </a:effectRef>
+          <a:fontRef idx="minor">
+            <a:schemeClr val="lt1"/>
+          </a:fontRef>
+        </p:style>
+        <p:txBody>
+          <a:bodyPr rtlCol="0" anchor="ctr" lIns="0" rIns="0" tIns="0" bIns="0"/>
+          <a:lstStyle/>
+          <a:p>
+            <a:pPr algn="ctr"/>
+            <a:r>
+              <a:rPr sz="1000" b="1" i="0">
+                <a:solidFill>
+                  <a:srgbClr val="004694"/>
+                </a:solidFill>
+                <a:latin typeface="Consolas"/>
+              </a:rPr>
+              <a:t>SPI</a:t>
+            </a:r>
+          </a:p>
+        </p:txBody>
+      </p:sp>
+      <p:sp>
+        <p:nvSpPr>
+          <p:cNvPr id="23" name="Rounded Rectangle 22"/>
+          <p:cNvSpPr/>
+          <p:nvPr/>
+        </p:nvSpPr>
+        <p:spPr>
+          <a:xfrm>
+            <a:off x="7220559" y="3291840"/>
+            <a:ext cx="795528" cy="274320"/>
+          </a:xfrm>
+          <a:prstGeom prst="roundRect">
+            <a:avLst>
+              <a:gd name="adj" fmla="val 50000"/>
+            </a:avLst>
+          </a:prstGeom>
+          <a:solidFill>
+            <a:srgbClr val="E7ECF5"/>
+          </a:solidFill>
+          <a:ln w="9525">
+            <a:solidFill>
+              <a:srgbClr val="004694"/>
+            </a:solidFill>
+          </a:ln>
+          <a:effectLst/>
+        </p:spPr>
+        <p:style>
+          <a:lnRef idx="1">
+            <a:schemeClr val="accent1"/>
+          </a:lnRef>
+          <a:fillRef idx="3">
+            <a:schemeClr val="accent1"/>
+          </a:fillRef>
+          <a:effectRef idx="2">
+            <a:schemeClr val="accent1"/>
+          </a:effectRef>
+          <a:fontRef idx="minor">
+            <a:schemeClr val="lt1"/>
+          </a:fontRef>
+        </p:style>
+        <p:txBody>
+          <a:bodyPr rtlCol="0" anchor="ctr" lIns="0" rIns="0" tIns="0" bIns="0"/>
+          <a:lstStyle/>
+          <a:p>
+            <a:pPr algn="ctr"/>
+            <a:r>
+              <a:rPr sz="1000" b="1" i="0">
+                <a:solidFill>
+                  <a:srgbClr val="004694"/>
+                </a:solidFill>
+                <a:latin typeface="Consolas"/>
+              </a:rPr>
+              <a:t>UART</a:t>
+            </a:r>
+          </a:p>
+        </p:txBody>
+      </p:sp>
+      <p:sp>
+        <p:nvSpPr>
+          <p:cNvPr id="24" name="Rounded Rectangle 23"/>
+          <p:cNvSpPr/>
+          <p:nvPr/>
+        </p:nvSpPr>
+        <p:spPr>
+          <a:xfrm>
+            <a:off x="8125815" y="3291840"/>
+            <a:ext cx="2221992" cy="274320"/>
+          </a:xfrm>
+          <a:prstGeom prst="roundRect">
+            <a:avLst>
+              <a:gd name="adj" fmla="val 50000"/>
+            </a:avLst>
+          </a:prstGeom>
+          <a:solidFill>
+            <a:srgbClr val="E7ECF5"/>
+          </a:solidFill>
+          <a:ln w="9525">
+            <a:solidFill>
+              <a:srgbClr val="004694"/>
+            </a:solidFill>
+          </a:ln>
+          <a:effectLst/>
+        </p:spPr>
+        <p:style>
+          <a:lnRef idx="1">
+            <a:schemeClr val="accent1"/>
+          </a:lnRef>
+          <a:fillRef idx="3">
+            <a:schemeClr val="accent1"/>
+          </a:fillRef>
+          <a:effectRef idx="2">
+            <a:schemeClr val="accent1"/>
+          </a:effectRef>
+          <a:fontRef idx="minor">
+            <a:schemeClr val="lt1"/>
+          </a:fontRef>
+        </p:style>
+        <p:txBody>
+          <a:bodyPr rtlCol="0" anchor="ctr" lIns="0" rIns="0" tIns="0" bIns="0"/>
+          <a:lstStyle/>
+          <a:p>
+            <a:pPr algn="ctr"/>
+            <a:r>
+              <a:rPr sz="1000" b="1" i="0">
+                <a:solidFill>
+                  <a:srgbClr val="004694"/>
+                </a:solidFill>
+                <a:latin typeface="Consolas"/>
+              </a:rPr>
+              <a:t>Interrupt (NVIC)</a:t>
+            </a:r>
+          </a:p>
+        </p:txBody>
+      </p:sp>
+      <p:sp>
+        <p:nvSpPr>
+          <p:cNvPr id="25" name="Rounded Rectangle 24"/>
+          <p:cNvSpPr/>
+          <p:nvPr/>
+        </p:nvSpPr>
+        <p:spPr>
+          <a:xfrm>
+            <a:off x="6434175" y="3621024"/>
+            <a:ext cx="2459736" cy="274320"/>
+          </a:xfrm>
+          <a:prstGeom prst="roundRect">
+            <a:avLst>
+              <a:gd name="adj" fmla="val 50000"/>
+            </a:avLst>
+          </a:prstGeom>
+          <a:solidFill>
+            <a:srgbClr val="E7ECF5"/>
+          </a:solidFill>
+          <a:ln w="9525">
+            <a:solidFill>
+              <a:srgbClr val="004694"/>
+            </a:solidFill>
+          </a:ln>
+          <a:effectLst/>
+        </p:spPr>
+        <p:style>
+          <a:lnRef idx="1">
+            <a:schemeClr val="accent1"/>
+          </a:lnRef>
+          <a:fillRef idx="3">
+            <a:schemeClr val="accent1"/>
+          </a:fillRef>
+          <a:effectRef idx="2">
+            <a:schemeClr val="accent1"/>
+          </a:effectRef>
+          <a:fontRef idx="minor">
+            <a:schemeClr val="lt1"/>
+          </a:fontRef>
+        </p:style>
+        <p:txBody>
+          <a:bodyPr rtlCol="0" anchor="ctr" lIns="0" rIns="0" tIns="0" bIns="0"/>
+          <a:lstStyle/>
+          <a:p>
+            <a:pPr algn="ctr"/>
+            <a:r>
+              <a:rPr sz="1000" b="1" i="0">
+                <a:solidFill>
+                  <a:srgbClr val="004694"/>
+                </a:solidFill>
+                <a:latin typeface="Consolas"/>
+              </a:rPr>
+              <a:t>FreeRTOS temelleri</a:t>
+            </a:r>
+          </a:p>
+        </p:txBody>
+      </p:sp>
+      <p:sp>
+        <p:nvSpPr>
+          <p:cNvPr id="26" name="TextBox 25"/>
+          <p:cNvSpPr txBox="1"/>
+          <p:nvPr/>
+        </p:nvSpPr>
+        <p:spPr>
+          <a:xfrm>
+            <a:off x="502920" y="5120640"/>
+            <a:ext cx="11185855" cy="457200"/>
+          </a:xfrm>
+          <a:prstGeom prst="rect">
+            <a:avLst/>
+          </a:prstGeom>
+          <a:noFill/>
+        </p:spPr>
+        <p:txBody>
+          <a:bodyPr wrap="square" lIns="0" rIns="0" tIns="0" bIns="0">
+            <a:spAutoFit/>
+          </a:bodyPr>
+          <a:lstStyle/>
+          <a:p>
+            <a:pPr algn="ctr"/>
+            <a:r>
+              <a:rPr sz="1150" b="0" i="1">
+                <a:solidFill>
+                  <a:srgbClr val="5B6B80"/>
+                </a:solidFill>
+                <a:latin typeface="Calibri"/>
+              </a:rPr>
+              <a:t>Bare-metal kod yazma pratiği + farklı işlemci çekirdeklerini (Cortex-M4/M7/M33) ve farklı entegreleri tek bir projede bir araya getirme deneyimi.</a:t>
+            </a:r>
+          </a:p>
+        </p:txBody>
+      </p:sp>
+    </p:spTree>
+  </p:cSld>
+  <p:clrMapOvr>
+    <a:masterClrMapping/>
+  </p:clrMapOvr>
+</p:sld>
+</file>
+
+<file path=ppt/slides/slide15.xml><?xml version="1.0" encoding="utf-8"?>
+<p:sld xmlns:a="http://schemas.openxmlformats.org/drawingml/2006/main" xmlns:p="http://schemas.openxmlformats.org/presentationml/2006/main" xmlns:r="http://schemas.openxmlformats.org/officeDocument/2006/relationships">
+  <p:cSld>
+    <p:spTree>
+      <p:nvGrpSpPr>
+        <p:cNvPr id="1" name=""/>
+        <p:cNvGrpSpPr/>
+        <p:nvPr/>
+      </p:nvGrpSpPr>
+      <p:grpSpPr/>
+      <p:pic>
+        <p:nvPicPr>
+          <p:cNvPr id="2" name="Picture 1" descr="sunu_arka_plan.png"/>
+          <p:cNvPicPr>
+            <a:picLocks noChangeAspect="1"/>
+          </p:cNvPicPr>
+          <p:nvPr/>
+        </p:nvPicPr>
+        <p:blipFill>
+          <a:blip r:embed="rId2"/>
+          <a:stretch>
+            <a:fillRect/>
+          </a:stretch>
+        </p:blipFill>
+        <p:spPr>
+          <a:xfrm>
+            <a:off x="0" y="0"/>
+            <a:ext cx="12191695" cy="6858000"/>
+          </a:xfrm>
+          <a:prstGeom prst="rect">
+            <a:avLst/>
+          </a:prstGeom>
+        </p:spPr>
+      </p:pic>
+      <p:sp>
+        <p:nvSpPr>
+          <p:cNvPr id="3" name="TextBox 2"/>
+          <p:cNvSpPr txBox="1"/>
+          <p:nvPr/>
+        </p:nvSpPr>
+        <p:spPr>
+          <a:xfrm>
+            <a:off x="502920" y="347472"/>
+            <a:ext cx="8778240" cy="292608"/>
+          </a:xfrm>
+          <a:prstGeom prst="rect">
+            <a:avLst/>
+          </a:prstGeom>
+          <a:noFill/>
+        </p:spPr>
+        <p:txBody>
+          <a:bodyPr wrap="square" lIns="0" rIns="0" tIns="0" bIns="0">
+            <a:spAutoFit/>
+          </a:bodyPr>
+          <a:lstStyle/>
+          <a:p>
+            <a:r>
+              <a:rPr sz="1100" b="1" i="0">
+                <a:solidFill>
+                  <a:srgbClr val="0E93B4"/>
+                </a:solidFill>
+                <a:latin typeface="Consolas"/>
+              </a:rPr>
+              <a:t>14 · KAZANIMLAR</a:t>
+            </a:r>
+          </a:p>
+        </p:txBody>
+      </p:sp>
+      <p:sp>
+        <p:nvSpPr>
+          <p:cNvPr id="4" name="TextBox 3"/>
+          <p:cNvSpPr txBox="1"/>
+          <p:nvPr/>
+        </p:nvSpPr>
+        <p:spPr>
+          <a:xfrm>
+            <a:off x="502920" y="658368"/>
+            <a:ext cx="9875520" cy="960120"/>
+          </a:xfrm>
+          <a:prstGeom prst="rect">
+            <a:avLst/>
+          </a:prstGeom>
+          <a:noFill/>
+        </p:spPr>
+        <p:txBody>
+          <a:bodyPr wrap="square" lIns="0" rIns="0" tIns="0" bIns="0">
+            <a:spAutoFit/>
+          </a:bodyPr>
+          <a:lstStyle/>
+          <a:p>
+            <a:r>
+              <a:rPr sz="2700" b="1" i="0">
+                <a:solidFill>
+                  <a:srgbClr val="101826"/>
+                </a:solidFill>
+                <a:latin typeface="Calibri"/>
+              </a:rPr>
+              <a:t>Bu stajın ve projenin bana kattıkları</a:t>
+            </a:r>
+          </a:p>
+        </p:txBody>
+      </p:sp>
+      <p:sp>
+        <p:nvSpPr>
+          <p:cNvPr id="5" name="TextBox 4"/>
+          <p:cNvSpPr txBox="1"/>
+          <p:nvPr/>
+        </p:nvSpPr>
+        <p:spPr>
+          <a:xfrm>
+            <a:off x="502920" y="1417320"/>
+            <a:ext cx="10241280" cy="548640"/>
+          </a:xfrm>
+          <a:prstGeom prst="rect">
+            <a:avLst/>
+          </a:prstGeom>
+          <a:noFill/>
+        </p:spPr>
+        <p:txBody>
+          <a:bodyPr wrap="square" lIns="0" rIns="0" tIns="0" bIns="0">
+            <a:spAutoFit/>
+          </a:bodyPr>
+          <a:lstStyle/>
+          <a:p>
+            <a:r>
+              <a:rPr sz="1350" b="0" i="0">
+                <a:solidFill>
+                  <a:srgbClr val="5B6B80"/>
+                </a:solidFill>
+                <a:latin typeface="Calibri"/>
+              </a:rPr>
+              <a:t>Eğitimle başlayıp gereksinimden teste uzanan tam bir mühendislik döngüsünü, tek bir projede kendi ellerimle tamamladım — üç boyutta öğrenme ve somut bir çıktı.</a:t>
+            </a:r>
+          </a:p>
+        </p:txBody>
+      </p:sp>
+      <p:sp>
+        <p:nvSpPr>
+          <p:cNvPr id="6" name="TextBox 5"/>
+          <p:cNvSpPr txBox="1"/>
+          <p:nvPr/>
+        </p:nvSpPr>
+        <p:spPr>
+          <a:xfrm>
+            <a:off x="502920" y="6446520"/>
+            <a:ext cx="5486400" cy="274320"/>
+          </a:xfrm>
+          <a:prstGeom prst="rect">
+            <a:avLst/>
+          </a:prstGeom>
+          <a:noFill/>
+        </p:spPr>
+        <p:txBody>
+          <a:bodyPr wrap="square" lIns="0" rIns="0" tIns="0" bIns="0">
+            <a:spAutoFit/>
+          </a:bodyPr>
+          <a:lstStyle/>
+          <a:p>
+            <a:r>
+              <a:rPr sz="900" b="0" i="0">
+                <a:solidFill>
+                  <a:srgbClr val="5B6B80"/>
+                </a:solidFill>
+                <a:latin typeface="Calibri"/>
+              </a:rPr>
+              <a:t>E-AETIS · Staj Sunumu</a:t>
+            </a:r>
+          </a:p>
+        </p:txBody>
+      </p:sp>
+      <p:sp>
+        <p:nvSpPr>
+          <p:cNvPr id="7" name="TextBox 6"/>
+          <p:cNvSpPr txBox="1"/>
+          <p:nvPr/>
+        </p:nvSpPr>
+        <p:spPr>
+          <a:xfrm>
+            <a:off x="10042855" y="6446520"/>
+            <a:ext cx="1828800" cy="274320"/>
+          </a:xfrm>
+          <a:prstGeom prst="rect">
+            <a:avLst/>
+          </a:prstGeom>
+          <a:noFill/>
+        </p:spPr>
+        <p:txBody>
+          <a:bodyPr wrap="square" lIns="0" rIns="0" tIns="0" bIns="0">
+            <a:spAutoFit/>
+          </a:bodyPr>
+          <a:lstStyle/>
+          <a:p>
+            <a:pPr algn="r"/>
+            <a:r>
+              <a:rPr sz="900" b="0" i="0">
+                <a:solidFill>
+                  <a:srgbClr val="5B6B80"/>
+                </a:solidFill>
+                <a:latin typeface="Calibri"/>
+              </a:rPr>
+              <a:t>15 / 15</a:t>
             </a:r>
           </a:p>
         </p:txBody>
@@ -7088,7 +8256,7 @@
                 </a:solidFill>
                 <a:latin typeface="Calibri"/>
               </a:rPr>
-              <a:t>02 / 14</a:t>
+              <a:t>02 / 15</a:t>
             </a:r>
           </a:p>
         </p:txBody>
@@ -7762,7 +8930,7 @@
                 </a:solidFill>
                 <a:latin typeface="Calibri"/>
               </a:rPr>
-              <a:t>03 / 14</a:t>
+              <a:t>03 / 15</a:t>
             </a:r>
           </a:p>
         </p:txBody>
@@ -8543,7 +9711,7 @@
                 </a:solidFill>
                 <a:latin typeface="Calibri"/>
               </a:rPr>
-              <a:t>04 / 14</a:t>
+              <a:t>04 / 15</a:t>
             </a:r>
           </a:p>
         </p:txBody>
@@ -9191,7 +10359,7 @@
                 </a:solidFill>
                 <a:latin typeface="Calibri"/>
               </a:rPr>
-              <a:t>05 / 14</a:t>
+              <a:t>05 / 15</a:t>
             </a:r>
           </a:p>
         </p:txBody>
@@ -11481,7 +12649,7 @@
                 </a:solidFill>
                 <a:latin typeface="Calibri"/>
               </a:rPr>
-              <a:t>06 / 14</a:t>
+              <a:t>06 / 15</a:t>
             </a:r>
           </a:p>
         </p:txBody>
@@ -12405,7 +13573,7 @@
                 </a:solidFill>
                 <a:latin typeface="Calibri"/>
               </a:rPr>
-              <a:t>07 / 14</a:t>
+              <a:t>07 / 15</a:t>
             </a:r>
           </a:p>
         </p:txBody>
@@ -12950,7 +14118,7 @@
                 </a:solidFill>
                 <a:latin typeface="Calibri"/>
               </a:rPr>
-              <a:t>08 / 14</a:t>
+              <a:t>08 / 15</a:t>
             </a:r>
           </a:p>
         </p:txBody>
@@ -14596,7 +15764,7 @@
                 </a:solidFill>
                 <a:latin typeface="Calibri"/>
               </a:rPr>
-              <a:t>09 / 14</a:t>
+              <a:t>09 / 15</a:t>
             </a:r>
           </a:p>
         </p:txBody>

--- a/sunum/EAETIS_Staj_Sunumu_Taslak.pptx
+++ b/sunum/EAETIS_Staj_Sunumu_Taslak.pptx
@@ -513,7 +513,7 @@
             <a:pPr>
               <a:defRPr/>
             </a:pPr>
-            <a:fld id="{AB749EAD-1016-786D-FD4F-AC581A5A9333}" type="slidenum">
+            <a:fld id="{0544D3A2-8415-99EA-41FB-870E827D93F3}" type="slidenum">
               <a:rPr/>
               <a:t/>
             </a:fld>
@@ -598,7 +598,7 @@
             <a:pPr>
               <a:defRPr/>
             </a:pPr>
-            <a:fld id="{B7CD3061-3140-C7E3-A0DD-96BC1D3369A6}" type="slidenum">
+            <a:fld id="{2A3CA051-1176-DADD-11CB-EE4D60AFE78D}" type="slidenum">
               <a:rPr/>
               <a:t/>
             </a:fld>
@@ -683,7 +683,7 @@
             <a:pPr>
               <a:defRPr/>
             </a:pPr>
-            <a:fld id="{4D1A0995-633B-D4AB-AA28-A75B58760955}" type="slidenum">
+            <a:fld id="{675A0EF5-B4E8-5055-85CC-04F41040A8FD}" type="slidenum">
               <a:rPr/>
               <a:t/>
             </a:fld>
@@ -768,7 +768,7 @@
             <a:pPr>
               <a:defRPr/>
             </a:pPr>
-            <a:fld id="{A1AE2B37-FADB-F69E-FE9C-0070BBE2AA82}" type="slidenum">
+            <a:fld id="{A443756B-570D-2C75-3FDF-A39C9D4A8C23}" type="slidenum">
               <a:rPr/>
               <a:t/>
             </a:fld>
@@ -853,7 +853,7 @@
             <a:pPr>
               <a:defRPr/>
             </a:pPr>
-            <a:fld id="{B7EF467F-E066-EC7C-9234-98D5970E94C6}" type="slidenum">
+            <a:fld id="{28F5F57F-B14B-D31C-4F66-20AB5EA757BE}" type="slidenum">
               <a:rPr/>
               <a:t/>
             </a:fld>
@@ -938,7 +938,7 @@
             <a:pPr>
               <a:defRPr/>
             </a:pPr>
-            <a:fld id="{FB3B628B-D45F-FF9E-938B-C730C4148816}" type="slidenum">
+            <a:fld id="{441741D3-6FB2-E280-6486-FD249ECE4CC0}" type="slidenum">
               <a:rPr/>
               <a:t/>
             </a:fld>
@@ -1023,7 +1023,7 @@
             <a:pPr>
               <a:defRPr/>
             </a:pPr>
-            <a:fld id="{417061AD-5ACD-8859-C2C4-512C3E63CE7C}" type="slidenum">
+            <a:fld id="{9272E471-8F5D-2682-18CF-10149867999F}" type="slidenum">
               <a:rPr/>
               <a:t/>
             </a:fld>
@@ -1108,7 +1108,7 @@
             <a:pPr>
               <a:defRPr/>
             </a:pPr>
-            <a:fld id="{4502188C-50FE-9A1D-69D7-C2D089BA093F}" type="slidenum">
+            <a:fld id="{C0201B6D-9CBE-0C30-C99B-7D358A2BB768}" type="slidenum">
               <a:rPr/>
               <a:t/>
             </a:fld>
@@ -1193,7 +1193,7 @@
             <a:pPr>
               <a:defRPr/>
             </a:pPr>
-            <a:fld id="{815F1138-4567-360B-F299-3233E770EA78}" type="slidenum">
+            <a:fld id="{6F01E85F-DC35-B9A3-F1FE-67EE6AD07CD2}" type="slidenum">
               <a:rPr/>
               <a:t/>
             </a:fld>
@@ -1278,7 +1278,7 @@
             <a:pPr>
               <a:defRPr/>
             </a:pPr>
-            <a:fld id="{D329949E-BA50-0712-42C0-1B70A0C0CE35}" type="slidenum">
+            <a:fld id="{EDBD4A6C-2519-6BA6-4D8E-802AE1AAC6F3}" type="slidenum">
               <a:rPr/>
               <a:t/>
             </a:fld>
@@ -1363,7 +1363,7 @@
             <a:pPr>
               <a:defRPr/>
             </a:pPr>
-            <a:fld id="{257CAF3C-E86D-1E48-E859-AE454F97195F}" type="slidenum">
+            <a:fld id="{7B053EFA-F24B-A34E-D9AC-F6A31695338B}" type="slidenum">
               <a:rPr/>
               <a:t/>
             </a:fld>
@@ -1448,7 +1448,7 @@
             <a:pPr>
               <a:defRPr/>
             </a:pPr>
-            <a:fld id="{427A693B-FB72-71AF-D27B-A5D7B978ABB0}" type="slidenum">
+            <a:fld id="{A0462A46-FC0B-505C-0CB1-1655160C89DC}" type="slidenum">
               <a:rPr/>
               <a:t/>
             </a:fld>
@@ -1533,7 +1533,7 @@
             <a:pPr>
               <a:defRPr/>
             </a:pPr>
-            <a:fld id="{FF67B87F-EA5C-2FFF-7A6B-D335CFC041F6}" type="slidenum">
+            <a:fld id="{CB71EDB7-60C4-CC52-B54B-FC8AC73F7BE7}" type="slidenum">
               <a:rPr/>
               <a:t/>
             </a:fld>
@@ -1618,7 +1618,7 @@
             <a:pPr>
               <a:defRPr/>
             </a:pPr>
-            <a:fld id="{F6BEEE88-8518-A795-FD95-FAB0ED25CF19}" type="slidenum">
+            <a:fld id="{866245D6-17EA-37D1-ED37-C1FC2044B97A}" type="slidenum">
               <a:rPr/>
               <a:t/>
             </a:fld>
@@ -1703,7 +1703,7 @@
             <a:pPr>
               <a:defRPr/>
             </a:pPr>
-            <a:fld id="{E6158719-31AE-C6BA-3DE9-1C53FE17EFDB}" type="slidenum">
+            <a:fld id="{A6CE5E42-851E-17E5-43B6-E84B34BC188F}" type="slidenum">
               <a:rPr/>
               <a:t/>
             </a:fld>
@@ -1738,7 +1738,7 @@
       </p:grpSpPr>
       <p:sp>
         <p:nvSpPr>
-          <p:cNvPr id="2143590723" name="Title 1"/>
+          <p:cNvPr id="754527102" name="Title 1"/>
           <p:cNvSpPr>
             <a:spLocks noGrp="1"/>
           </p:cNvSpPr>
@@ -1769,7 +1769,7 @@
       </p:sp>
       <p:sp>
         <p:nvSpPr>
-          <p:cNvPr id="800336138" name="Subtitle 2"/>
+          <p:cNvPr id="1552203015" name="Subtitle 2"/>
           <p:cNvSpPr>
             <a:spLocks noGrp="1"/>
           </p:cNvSpPr>
@@ -1891,7 +1891,7 @@
       </p:sp>
       <p:sp>
         <p:nvSpPr>
-          <p:cNvPr id="1627364239" name="Date Placeholder 3"/>
+          <p:cNvPr id="1547035498" name="Date Placeholder 3"/>
           <p:cNvSpPr>
             <a:spLocks noGrp="1"/>
           </p:cNvSpPr>
@@ -1917,7 +1917,7 @@
       </p:sp>
       <p:sp>
         <p:nvSpPr>
-          <p:cNvPr id="219663408" name="Footer Placeholder 4"/>
+          <p:cNvPr id="1115312906" name="Footer Placeholder 4"/>
           <p:cNvSpPr>
             <a:spLocks noGrp="1"/>
           </p:cNvSpPr>
@@ -1939,7 +1939,7 @@
       </p:sp>
       <p:sp>
         <p:nvSpPr>
-          <p:cNvPr id="282200301" name="Slide Number Placeholder 5"/>
+          <p:cNvPr id="1389136783" name="Slide Number Placeholder 5"/>
           <p:cNvSpPr>
             <a:spLocks noGrp="1"/>
           </p:cNvSpPr>
@@ -1990,7 +1990,7 @@
       </p:grpSpPr>
       <p:sp>
         <p:nvSpPr>
-          <p:cNvPr id="89787514" name="Title 1"/>
+          <p:cNvPr id="2102723096" name="Title 1"/>
           <p:cNvSpPr>
             <a:spLocks noGrp="1"/>
           </p:cNvSpPr>
@@ -2016,7 +2016,7 @@
       </p:sp>
       <p:sp>
         <p:nvSpPr>
-          <p:cNvPr id="250780382" name="Vertical Text Placeholder 2"/>
+          <p:cNvPr id="1831261758" name="Vertical Text Placeholder 2"/>
           <p:cNvSpPr>
             <a:spLocks noGrp="1"/>
           </p:cNvSpPr>
@@ -2082,7 +2082,7 @@
       </p:sp>
       <p:sp>
         <p:nvSpPr>
-          <p:cNvPr id="574613255" name="Date Placeholder 3"/>
+          <p:cNvPr id="1840220952" name="Date Placeholder 3"/>
           <p:cNvSpPr>
             <a:spLocks noGrp="1"/>
           </p:cNvSpPr>
@@ -2108,7 +2108,7 @@
       </p:sp>
       <p:sp>
         <p:nvSpPr>
-          <p:cNvPr id="933407227" name="Footer Placeholder 4"/>
+          <p:cNvPr id="681676915" name="Footer Placeholder 4"/>
           <p:cNvSpPr>
             <a:spLocks noGrp="1"/>
           </p:cNvSpPr>
@@ -2130,7 +2130,7 @@
       </p:sp>
       <p:sp>
         <p:nvSpPr>
-          <p:cNvPr id="852289792" name="Slide Number Placeholder 5"/>
+          <p:cNvPr id="1512891066" name="Slide Number Placeholder 5"/>
           <p:cNvSpPr>
             <a:spLocks noGrp="1"/>
           </p:cNvSpPr>
@@ -2181,7 +2181,7 @@
       </p:grpSpPr>
       <p:sp>
         <p:nvSpPr>
-          <p:cNvPr id="2010423893" name="Vertical Title 1"/>
+          <p:cNvPr id="1519269767" name="Vertical Title 1"/>
           <p:cNvSpPr>
             <a:spLocks noGrp="1"/>
           </p:cNvSpPr>
@@ -2212,7 +2212,7 @@
       </p:sp>
       <p:sp>
         <p:nvSpPr>
-          <p:cNvPr id="1777445998" name="Vertical Text Placeholder 2"/>
+          <p:cNvPr id="679869003" name="Vertical Text Placeholder 2"/>
           <p:cNvSpPr>
             <a:spLocks noGrp="1"/>
           </p:cNvSpPr>
@@ -2283,7 +2283,7 @@
       </p:sp>
       <p:sp>
         <p:nvSpPr>
-          <p:cNvPr id="2110337196" name="Date Placeholder 3"/>
+          <p:cNvPr id="2137419614" name="Date Placeholder 3"/>
           <p:cNvSpPr>
             <a:spLocks noGrp="1"/>
           </p:cNvSpPr>
@@ -2309,7 +2309,7 @@
       </p:sp>
       <p:sp>
         <p:nvSpPr>
-          <p:cNvPr id="1048220517" name="Footer Placeholder 4"/>
+          <p:cNvPr id="901764958" name="Footer Placeholder 4"/>
           <p:cNvSpPr>
             <a:spLocks noGrp="1"/>
           </p:cNvSpPr>
@@ -2331,7 +2331,7 @@
       </p:sp>
       <p:sp>
         <p:nvSpPr>
-          <p:cNvPr id="1025836000" name="Slide Number Placeholder 5"/>
+          <p:cNvPr id="429474826" name="Slide Number Placeholder 5"/>
           <p:cNvSpPr>
             <a:spLocks noGrp="1"/>
           </p:cNvSpPr>
@@ -2382,7 +2382,7 @@
       </p:grpSpPr>
       <p:sp>
         <p:nvSpPr>
-          <p:cNvPr id="2044653541" name="Title 1"/>
+          <p:cNvPr id="1546850378" name="Title 1"/>
           <p:cNvSpPr>
             <a:spLocks noGrp="1"/>
           </p:cNvSpPr>
@@ -2408,7 +2408,7 @@
       </p:sp>
       <p:sp>
         <p:nvSpPr>
-          <p:cNvPr id="763504587" name="Content Placeholder 2"/>
+          <p:cNvPr id="602438814" name="Content Placeholder 2"/>
           <p:cNvSpPr>
             <a:spLocks noGrp="1"/>
           </p:cNvSpPr>
@@ -2474,7 +2474,7 @@
       </p:sp>
       <p:sp>
         <p:nvSpPr>
-          <p:cNvPr id="512845359" name="Date Placeholder 3"/>
+          <p:cNvPr id="204794216" name="Date Placeholder 3"/>
           <p:cNvSpPr>
             <a:spLocks noGrp="1"/>
           </p:cNvSpPr>
@@ -2500,7 +2500,7 @@
       </p:sp>
       <p:sp>
         <p:nvSpPr>
-          <p:cNvPr id="1638522775" name="Footer Placeholder 4"/>
+          <p:cNvPr id="19318842" name="Footer Placeholder 4"/>
           <p:cNvSpPr>
             <a:spLocks noGrp="1"/>
           </p:cNvSpPr>
@@ -2522,7 +2522,7 @@
       </p:sp>
       <p:sp>
         <p:nvSpPr>
-          <p:cNvPr id="550658811" name="Slide Number Placeholder 5"/>
+          <p:cNvPr id="1498683423" name="Slide Number Placeholder 5"/>
           <p:cNvSpPr>
             <a:spLocks noGrp="1"/>
           </p:cNvSpPr>
@@ -2573,7 +2573,7 @@
       </p:grpSpPr>
       <p:sp>
         <p:nvSpPr>
-          <p:cNvPr id="386273060" name="Title 1"/>
+          <p:cNvPr id="119705052" name="Title 1"/>
           <p:cNvSpPr>
             <a:spLocks noGrp="1"/>
           </p:cNvSpPr>
@@ -2608,7 +2608,7 @@
       </p:sp>
       <p:sp>
         <p:nvSpPr>
-          <p:cNvPr id="430094900" name="Text Placeholder 2"/>
+          <p:cNvPr id="1458402662" name="Text Placeholder 2"/>
           <p:cNvSpPr>
             <a:spLocks noGrp="1"/>
           </p:cNvSpPr>
@@ -2730,7 +2730,7 @@
       </p:sp>
       <p:sp>
         <p:nvSpPr>
-          <p:cNvPr id="1550720010" name="Date Placeholder 3"/>
+          <p:cNvPr id="1138636746" name="Date Placeholder 3"/>
           <p:cNvSpPr>
             <a:spLocks noGrp="1"/>
           </p:cNvSpPr>
@@ -2756,7 +2756,7 @@
       </p:sp>
       <p:sp>
         <p:nvSpPr>
-          <p:cNvPr id="421891752" name="Footer Placeholder 4"/>
+          <p:cNvPr id="580957733" name="Footer Placeholder 4"/>
           <p:cNvSpPr>
             <a:spLocks noGrp="1"/>
           </p:cNvSpPr>
@@ -2778,7 +2778,7 @@
       </p:sp>
       <p:sp>
         <p:nvSpPr>
-          <p:cNvPr id="70187787" name="Slide Number Placeholder 5"/>
+          <p:cNvPr id="884083791" name="Slide Number Placeholder 5"/>
           <p:cNvSpPr>
             <a:spLocks noGrp="1"/>
           </p:cNvSpPr>
@@ -2829,7 +2829,7 @@
       </p:grpSpPr>
       <p:sp>
         <p:nvSpPr>
-          <p:cNvPr id="2140983540" name="Title 1"/>
+          <p:cNvPr id="700786015" name="Title 1"/>
           <p:cNvSpPr>
             <a:spLocks noGrp="1"/>
           </p:cNvSpPr>
@@ -2855,7 +2855,7 @@
       </p:sp>
       <p:sp>
         <p:nvSpPr>
-          <p:cNvPr id="959008409" name="Content Placeholder 2"/>
+          <p:cNvPr id="945664339" name="Content Placeholder 2"/>
           <p:cNvSpPr>
             <a:spLocks noGrp="1"/>
           </p:cNvSpPr>
@@ -2954,7 +2954,7 @@
       </p:sp>
       <p:sp>
         <p:nvSpPr>
-          <p:cNvPr id="1244211258" name="Content Placeholder 3"/>
+          <p:cNvPr id="674723031" name="Content Placeholder 3"/>
           <p:cNvSpPr>
             <a:spLocks noGrp="1"/>
           </p:cNvSpPr>
@@ -3053,7 +3053,7 @@
       </p:sp>
       <p:sp>
         <p:nvSpPr>
-          <p:cNvPr id="989323176" name="Date Placeholder 4"/>
+          <p:cNvPr id="949568389" name="Date Placeholder 4"/>
           <p:cNvSpPr>
             <a:spLocks noGrp="1"/>
           </p:cNvSpPr>
@@ -3079,7 +3079,7 @@
       </p:sp>
       <p:sp>
         <p:nvSpPr>
-          <p:cNvPr id="2026798900" name="Footer Placeholder 5"/>
+          <p:cNvPr id="851113886" name="Footer Placeholder 5"/>
           <p:cNvSpPr>
             <a:spLocks noGrp="1"/>
           </p:cNvSpPr>
@@ -3101,7 +3101,7 @@
       </p:sp>
       <p:sp>
         <p:nvSpPr>
-          <p:cNvPr id="1550888735" name="Slide Number Placeholder 6"/>
+          <p:cNvPr id="1913850168" name="Slide Number Placeholder 6"/>
           <p:cNvSpPr>
             <a:spLocks noGrp="1"/>
           </p:cNvSpPr>
@@ -3152,7 +3152,7 @@
       </p:grpSpPr>
       <p:sp>
         <p:nvSpPr>
-          <p:cNvPr id="1686303467" name="Title 1"/>
+          <p:cNvPr id="134510162" name="Title 1"/>
           <p:cNvSpPr>
             <a:spLocks noGrp="1"/>
           </p:cNvSpPr>
@@ -3182,7 +3182,7 @@
       </p:sp>
       <p:sp>
         <p:nvSpPr>
-          <p:cNvPr id="1958725251" name="Text Placeholder 2"/>
+          <p:cNvPr id="2034895573" name="Text Placeholder 2"/>
           <p:cNvSpPr>
             <a:spLocks noGrp="1"/>
           </p:cNvSpPr>
@@ -3250,7 +3250,7 @@
       </p:sp>
       <p:sp>
         <p:nvSpPr>
-          <p:cNvPr id="101992803" name="Content Placeholder 3"/>
+          <p:cNvPr id="732223626" name="Content Placeholder 3"/>
           <p:cNvSpPr>
             <a:spLocks noGrp="1"/>
           </p:cNvSpPr>
@@ -3349,7 +3349,7 @@
       </p:sp>
       <p:sp>
         <p:nvSpPr>
-          <p:cNvPr id="1407310140" name="Text Placeholder 4"/>
+          <p:cNvPr id="1833662019" name="Text Placeholder 4"/>
           <p:cNvSpPr>
             <a:spLocks noGrp="1"/>
           </p:cNvSpPr>
@@ -3417,7 +3417,7 @@
       </p:sp>
       <p:sp>
         <p:nvSpPr>
-          <p:cNvPr id="899031496" name="Content Placeholder 5"/>
+          <p:cNvPr id="354395317" name="Content Placeholder 5"/>
           <p:cNvSpPr>
             <a:spLocks noGrp="1"/>
           </p:cNvSpPr>
@@ -3516,7 +3516,7 @@
       </p:sp>
       <p:sp>
         <p:nvSpPr>
-          <p:cNvPr id="1803970222" name="Date Placeholder 6"/>
+          <p:cNvPr id="733030055" name="Date Placeholder 6"/>
           <p:cNvSpPr>
             <a:spLocks noGrp="1"/>
           </p:cNvSpPr>
@@ -3542,7 +3542,7 @@
       </p:sp>
       <p:sp>
         <p:nvSpPr>
-          <p:cNvPr id="1016080835" name="Footer Placeholder 7"/>
+          <p:cNvPr id="1421991801" name="Footer Placeholder 7"/>
           <p:cNvSpPr>
             <a:spLocks noGrp="1"/>
           </p:cNvSpPr>
@@ -3564,7 +3564,7 @@
       </p:sp>
       <p:sp>
         <p:nvSpPr>
-          <p:cNvPr id="202977509" name="Slide Number Placeholder 8"/>
+          <p:cNvPr id="92639413" name="Slide Number Placeholder 8"/>
           <p:cNvSpPr>
             <a:spLocks noGrp="1"/>
           </p:cNvSpPr>
@@ -3615,7 +3615,7 @@
       </p:grpSpPr>
       <p:sp>
         <p:nvSpPr>
-          <p:cNvPr id="1863775554" name="Title 1"/>
+          <p:cNvPr id="99154360" name="Title 1"/>
           <p:cNvSpPr>
             <a:spLocks noGrp="1"/>
           </p:cNvSpPr>
@@ -3641,7 +3641,7 @@
       </p:sp>
       <p:sp>
         <p:nvSpPr>
-          <p:cNvPr id="2086224125" name="Date Placeholder 2"/>
+          <p:cNvPr id="1758139204" name="Date Placeholder 2"/>
           <p:cNvSpPr>
             <a:spLocks noGrp="1"/>
           </p:cNvSpPr>
@@ -3667,7 +3667,7 @@
       </p:sp>
       <p:sp>
         <p:nvSpPr>
-          <p:cNvPr id="1369417557" name="Footer Placeholder 3"/>
+          <p:cNvPr id="1654273812" name="Footer Placeholder 3"/>
           <p:cNvSpPr>
             <a:spLocks noGrp="1"/>
           </p:cNvSpPr>
@@ -3689,7 +3689,7 @@
       </p:sp>
       <p:sp>
         <p:nvSpPr>
-          <p:cNvPr id="1548668867" name="Slide Number Placeholder 4"/>
+          <p:cNvPr id="215011102" name="Slide Number Placeholder 4"/>
           <p:cNvSpPr>
             <a:spLocks noGrp="1"/>
           </p:cNvSpPr>
@@ -3740,7 +3740,7 @@
       </p:grpSpPr>
       <p:sp>
         <p:nvSpPr>
-          <p:cNvPr id="127080461" name="Date Placeholder 1"/>
+          <p:cNvPr id="1941106850" name="Date Placeholder 1"/>
           <p:cNvSpPr>
             <a:spLocks noGrp="1"/>
           </p:cNvSpPr>
@@ -3766,7 +3766,7 @@
       </p:sp>
       <p:sp>
         <p:nvSpPr>
-          <p:cNvPr id="648490000" name="Footer Placeholder 2"/>
+          <p:cNvPr id="671432753" name="Footer Placeholder 2"/>
           <p:cNvSpPr>
             <a:spLocks noGrp="1"/>
           </p:cNvSpPr>
@@ -3788,7 +3788,7 @@
       </p:sp>
       <p:sp>
         <p:nvSpPr>
-          <p:cNvPr id="1147765068" name="Slide Number Placeholder 3"/>
+          <p:cNvPr id="1459850576" name="Slide Number Placeholder 3"/>
           <p:cNvSpPr>
             <a:spLocks noGrp="1"/>
           </p:cNvSpPr>
@@ -3839,7 +3839,7 @@
       </p:grpSpPr>
       <p:sp>
         <p:nvSpPr>
-          <p:cNvPr id="1321139747" name="Title 1"/>
+          <p:cNvPr id="1373816857" name="Title 1"/>
           <p:cNvSpPr>
             <a:spLocks noGrp="1"/>
           </p:cNvSpPr>
@@ -3874,7 +3874,7 @@
       </p:sp>
       <p:sp>
         <p:nvSpPr>
-          <p:cNvPr id="407831143" name="Content Placeholder 2"/>
+          <p:cNvPr id="1052868012" name="Content Placeholder 2"/>
           <p:cNvSpPr>
             <a:spLocks noGrp="1"/>
           </p:cNvSpPr>
@@ -3973,7 +3973,7 @@
       </p:sp>
       <p:sp>
         <p:nvSpPr>
-          <p:cNvPr id="1630164912" name="Text Placeholder 3"/>
+          <p:cNvPr id="2049074034" name="Text Placeholder 3"/>
           <p:cNvSpPr>
             <a:spLocks noGrp="1"/>
           </p:cNvSpPr>
@@ -4041,7 +4041,7 @@
       </p:sp>
       <p:sp>
         <p:nvSpPr>
-          <p:cNvPr id="838306537" name="Date Placeholder 4"/>
+          <p:cNvPr id="2031741737" name="Date Placeholder 4"/>
           <p:cNvSpPr>
             <a:spLocks noGrp="1"/>
           </p:cNvSpPr>
@@ -4067,7 +4067,7 @@
       </p:sp>
       <p:sp>
         <p:nvSpPr>
-          <p:cNvPr id="1117962346" name="Footer Placeholder 5"/>
+          <p:cNvPr id="405133615" name="Footer Placeholder 5"/>
           <p:cNvSpPr>
             <a:spLocks noGrp="1"/>
           </p:cNvSpPr>
@@ -4089,7 +4089,7 @@
       </p:sp>
       <p:sp>
         <p:nvSpPr>
-          <p:cNvPr id="1862166440" name="Slide Number Placeholder 6"/>
+          <p:cNvPr id="851971842" name="Slide Number Placeholder 6"/>
           <p:cNvSpPr>
             <a:spLocks noGrp="1"/>
           </p:cNvSpPr>
@@ -4140,7 +4140,7 @@
       </p:grpSpPr>
       <p:sp>
         <p:nvSpPr>
-          <p:cNvPr id="77211640" name="Title 1"/>
+          <p:cNvPr id="1594779697" name="Title 1"/>
           <p:cNvSpPr>
             <a:spLocks noGrp="1"/>
           </p:cNvSpPr>
@@ -4175,7 +4175,7 @@
       </p:sp>
       <p:sp>
         <p:nvSpPr>
-          <p:cNvPr id="1817423771" name="Picture Placeholder 2"/>
+          <p:cNvPr id="681354840" name="Picture Placeholder 2"/>
           <p:cNvSpPr>
             <a:spLocks noGrp="1"/>
           </p:cNvSpPr>
@@ -4239,7 +4239,7 @@
       </p:sp>
       <p:sp>
         <p:nvSpPr>
-          <p:cNvPr id="1933975466" name="Text Placeholder 3"/>
+          <p:cNvPr id="391188200" name="Text Placeholder 3"/>
           <p:cNvSpPr>
             <a:spLocks noGrp="1"/>
           </p:cNvSpPr>
@@ -4307,7 +4307,7 @@
       </p:sp>
       <p:sp>
         <p:nvSpPr>
-          <p:cNvPr id="333625274" name="Date Placeholder 4"/>
+          <p:cNvPr id="269988948" name="Date Placeholder 4"/>
           <p:cNvSpPr>
             <a:spLocks noGrp="1"/>
           </p:cNvSpPr>
@@ -4333,7 +4333,7 @@
       </p:sp>
       <p:sp>
         <p:nvSpPr>
-          <p:cNvPr id="1772059921" name="Footer Placeholder 5"/>
+          <p:cNvPr id="1700182049" name="Footer Placeholder 5"/>
           <p:cNvSpPr>
             <a:spLocks noGrp="1"/>
           </p:cNvSpPr>
@@ -4355,7 +4355,7 @@
       </p:sp>
       <p:sp>
         <p:nvSpPr>
-          <p:cNvPr id="1976581810" name="Slide Number Placeholder 6"/>
+          <p:cNvPr id="871719561" name="Slide Number Placeholder 6"/>
           <p:cNvSpPr>
             <a:spLocks noGrp="1"/>
           </p:cNvSpPr>
@@ -4411,7 +4411,7 @@
       </p:grpSpPr>
       <p:sp>
         <p:nvSpPr>
-          <p:cNvPr id="808483730" name="Title Placeholder 1"/>
+          <p:cNvPr id="1951253379" name="Title Placeholder 1"/>
           <p:cNvSpPr>
             <a:spLocks noGrp="1"/>
           </p:cNvSpPr>
@@ -4447,7 +4447,7 @@
       </p:sp>
       <p:sp>
         <p:nvSpPr>
-          <p:cNvPr id="1073751642" name="Text Placeholder 2"/>
+          <p:cNvPr id="1711760291" name="Text Placeholder 2"/>
           <p:cNvSpPr>
             <a:spLocks noGrp="1"/>
           </p:cNvSpPr>
@@ -4523,7 +4523,7 @@
       </p:sp>
       <p:sp>
         <p:nvSpPr>
-          <p:cNvPr id="842727212" name="Date Placeholder 3"/>
+          <p:cNvPr id="922246994" name="Date Placeholder 3"/>
           <p:cNvSpPr>
             <a:spLocks noGrp="1"/>
           </p:cNvSpPr>
@@ -4567,7 +4567,7 @@
       </p:sp>
       <p:sp>
         <p:nvSpPr>
-          <p:cNvPr id="1662735233" name="Footer Placeholder 4"/>
+          <p:cNvPr id="945663395" name="Footer Placeholder 4"/>
           <p:cNvSpPr>
             <a:spLocks noGrp="1"/>
           </p:cNvSpPr>
@@ -4607,7 +4607,7 @@
       </p:sp>
       <p:sp>
         <p:nvSpPr>
-          <p:cNvPr id="1625300411" name="Slide Number Placeholder 5"/>
+          <p:cNvPr id="815025618" name="Slide Number Placeholder 5"/>
           <p:cNvSpPr>
             <a:spLocks noGrp="1"/>
           </p:cNvSpPr>
@@ -4937,7 +4937,7 @@
       </p:grpSpPr>
       <p:pic>
         <p:nvPicPr>
-          <p:cNvPr id="630200315" name="Picture 1" descr="sunum_kapak.png"/>
+          <p:cNvPr id="1021621385" name="Picture 1" descr="sunum_kapak.png"/>
           <p:cNvPicPr>
             <a:picLocks noChangeAspect="1"/>
           </p:cNvPicPr>
@@ -4992,7 +4992,7 @@
       </p:grpSpPr>
       <p:pic>
         <p:nvPicPr>
-          <p:cNvPr id="1505905405" name="Picture 1" descr="sunu_arka_plan.png"/>
+          <p:cNvPr id="1003287974" name="Picture 1" descr="sunu_arka_plan.png"/>
           <p:cNvPicPr>
             <a:picLocks noChangeAspect="1"/>
           </p:cNvPicPr>
@@ -5014,7 +5014,7 @@
       </p:pic>
       <p:sp>
         <p:nvSpPr>
-          <p:cNvPr id="211833523" name="TextBox 2"/>
+          <p:cNvPr id="1390304088" name="TextBox 2"/>
           <p:cNvSpPr txBox="1"/>
           <p:nvPr/>
         </p:nvSpPr>
@@ -5052,7 +5052,7 @@
       </p:sp>
       <p:sp>
         <p:nvSpPr>
-          <p:cNvPr id="1167406927" name="TextBox 3"/>
+          <p:cNvPr id="587056620" name="TextBox 3"/>
           <p:cNvSpPr txBox="1"/>
           <p:nvPr/>
         </p:nvSpPr>
@@ -5090,7 +5090,7 @@
       </p:sp>
       <p:sp>
         <p:nvSpPr>
-          <p:cNvPr id="1823998274" name="TextBox 4"/>
+          <p:cNvPr id="301381822" name="TextBox 4"/>
           <p:cNvSpPr txBox="1"/>
           <p:nvPr/>
         </p:nvSpPr>
@@ -5128,7 +5128,7 @@
       </p:sp>
       <p:sp>
         <p:nvSpPr>
-          <p:cNvPr id="1793154369" name="TextBox 5"/>
+          <p:cNvPr id="1380382384" name="TextBox 5"/>
           <p:cNvSpPr txBox="1"/>
           <p:nvPr/>
         </p:nvSpPr>
@@ -5166,7 +5166,7 @@
       </p:sp>
       <p:sp>
         <p:nvSpPr>
-          <p:cNvPr id="1510383960" name="TextBox 6"/>
+          <p:cNvPr id="1882545662" name="TextBox 6"/>
           <p:cNvSpPr txBox="1"/>
           <p:nvPr/>
         </p:nvSpPr>
@@ -5204,7 +5204,7 @@
       </p:sp>
       <p:pic>
         <p:nvPicPr>
-          <p:cNvPr id="804552966" name="Picture 7" descr="27_agustos.png"/>
+          <p:cNvPr id="1888586474" name="Picture 7" descr="27_agustos.png"/>
           <p:cNvPicPr>
             <a:picLocks noChangeAspect="1"/>
           </p:cNvPicPr>
@@ -5231,7 +5231,7 @@
       </p:pic>
       <p:sp>
         <p:nvSpPr>
-          <p:cNvPr id="1008128721" name="TextBox 8"/>
+          <p:cNvPr id="276763006" name="TextBox 8"/>
           <p:cNvSpPr txBox="1"/>
           <p:nvPr/>
         </p:nvSpPr>
@@ -5269,7 +5269,7 @@
       </p:sp>
       <p:graphicFrame>
         <p:nvGraphicFramePr>
-          <p:cNvPr id="318496111" name="Table 9"/>
+          <p:cNvPr id="563224935" name="Table 9"/>
           <p:cNvGraphicFramePr>
             <a:graphicFrameLocks xmlns:a="http://schemas.openxmlformats.org/drawingml/2006/main" noGrp="1"/>
           </p:cNvGraphicFramePr>
@@ -5744,7 +5744,7 @@
       </p:grpSpPr>
       <p:pic>
         <p:nvPicPr>
-          <p:cNvPr id="896105830" name="Picture 1" descr="sunu_arka_plan.png"/>
+          <p:cNvPr id="296621118" name="Picture 1" descr="sunu_arka_plan.png"/>
           <p:cNvPicPr>
             <a:picLocks noChangeAspect="1"/>
           </p:cNvPicPr>
@@ -5766,7 +5766,7 @@
       </p:pic>
       <p:sp>
         <p:nvSpPr>
-          <p:cNvPr id="1594082014" name="TextBox 2"/>
+          <p:cNvPr id="422506588" name="TextBox 2"/>
           <p:cNvSpPr txBox="1"/>
           <p:nvPr/>
         </p:nvSpPr>
@@ -5804,7 +5804,7 @@
       </p:sp>
       <p:sp>
         <p:nvSpPr>
-          <p:cNvPr id="1845736485" name="TextBox 3"/>
+          <p:cNvPr id="627005041" name="TextBox 3"/>
           <p:cNvSpPr txBox="1"/>
           <p:nvPr/>
         </p:nvSpPr>
@@ -5842,7 +5842,7 @@
       </p:sp>
       <p:sp>
         <p:nvSpPr>
-          <p:cNvPr id="221110182" name="TextBox 4"/>
+          <p:cNvPr id="784964653" name="TextBox 4"/>
           <p:cNvSpPr txBox="1"/>
           <p:nvPr/>
         </p:nvSpPr>
@@ -5880,7 +5880,7 @@
       </p:sp>
       <p:sp>
         <p:nvSpPr>
-          <p:cNvPr id="828640898" name="TextBox 5"/>
+          <p:cNvPr id="147473161" name="TextBox 5"/>
           <p:cNvSpPr txBox="1"/>
           <p:nvPr/>
         </p:nvSpPr>
@@ -5918,7 +5918,7 @@
       </p:sp>
       <p:sp>
         <p:nvSpPr>
-          <p:cNvPr id="1540354374" name="TextBox 6"/>
+          <p:cNvPr id="1172641745" name="TextBox 6"/>
           <p:cNvSpPr txBox="1"/>
           <p:nvPr/>
         </p:nvSpPr>
@@ -5956,7 +5956,7 @@
       </p:sp>
       <p:pic>
         <p:nvPicPr>
-          <p:cNvPr id="197665332" name="Picture 7" descr="24_agustos.png"/>
+          <p:cNvPr id="1878344112" name="Picture 7" descr="24_agustos.png"/>
           <p:cNvPicPr>
             <a:picLocks noChangeAspect="1"/>
           </p:cNvPicPr>
@@ -5983,7 +5983,7 @@
       </p:pic>
       <p:sp>
         <p:nvSpPr>
-          <p:cNvPr id="1272032745" name="TextBox 8"/>
+          <p:cNvPr id="1540227794" name="TextBox 8"/>
           <p:cNvSpPr txBox="1"/>
           <p:nvPr/>
         </p:nvSpPr>
@@ -6021,7 +6021,7 @@
       </p:sp>
       <p:pic>
         <p:nvPicPr>
-          <p:cNvPr id="1934581505" name="Picture 9" descr="28_agustos_performans.png"/>
+          <p:cNvPr id="2007713929" name="Picture 9" descr="28_agustos_performans.png"/>
           <p:cNvPicPr>
             <a:picLocks noChangeAspect="1"/>
           </p:cNvPicPr>
@@ -6048,7 +6048,7 @@
       </p:pic>
       <p:sp>
         <p:nvSpPr>
-          <p:cNvPr id="117965293" name="TextBox 10"/>
+          <p:cNvPr id="1664929203" name="TextBox 10"/>
           <p:cNvSpPr txBox="1"/>
           <p:nvPr/>
         </p:nvSpPr>
@@ -6119,7 +6119,7 @@
       </p:grpSpPr>
       <p:pic>
         <p:nvPicPr>
-          <p:cNvPr id="556214893" name="Picture 1" descr="sunu_arka_plan.png"/>
+          <p:cNvPr id="1144234836" name="Picture 1" descr="sunu_arka_plan.png"/>
           <p:cNvPicPr>
             <a:picLocks noChangeAspect="1"/>
           </p:cNvPicPr>
@@ -6141,7 +6141,7 @@
       </p:pic>
       <p:sp>
         <p:nvSpPr>
-          <p:cNvPr id="909481292" name="TextBox 2"/>
+          <p:cNvPr id="1543331610" name="TextBox 2"/>
           <p:cNvSpPr txBox="1"/>
           <p:nvPr/>
         </p:nvSpPr>
@@ -6179,7 +6179,7 @@
       </p:sp>
       <p:sp>
         <p:nvSpPr>
-          <p:cNvPr id="1604851415" name="TextBox 3"/>
+          <p:cNvPr id="652990379" name="TextBox 3"/>
           <p:cNvSpPr txBox="1"/>
           <p:nvPr/>
         </p:nvSpPr>
@@ -6217,7 +6217,7 @@
       </p:sp>
       <p:sp>
         <p:nvSpPr>
-          <p:cNvPr id="367727618" name="TextBox 5"/>
+          <p:cNvPr id="30786423" name="TextBox 5"/>
           <p:cNvSpPr txBox="1"/>
           <p:nvPr/>
         </p:nvSpPr>
@@ -6255,7 +6255,7 @@
       </p:sp>
       <p:sp>
         <p:nvSpPr>
-          <p:cNvPr id="23791441" name="TextBox 6"/>
+          <p:cNvPr id="1387978786" name="TextBox 6"/>
           <p:cNvSpPr txBox="1"/>
           <p:nvPr/>
         </p:nvSpPr>
@@ -6293,7 +6293,7 @@
       </p:sp>
       <p:sp>
         <p:nvSpPr>
-          <p:cNvPr id="998975914" name="TextBox 7"/>
+          <p:cNvPr id="1994084179" name="TextBox 7"/>
           <p:cNvSpPr txBox="1"/>
           <p:nvPr/>
         </p:nvSpPr>
@@ -6541,7 +6541,7 @@
       </p:sp>
       <p:pic>
         <p:nvPicPr>
-          <p:cNvPr id="467374736" name="Picture 8" descr="28_agustos_hata_enjeksiyonu.png"/>
+          <p:cNvPr id="1451943262" name="Picture 8" descr="28_agustos_hata_enjeksiyonu.png"/>
           <p:cNvPicPr>
             <a:picLocks noChangeAspect="1"/>
           </p:cNvPicPr>
@@ -6568,7 +6568,7 @@
       </p:pic>
       <p:sp>
         <p:nvSpPr>
-          <p:cNvPr id="235012442" name="TextBox 9"/>
+          <p:cNvPr id="1461197162" name="TextBox 9"/>
           <p:cNvSpPr txBox="1"/>
           <p:nvPr/>
         </p:nvSpPr>
@@ -6615,7 +6615,7 @@
       </p:sp>
       <p:sp>
         <p:nvSpPr>
-          <p:cNvPr id="1149889700" name="Rounded Rectangle 10"/>
+          <p:cNvPr id="1332060608" name="Rounded Rectangle 10"/>
           <p:cNvSpPr/>
           <p:nvPr/>
         </p:nvSpPr>
@@ -6708,7 +6708,7 @@
       </p:grpSpPr>
       <p:pic>
         <p:nvPicPr>
-          <p:cNvPr id="1622534634" name="Picture 1" descr="sunu_arka_plan.png"/>
+          <p:cNvPr id="326053260" name="Picture 1" descr="sunu_arka_plan.png"/>
           <p:cNvPicPr>
             <a:picLocks noChangeAspect="1"/>
           </p:cNvPicPr>
@@ -6730,7 +6730,7 @@
       </p:pic>
       <p:sp>
         <p:nvSpPr>
-          <p:cNvPr id="1611041638" name="TextBox 2"/>
+          <p:cNvPr id="1799437857" name="TextBox 2"/>
           <p:cNvSpPr txBox="1"/>
           <p:nvPr/>
         </p:nvSpPr>
@@ -6768,7 +6768,7 @@
       </p:sp>
       <p:sp>
         <p:nvSpPr>
-          <p:cNvPr id="911390767" name="TextBox 3"/>
+          <p:cNvPr id="1595347055" name="TextBox 3"/>
           <p:cNvSpPr txBox="1"/>
           <p:nvPr/>
         </p:nvSpPr>
@@ -6806,7 +6806,7 @@
       </p:sp>
       <p:sp>
         <p:nvSpPr>
-          <p:cNvPr id="1532109517" name="TextBox 4"/>
+          <p:cNvPr id="669804041" name="TextBox 4"/>
           <p:cNvSpPr txBox="1"/>
           <p:nvPr/>
         </p:nvSpPr>
@@ -6844,7 +6844,7 @@
       </p:sp>
       <p:sp>
         <p:nvSpPr>
-          <p:cNvPr id="956546915" name="TextBox 5"/>
+          <p:cNvPr id="92145965" name="TextBox 5"/>
           <p:cNvSpPr txBox="1"/>
           <p:nvPr/>
         </p:nvSpPr>
@@ -6882,7 +6882,7 @@
       </p:sp>
       <p:sp>
         <p:nvSpPr>
-          <p:cNvPr id="1758167065" name="TextBox 6"/>
+          <p:cNvPr id="853892301" name="TextBox 6"/>
           <p:cNvSpPr txBox="1"/>
           <p:nvPr/>
         </p:nvSpPr>
@@ -6920,7 +6920,7 @@
       </p:sp>
       <p:sp>
         <p:nvSpPr>
-          <p:cNvPr id="1606612480" name="Rounded Rectangle 7"/>
+          <p:cNvPr id="1467833390" name="Rounded Rectangle 7"/>
           <p:cNvSpPr/>
           <p:nvPr/>
         </p:nvSpPr>
@@ -6969,7 +6969,7 @@
       </p:sp>
       <p:sp>
         <p:nvSpPr>
-          <p:cNvPr id="1369562096" name="TextBox 8"/>
+          <p:cNvPr id="1004619113" name="TextBox 8"/>
           <p:cNvSpPr txBox="1"/>
           <p:nvPr/>
         </p:nvSpPr>
@@ -7154,7 +7154,7 @@
       </p:sp>
       <p:sp>
         <p:nvSpPr>
-          <p:cNvPr id="99342308" name="TextBox 9"/>
+          <p:cNvPr id="2124583335" name="TextBox 9"/>
           <p:cNvSpPr txBox="1"/>
           <p:nvPr/>
         </p:nvSpPr>
@@ -7192,7 +7192,7 @@
       </p:sp>
       <p:sp>
         <p:nvSpPr>
-          <p:cNvPr id="2039648492" name="Rounded Rectangle 10"/>
+          <p:cNvPr id="1194832747" name="Rounded Rectangle 10"/>
           <p:cNvSpPr/>
           <p:nvPr/>
         </p:nvSpPr>
@@ -7241,7 +7241,7 @@
       </p:sp>
       <p:sp>
         <p:nvSpPr>
-          <p:cNvPr id="1353688906" name="TextBox 11"/>
+          <p:cNvPr id="833353646" name="TextBox 11"/>
           <p:cNvSpPr txBox="1"/>
           <p:nvPr/>
         </p:nvSpPr>
@@ -7462,7 +7462,7 @@
       </p:sp>
       <p:sp>
         <p:nvSpPr>
-          <p:cNvPr id="789906131" name="TextBox 12"/>
+          <p:cNvPr id="151746204" name="TextBox 12"/>
           <p:cNvSpPr txBox="1"/>
           <p:nvPr/>
         </p:nvSpPr>
@@ -7500,7 +7500,7 @@
       </p:sp>
       <p:sp>
         <p:nvSpPr>
-          <p:cNvPr id="1419173953" name="Rounded Rectangle 13"/>
+          <p:cNvPr id="942211204" name="Rounded Rectangle 13"/>
           <p:cNvSpPr/>
           <p:nvPr/>
         </p:nvSpPr>
@@ -7549,7 +7549,7 @@
       </p:sp>
       <p:sp>
         <p:nvSpPr>
-          <p:cNvPr id="304146316" name="TextBox 14"/>
+          <p:cNvPr id="1973587833" name="TextBox 14"/>
           <p:cNvSpPr txBox="1"/>
           <p:nvPr/>
         </p:nvSpPr>
@@ -7698,7 +7698,7 @@
       </p:sp>
       <p:sp>
         <p:nvSpPr>
-          <p:cNvPr id="94628685" name="TextBox 15"/>
+          <p:cNvPr id="1153709157" name="TextBox 15"/>
           <p:cNvSpPr txBox="1"/>
           <p:nvPr/>
         </p:nvSpPr>
@@ -7736,7 +7736,7 @@
       </p:sp>
       <p:sp>
         <p:nvSpPr>
-          <p:cNvPr id="545868436" name="Rounded Rectangle 16"/>
+          <p:cNvPr id="943336946" name="Rounded Rectangle 16"/>
           <p:cNvSpPr/>
           <p:nvPr/>
         </p:nvSpPr>
@@ -7785,7 +7785,7 @@
       </p:sp>
       <p:sp>
         <p:nvSpPr>
-          <p:cNvPr id="2016630820" name="TextBox 17"/>
+          <p:cNvPr id="1406048464" name="TextBox 17"/>
           <p:cNvSpPr txBox="1"/>
           <p:nvPr/>
         </p:nvSpPr>
@@ -8003,7 +8003,7 @@
       </p:grpSpPr>
       <p:pic>
         <p:nvPicPr>
-          <p:cNvPr id="1410939988" name="Picture 1" descr="sunu_arka_plan.png"/>
+          <p:cNvPr id="1598662110" name="Picture 1" descr="sunu_arka_plan.png"/>
           <p:cNvPicPr>
             <a:picLocks noChangeAspect="1"/>
           </p:cNvPicPr>
@@ -8025,7 +8025,7 @@
       </p:pic>
       <p:sp>
         <p:nvSpPr>
-          <p:cNvPr id="214199154" name="TextBox 2"/>
+          <p:cNvPr id="1300173400" name="TextBox 2"/>
           <p:cNvSpPr txBox="1"/>
           <p:nvPr/>
         </p:nvSpPr>
@@ -8063,7 +8063,7 @@
       </p:sp>
       <p:sp>
         <p:nvSpPr>
-          <p:cNvPr id="207100775" name="TextBox 3"/>
+          <p:cNvPr id="243528117" name="TextBox 3"/>
           <p:cNvSpPr txBox="1"/>
           <p:nvPr/>
         </p:nvSpPr>
@@ -8101,7 +8101,7 @@
       </p:sp>
       <p:sp>
         <p:nvSpPr>
-          <p:cNvPr id="1464993185" name="TextBox 4"/>
+          <p:cNvPr id="430604047" name="TextBox 4"/>
           <p:cNvSpPr txBox="1"/>
           <p:nvPr/>
         </p:nvSpPr>
@@ -8139,7 +8139,7 @@
       </p:sp>
       <p:sp>
         <p:nvSpPr>
-          <p:cNvPr id="50982451" name="TextBox 5"/>
+          <p:cNvPr id="1470847572" name="TextBox 5"/>
           <p:cNvSpPr txBox="1"/>
           <p:nvPr/>
         </p:nvSpPr>
@@ -8177,7 +8177,7 @@
       </p:sp>
       <p:sp>
         <p:nvSpPr>
-          <p:cNvPr id="358794521" name="TextBox 6"/>
+          <p:cNvPr id="1596322265" name="TextBox 6"/>
           <p:cNvSpPr txBox="1"/>
           <p:nvPr/>
         </p:nvSpPr>
@@ -8215,7 +8215,7 @@
       </p:sp>
       <p:sp>
         <p:nvSpPr>
-          <p:cNvPr id="907809357" name="Rounded Rectangle 7"/>
+          <p:cNvPr id="582964697" name="Rounded Rectangle 7"/>
           <p:cNvSpPr/>
           <p:nvPr/>
         </p:nvSpPr>
@@ -8266,7 +8266,7 @@
       </p:sp>
       <p:sp>
         <p:nvSpPr>
-          <p:cNvPr id="943435528" name="TextBox 8"/>
+          <p:cNvPr id="687638271" name="TextBox 8"/>
           <p:cNvSpPr txBox="1"/>
           <p:nvPr/>
         </p:nvSpPr>
@@ -8304,7 +8304,7 @@
       </p:sp>
       <p:sp>
         <p:nvSpPr>
-          <p:cNvPr id="402522393" name="TextBox 9"/>
+          <p:cNvPr id="250829749" name="TextBox 9"/>
           <p:cNvSpPr txBox="1"/>
           <p:nvPr/>
         </p:nvSpPr>
@@ -8342,7 +8342,7 @@
       </p:sp>
       <p:sp>
         <p:nvSpPr>
-          <p:cNvPr id="573510071" name="Rounded Rectangle 10"/>
+          <p:cNvPr id="1501676421" name="Rounded Rectangle 10"/>
           <p:cNvSpPr/>
           <p:nvPr/>
         </p:nvSpPr>
@@ -8402,7 +8402,7 @@
       </p:sp>
       <p:sp>
         <p:nvSpPr>
-          <p:cNvPr id="715737305" name="Rounded Rectangle 11"/>
+          <p:cNvPr id="465351234" name="Rounded Rectangle 11"/>
           <p:cNvSpPr/>
           <p:nvPr/>
         </p:nvSpPr>
@@ -8462,7 +8462,7 @@
       </p:sp>
       <p:sp>
         <p:nvSpPr>
-          <p:cNvPr id="721889003" name="Rounded Rectangle 12"/>
+          <p:cNvPr id="950922934" name="Rounded Rectangle 12"/>
           <p:cNvSpPr/>
           <p:nvPr/>
         </p:nvSpPr>
@@ -8522,7 +8522,7 @@
       </p:sp>
       <p:sp>
         <p:nvSpPr>
-          <p:cNvPr id="1682695798" name="Rounded Rectangle 13"/>
+          <p:cNvPr id="2083426888" name="Rounded Rectangle 13"/>
           <p:cNvSpPr/>
           <p:nvPr/>
         </p:nvSpPr>
@@ -8582,7 +8582,7 @@
       </p:sp>
       <p:sp>
         <p:nvSpPr>
-          <p:cNvPr id="1864847756" name="Rounded Rectangle 15"/>
+          <p:cNvPr id="1344476403" name="Rounded Rectangle 15"/>
           <p:cNvSpPr/>
           <p:nvPr/>
         </p:nvSpPr>
@@ -8633,7 +8633,7 @@
       </p:sp>
       <p:sp>
         <p:nvSpPr>
-          <p:cNvPr id="1322703184" name="TextBox 16"/>
+          <p:cNvPr id="1331665163" name="TextBox 16"/>
           <p:cNvSpPr txBox="1"/>
           <p:nvPr/>
         </p:nvSpPr>
@@ -8671,7 +8671,7 @@
       </p:sp>
       <p:sp>
         <p:nvSpPr>
-          <p:cNvPr id="1804612376" name="TextBox 17"/>
+          <p:cNvPr id="1064573724" name="TextBox 17"/>
           <p:cNvSpPr txBox="1"/>
           <p:nvPr/>
         </p:nvSpPr>
@@ -8709,7 +8709,7 @@
       </p:sp>
       <p:sp>
         <p:nvSpPr>
-          <p:cNvPr id="1772930836" name="Rounded Rectangle 18"/>
+          <p:cNvPr id="1906099317" name="Rounded Rectangle 18"/>
           <p:cNvSpPr/>
           <p:nvPr/>
         </p:nvSpPr>
@@ -8769,7 +8769,7 @@
       </p:sp>
       <p:sp>
         <p:nvSpPr>
-          <p:cNvPr id="720382098" name="Rounded Rectangle 19"/>
+          <p:cNvPr id="2021685249" name="Rounded Rectangle 19"/>
           <p:cNvSpPr/>
           <p:nvPr/>
         </p:nvSpPr>
@@ -8829,7 +8829,7 @@
       </p:sp>
       <p:sp>
         <p:nvSpPr>
-          <p:cNvPr id="1244552066" name="Rounded Rectangle 20"/>
+          <p:cNvPr id="85527557" name="Rounded Rectangle 20"/>
           <p:cNvSpPr/>
           <p:nvPr/>
         </p:nvSpPr>
@@ -8889,7 +8889,7 @@
       </p:sp>
       <p:sp>
         <p:nvSpPr>
-          <p:cNvPr id="1354547913" name="Rounded Rectangle 21"/>
+          <p:cNvPr id="430561776" name="Rounded Rectangle 21"/>
           <p:cNvSpPr/>
           <p:nvPr/>
         </p:nvSpPr>
@@ -8949,7 +8949,7 @@
       </p:sp>
       <p:sp>
         <p:nvSpPr>
-          <p:cNvPr id="42668854" name="Rounded Rectangle 22"/>
+          <p:cNvPr id="756605441" name="Rounded Rectangle 22"/>
           <p:cNvSpPr/>
           <p:nvPr/>
         </p:nvSpPr>
@@ -9009,7 +9009,7 @@
       </p:sp>
       <p:sp>
         <p:nvSpPr>
-          <p:cNvPr id="702526876" name="Rounded Rectangle 23"/>
+          <p:cNvPr id="1704227465" name="Rounded Rectangle 23"/>
           <p:cNvSpPr/>
           <p:nvPr/>
         </p:nvSpPr>
@@ -9069,7 +9069,7 @@
       </p:sp>
       <p:sp>
         <p:nvSpPr>
-          <p:cNvPr id="2042877087" name="Rounded Rectangle 24"/>
+          <p:cNvPr id="773562703" name="Rounded Rectangle 24"/>
           <p:cNvSpPr/>
           <p:nvPr/>
         </p:nvSpPr>
@@ -9129,7 +9129,7 @@
       </p:sp>
       <p:sp>
         <p:nvSpPr>
-          <p:cNvPr id="1074049172" name="TextBox 25"/>
+          <p:cNvPr id="135661757" name="TextBox 25"/>
           <p:cNvSpPr txBox="1"/>
           <p:nvPr/>
         </p:nvSpPr>
@@ -9200,7 +9200,7 @@
       </p:grpSpPr>
       <p:pic>
         <p:nvPicPr>
-          <p:cNvPr id="748006386" name="Picture 1" descr="sunu_arka_plan.png"/>
+          <p:cNvPr id="1755373016" name="Picture 1" descr="sunu_arka_plan.png"/>
           <p:cNvPicPr>
             <a:picLocks noChangeAspect="1"/>
           </p:cNvPicPr>
@@ -9222,7 +9222,7 @@
       </p:pic>
       <p:sp>
         <p:nvSpPr>
-          <p:cNvPr id="964250684" name="TextBox 2"/>
+          <p:cNvPr id="1248867399" name="TextBox 2"/>
           <p:cNvSpPr txBox="1"/>
           <p:nvPr/>
         </p:nvSpPr>
@@ -9260,7 +9260,7 @@
       </p:sp>
       <p:sp>
         <p:nvSpPr>
-          <p:cNvPr id="765933167" name="TextBox 3"/>
+          <p:cNvPr id="231577008" name="TextBox 3"/>
           <p:cNvSpPr txBox="1"/>
           <p:nvPr/>
         </p:nvSpPr>
@@ -9298,7 +9298,7 @@
       </p:sp>
       <p:sp>
         <p:nvSpPr>
-          <p:cNvPr id="467882603" name="TextBox 4"/>
+          <p:cNvPr id="2043093133" name="TextBox 4"/>
           <p:cNvSpPr txBox="1"/>
           <p:nvPr/>
         </p:nvSpPr>
@@ -9336,7 +9336,7 @@
       </p:sp>
       <p:sp>
         <p:nvSpPr>
-          <p:cNvPr id="1643183520" name="TextBox 5"/>
+          <p:cNvPr id="1661834721" name="TextBox 5"/>
           <p:cNvSpPr txBox="1"/>
           <p:nvPr/>
         </p:nvSpPr>
@@ -9374,7 +9374,7 @@
       </p:sp>
       <p:sp>
         <p:nvSpPr>
-          <p:cNvPr id="2004860844" name="TextBox 6"/>
+          <p:cNvPr id="53559631" name="TextBox 6"/>
           <p:cNvSpPr txBox="1"/>
           <p:nvPr/>
         </p:nvSpPr>
@@ -9412,7 +9412,7 @@
       </p:sp>
       <p:sp>
         <p:nvSpPr>
-          <p:cNvPr id="895916576" name="Rounded Rectangle 7"/>
+          <p:cNvPr id="506266449" name="Rounded Rectangle 7"/>
           <p:cNvSpPr/>
           <p:nvPr/>
         </p:nvSpPr>
@@ -9463,7 +9463,7 @@
       </p:sp>
       <p:sp>
         <p:nvSpPr>
-          <p:cNvPr id="2139087483" name="TextBox 8"/>
+          <p:cNvPr id="1501988454" name="TextBox 8"/>
           <p:cNvSpPr txBox="1"/>
           <p:nvPr/>
         </p:nvSpPr>
@@ -9501,7 +9501,7 @@
       </p:sp>
       <p:sp>
         <p:nvSpPr>
-          <p:cNvPr id="1656111768" name="TextBox 9"/>
+          <p:cNvPr id="550357935" name="TextBox 9"/>
           <p:cNvSpPr txBox="1"/>
           <p:nvPr/>
         </p:nvSpPr>
@@ -9539,7 +9539,7 @@
       </p:sp>
       <p:sp>
         <p:nvSpPr>
-          <p:cNvPr id="1053571852" name="Rounded Rectangle 10"/>
+          <p:cNvPr id="1238424940" name="Rounded Rectangle 10"/>
           <p:cNvSpPr/>
           <p:nvPr/>
         </p:nvSpPr>
@@ -9590,7 +9590,7 @@
       </p:sp>
       <p:sp>
         <p:nvSpPr>
-          <p:cNvPr id="1997898000" name="TextBox 11"/>
+          <p:cNvPr id="451404488" name="TextBox 11"/>
           <p:cNvSpPr txBox="1"/>
           <p:nvPr/>
         </p:nvSpPr>
@@ -9628,7 +9628,7 @@
       </p:sp>
       <p:sp>
         <p:nvSpPr>
-          <p:cNvPr id="357923815" name="TextBox 12"/>
+          <p:cNvPr id="1687529328" name="TextBox 12"/>
           <p:cNvSpPr txBox="1"/>
           <p:nvPr/>
         </p:nvSpPr>
@@ -9666,7 +9666,7 @@
       </p:sp>
       <p:sp>
         <p:nvSpPr>
-          <p:cNvPr id="1691240715" name="Rounded Rectangle 13"/>
+          <p:cNvPr id="1942623622" name="Rounded Rectangle 13"/>
           <p:cNvSpPr/>
           <p:nvPr/>
         </p:nvSpPr>
@@ -9717,7 +9717,7 @@
       </p:sp>
       <p:sp>
         <p:nvSpPr>
-          <p:cNvPr id="487585253" name="TextBox 14"/>
+          <p:cNvPr id="327108876" name="TextBox 14"/>
           <p:cNvSpPr txBox="1"/>
           <p:nvPr/>
         </p:nvSpPr>
@@ -9755,7 +9755,7 @@
       </p:sp>
       <p:sp>
         <p:nvSpPr>
-          <p:cNvPr id="1271672329" name="TextBox 15"/>
+          <p:cNvPr id="2001555456" name="TextBox 15"/>
           <p:cNvSpPr txBox="1"/>
           <p:nvPr/>
         </p:nvSpPr>
@@ -9826,7 +9826,7 @@
       </p:grpSpPr>
       <p:pic>
         <p:nvPicPr>
-          <p:cNvPr id="584991514" name="Picture 1" descr="sunu_arka_plan.png"/>
+          <p:cNvPr id="1623207636" name="Picture 1" descr="sunu_arka_plan.png"/>
           <p:cNvPicPr>
             <a:picLocks noChangeAspect="1"/>
           </p:cNvPicPr>
@@ -9848,7 +9848,7 @@
       </p:pic>
       <p:sp>
         <p:nvSpPr>
-          <p:cNvPr id="376477406" name="TextBox 2"/>
+          <p:cNvPr id="978785179" name="TextBox 2"/>
           <p:cNvSpPr txBox="1"/>
           <p:nvPr/>
         </p:nvSpPr>
@@ -9886,7 +9886,7 @@
       </p:sp>
       <p:sp>
         <p:nvSpPr>
-          <p:cNvPr id="1628289818" name="TextBox 3"/>
+          <p:cNvPr id="1235835663" name="TextBox 3"/>
           <p:cNvSpPr txBox="1"/>
           <p:nvPr/>
         </p:nvSpPr>
@@ -9924,7 +9924,7 @@
       </p:sp>
       <p:sp>
         <p:nvSpPr>
-          <p:cNvPr id="93910040" name="TextBox 4"/>
+          <p:cNvPr id="38932801" name="TextBox 4"/>
           <p:cNvSpPr txBox="1"/>
           <p:nvPr/>
         </p:nvSpPr>
@@ -9962,7 +9962,7 @@
       </p:sp>
       <p:sp>
         <p:nvSpPr>
-          <p:cNvPr id="1331815209" name="TextBox 5"/>
+          <p:cNvPr id="563548706" name="TextBox 5"/>
           <p:cNvSpPr txBox="1"/>
           <p:nvPr/>
         </p:nvSpPr>
@@ -10000,7 +10000,7 @@
       </p:sp>
       <p:sp>
         <p:nvSpPr>
-          <p:cNvPr id="488486485" name="TextBox 6"/>
+          <p:cNvPr id="2004998819" name="TextBox 6"/>
           <p:cNvSpPr txBox="1"/>
           <p:nvPr/>
         </p:nvSpPr>
@@ -10038,7 +10038,7 @@
       </p:sp>
       <p:sp>
         <p:nvSpPr>
-          <p:cNvPr id="1260958631" name="Rounded Rectangle 7"/>
+          <p:cNvPr id="783302617" name="Rounded Rectangle 7"/>
           <p:cNvSpPr/>
           <p:nvPr/>
         </p:nvSpPr>
@@ -10089,7 +10089,7 @@
       </p:sp>
       <p:sp>
         <p:nvSpPr>
-          <p:cNvPr id="1563610942" name="TextBox 8"/>
+          <p:cNvPr id="52240092" name="TextBox 8"/>
           <p:cNvSpPr txBox="1"/>
           <p:nvPr/>
         </p:nvSpPr>
@@ -10127,7 +10127,7 @@
       </p:sp>
       <p:sp>
         <p:nvSpPr>
-          <p:cNvPr id="1443246455" name="Rounded Rectangle 9"/>
+          <p:cNvPr id="1980971229" name="Rounded Rectangle 9"/>
           <p:cNvSpPr/>
           <p:nvPr/>
         </p:nvSpPr>
@@ -10202,7 +10202,7 @@
       </p:sp>
       <p:sp>
         <p:nvSpPr>
-          <p:cNvPr id="1371953362" name="Right Arrow 10"/>
+          <p:cNvPr id="383012567" name="Right Arrow 10"/>
           <p:cNvSpPr/>
           <p:nvPr/>
         </p:nvSpPr>
@@ -10252,7 +10252,7 @@
       </p:sp>
       <p:sp>
         <p:nvSpPr>
-          <p:cNvPr id="1706595559" name="Rounded Rectangle 11"/>
+          <p:cNvPr id="1540186109" name="Rounded Rectangle 11"/>
           <p:cNvSpPr/>
           <p:nvPr/>
         </p:nvSpPr>
@@ -10327,7 +10327,7 @@
       </p:sp>
       <p:sp>
         <p:nvSpPr>
-          <p:cNvPr id="1333543556" name="Right Arrow 12"/>
+          <p:cNvPr id="453196310" name="Right Arrow 12"/>
           <p:cNvSpPr/>
           <p:nvPr/>
         </p:nvSpPr>
@@ -10377,7 +10377,7 @@
       </p:sp>
       <p:sp>
         <p:nvSpPr>
-          <p:cNvPr id="1642767587" name="Rounded Rectangle 13"/>
+          <p:cNvPr id="1246805739" name="Rounded Rectangle 13"/>
           <p:cNvSpPr/>
           <p:nvPr/>
         </p:nvSpPr>
@@ -10437,7 +10437,7 @@
       </p:sp>
       <p:sp>
         <p:nvSpPr>
-          <p:cNvPr id="42736559" name="Rectangle 14"/>
+          <p:cNvPr id="666864373" name="Rectangle 14"/>
           <p:cNvSpPr/>
           <p:nvPr/>
         </p:nvSpPr>
@@ -10484,7 +10484,7 @@
       </p:sp>
       <p:sp>
         <p:nvSpPr>
-          <p:cNvPr id="1907286871" name="TextBox 15"/>
+          <p:cNvPr id="1732090898" name="TextBox 15"/>
           <p:cNvSpPr txBox="1"/>
           <p:nvPr/>
         </p:nvSpPr>
@@ -10573,7 +10573,7 @@
       </p:grpSpPr>
       <p:pic>
         <p:nvPicPr>
-          <p:cNvPr id="1715394145" name="Picture 1" descr="sunu_arka_plan.png"/>
+          <p:cNvPr id="1224343141" name="Picture 1" descr="sunu_arka_plan.png"/>
           <p:cNvPicPr>
             <a:picLocks noChangeAspect="1"/>
           </p:cNvPicPr>
@@ -10595,7 +10595,7 @@
       </p:pic>
       <p:sp>
         <p:nvSpPr>
-          <p:cNvPr id="1402318314" name="TextBox 2"/>
+          <p:cNvPr id="968395720" name="TextBox 2"/>
           <p:cNvSpPr txBox="1"/>
           <p:nvPr/>
         </p:nvSpPr>
@@ -10633,7 +10633,7 @@
       </p:sp>
       <p:sp>
         <p:nvSpPr>
-          <p:cNvPr id="468561133" name="TextBox 3"/>
+          <p:cNvPr id="1327339462" name="TextBox 3"/>
           <p:cNvSpPr txBox="1"/>
           <p:nvPr/>
         </p:nvSpPr>
@@ -10671,7 +10671,7 @@
       </p:sp>
       <p:sp>
         <p:nvSpPr>
-          <p:cNvPr id="229296707" name="TextBox 4"/>
+          <p:cNvPr id="532261765" name="TextBox 4"/>
           <p:cNvSpPr txBox="1"/>
           <p:nvPr/>
         </p:nvSpPr>
@@ -10709,7 +10709,7 @@
       </p:sp>
       <p:sp>
         <p:nvSpPr>
-          <p:cNvPr id="9590174" name="TextBox 5"/>
+          <p:cNvPr id="946514917" name="TextBox 5"/>
           <p:cNvSpPr txBox="1"/>
           <p:nvPr/>
         </p:nvSpPr>
@@ -10747,7 +10747,7 @@
       </p:sp>
       <p:sp>
         <p:nvSpPr>
-          <p:cNvPr id="289728060" name="TextBox 6"/>
+          <p:cNvPr id="658569168" name="TextBox 6"/>
           <p:cNvSpPr txBox="1"/>
           <p:nvPr/>
         </p:nvSpPr>
@@ -10785,7 +10785,7 @@
       </p:sp>
       <p:sp>
         <p:nvSpPr>
-          <p:cNvPr id="273782784" name="Rounded Rectangle 7"/>
+          <p:cNvPr id="609813854" name="Rounded Rectangle 7"/>
           <p:cNvSpPr/>
           <p:nvPr/>
         </p:nvSpPr>
@@ -10836,7 +10836,7 @@
       </p:sp>
       <p:sp>
         <p:nvSpPr>
-          <p:cNvPr id="405379908" name="TextBox 8"/>
+          <p:cNvPr id="2108438138" name="TextBox 8"/>
           <p:cNvSpPr txBox="1"/>
           <p:nvPr/>
         </p:nvSpPr>
@@ -10874,7 +10874,7 @@
       </p:sp>
       <p:sp>
         <p:nvSpPr>
-          <p:cNvPr id="1556721661" name="TextBox 9"/>
+          <p:cNvPr id="1285982259" name="TextBox 9"/>
           <p:cNvSpPr txBox="1"/>
           <p:nvPr/>
         </p:nvSpPr>
@@ -10912,7 +10912,7 @@
       </p:sp>
       <p:sp>
         <p:nvSpPr>
-          <p:cNvPr id="1461991722" name="TextBox 10"/>
+          <p:cNvPr id="783690736" name="TextBox 10"/>
           <p:cNvSpPr txBox="1"/>
           <p:nvPr/>
         </p:nvSpPr>
@@ -11106,7 +11106,7 @@
       </p:sp>
       <p:sp>
         <p:nvSpPr>
-          <p:cNvPr id="69368555" name="Rounded Rectangle 11"/>
+          <p:cNvPr id="724344214" name="Rounded Rectangle 11"/>
           <p:cNvSpPr/>
           <p:nvPr/>
         </p:nvSpPr>
@@ -11157,7 +11157,7 @@
       </p:sp>
       <p:sp>
         <p:nvSpPr>
-          <p:cNvPr id="856141587" name="TextBox 12"/>
+          <p:cNvPr id="1828934359" name="TextBox 12"/>
           <p:cNvSpPr txBox="1"/>
           <p:nvPr/>
         </p:nvSpPr>
@@ -11195,7 +11195,7 @@
       </p:sp>
       <p:sp>
         <p:nvSpPr>
-          <p:cNvPr id="1764031281" name="TextBox 13"/>
+          <p:cNvPr id="88122230" name="TextBox 13"/>
           <p:cNvSpPr txBox="1"/>
           <p:nvPr/>
         </p:nvSpPr>
@@ -11233,7 +11233,7 @@
       </p:sp>
       <p:sp>
         <p:nvSpPr>
-          <p:cNvPr id="625247418" name="TextBox 14"/>
+          <p:cNvPr id="2108199627" name="TextBox 14"/>
           <p:cNvSpPr txBox="1"/>
           <p:nvPr/>
         </p:nvSpPr>
@@ -11424,7 +11424,7 @@
       </p:grpSpPr>
       <p:pic>
         <p:nvPicPr>
-          <p:cNvPr id="1805878157" name="Picture 1" descr="sunu_arka_plan.png"/>
+          <p:cNvPr id="36584610" name="Picture 1" descr="sunu_arka_plan.png"/>
           <p:cNvPicPr>
             <a:picLocks noChangeAspect="1"/>
           </p:cNvPicPr>
@@ -11446,7 +11446,7 @@
       </p:pic>
       <p:sp>
         <p:nvSpPr>
-          <p:cNvPr id="1128138244" name="TextBox 2"/>
+          <p:cNvPr id="2034651236" name="TextBox 2"/>
           <p:cNvSpPr txBox="1"/>
           <p:nvPr/>
         </p:nvSpPr>
@@ -11484,7 +11484,7 @@
       </p:sp>
       <p:sp>
         <p:nvSpPr>
-          <p:cNvPr id="1759310836" name="TextBox 3"/>
+          <p:cNvPr id="1471565025" name="TextBox 3"/>
           <p:cNvSpPr txBox="1"/>
           <p:nvPr/>
         </p:nvSpPr>
@@ -11522,7 +11522,7 @@
       </p:sp>
       <p:sp>
         <p:nvSpPr>
-          <p:cNvPr id="988708585" name="TextBox 4"/>
+          <p:cNvPr id="1647177239" name="TextBox 4"/>
           <p:cNvSpPr txBox="1"/>
           <p:nvPr/>
         </p:nvSpPr>
@@ -11560,7 +11560,7 @@
       </p:sp>
       <p:sp>
         <p:nvSpPr>
-          <p:cNvPr id="613261610" name="TextBox 5"/>
+          <p:cNvPr id="1647111904" name="TextBox 5"/>
           <p:cNvSpPr txBox="1"/>
           <p:nvPr/>
         </p:nvSpPr>
@@ -11598,7 +11598,7 @@
       </p:sp>
       <p:sp>
         <p:nvSpPr>
-          <p:cNvPr id="1389592285" name="TextBox 6"/>
+          <p:cNvPr id="737236347" name="TextBox 6"/>
           <p:cNvSpPr txBox="1"/>
           <p:nvPr/>
         </p:nvSpPr>
@@ -11636,7 +11636,7 @@
       </p:sp>
       <p:graphicFrame>
         <p:nvGraphicFramePr>
-          <p:cNvPr id="771598774" name="Table 7"/>
+          <p:cNvPr id="1607475462" name="Table 7"/>
           <p:cNvGraphicFramePr>
             <a:graphicFrameLocks xmlns:a="http://schemas.openxmlformats.org/drawingml/2006/main" noGrp="1"/>
           </p:cNvGraphicFramePr>
@@ -12149,7 +12149,7 @@
       </p:grpSpPr>
       <p:pic>
         <p:nvPicPr>
-          <p:cNvPr id="1663175677" name="Picture 1" descr="sunu_arka_plan.png"/>
+          <p:cNvPr id="318529575" name="Picture 1" descr="sunu_arka_plan.png"/>
           <p:cNvPicPr>
             <a:picLocks noChangeAspect="1"/>
           </p:cNvPicPr>
@@ -12161,7 +12161,7 @@
         </p:blipFill>
         <p:spPr bwMode="auto">
           <a:xfrm>
-            <a:off x="0" y="0"/>
+            <a:off x="-5349" y="0"/>
             <a:ext cx="12191695" cy="6858000"/>
           </a:xfrm>
           <a:prstGeom prst="rect">
@@ -12171,7 +12171,7 @@
       </p:pic>
       <p:sp>
         <p:nvSpPr>
-          <p:cNvPr id="207169666" name="TextBox 2"/>
+          <p:cNvPr id="2024575203" name="TextBox 2"/>
           <p:cNvSpPr txBox="1"/>
           <p:nvPr/>
         </p:nvSpPr>
@@ -12209,7 +12209,7 @@
       </p:sp>
       <p:sp>
         <p:nvSpPr>
-          <p:cNvPr id="2008901684" name="TextBox 3"/>
+          <p:cNvPr id="1924710329" name="TextBox 3"/>
           <p:cNvSpPr txBox="1"/>
           <p:nvPr/>
         </p:nvSpPr>
@@ -12247,7 +12247,7 @@
       </p:sp>
       <p:sp>
         <p:nvSpPr>
-          <p:cNvPr id="2045583840" name="TextBox 4"/>
+          <p:cNvPr id="1636548376" name="TextBox 4"/>
           <p:cNvSpPr txBox="1"/>
           <p:nvPr/>
         </p:nvSpPr>
@@ -12285,7 +12285,7 @@
       </p:sp>
       <p:sp>
         <p:nvSpPr>
-          <p:cNvPr id="1410853539" name="TextBox 5"/>
+          <p:cNvPr id="806037955" name="TextBox 5"/>
           <p:cNvSpPr txBox="1"/>
           <p:nvPr/>
         </p:nvSpPr>
@@ -12323,7 +12323,7 @@
       </p:sp>
       <p:sp>
         <p:nvSpPr>
-          <p:cNvPr id="1816870371" name="TextBox 6"/>
+          <p:cNvPr id="307328339" name="TextBox 6"/>
           <p:cNvSpPr txBox="1"/>
           <p:nvPr/>
         </p:nvSpPr>
@@ -12361,7 +12361,7 @@
       </p:sp>
       <p:sp>
         <p:nvSpPr>
-          <p:cNvPr id="1906395178" name="Rounded Rectangle 7"/>
+          <p:cNvPr id="936841893" name="Rounded Rectangle 7"/>
           <p:cNvSpPr/>
           <p:nvPr/>
         </p:nvSpPr>
@@ -12421,7 +12421,7 @@
       </p:sp>
       <p:cxnSp>
         <p:nvCxnSpPr>
-          <p:cNvPr id="280999258" name="Connector 8"/>
+          <p:cNvPr id="570694036" name="Connector 8"/>
           <p:cNvCxnSpPr/>
           <p:nvPr/>
         </p:nvCxnSpPr>
@@ -12456,7 +12456,7 @@
       </p:cxnSp>
       <p:sp>
         <p:nvSpPr>
-          <p:cNvPr id="1169493930" name="Isosceles Triangle 9"/>
+          <p:cNvPr id="343414188" name="Isosceles Triangle 9"/>
           <p:cNvSpPr/>
           <p:nvPr/>
         </p:nvSpPr>
@@ -12505,7 +12505,7 @@
       </p:sp>
       <p:sp>
         <p:nvSpPr>
-          <p:cNvPr id="1290104734" name="Rounded Rectangle 10"/>
+          <p:cNvPr id="627131537" name="Rounded Rectangle 10"/>
           <p:cNvSpPr/>
           <p:nvPr/>
         </p:nvSpPr>
@@ -12580,7 +12580,7 @@
       </p:sp>
       <p:cxnSp>
         <p:nvCxnSpPr>
-          <p:cNvPr id="1908062234" name="Connector 11"/>
+          <p:cNvPr id="1341391950" name="Connector 11"/>
           <p:cNvCxnSpPr/>
           <p:nvPr/>
         </p:nvCxnSpPr>
@@ -12615,7 +12615,7 @@
       </p:cxnSp>
       <p:sp>
         <p:nvSpPr>
-          <p:cNvPr id="1933665401" name="Isosceles Triangle 12"/>
+          <p:cNvPr id="634433620" name="Isosceles Triangle 12"/>
           <p:cNvSpPr/>
           <p:nvPr/>
         </p:nvSpPr>
@@ -12664,7 +12664,7 @@
       </p:sp>
       <p:cxnSp>
         <p:nvCxnSpPr>
-          <p:cNvPr id="911263567" name="Connector 13"/>
+          <p:cNvPr id="411644121" name="Connector 13"/>
           <p:cNvCxnSpPr/>
           <p:nvPr/>
         </p:nvCxnSpPr>
@@ -12699,7 +12699,7 @@
       </p:cxnSp>
       <p:sp>
         <p:nvSpPr>
-          <p:cNvPr id="1431731602" name="Isosceles Triangle 14"/>
+          <p:cNvPr id="943075536" name="Isosceles Triangle 14"/>
           <p:cNvSpPr/>
           <p:nvPr/>
         </p:nvSpPr>
@@ -12748,83 +12748,7 @@
       </p:sp>
       <p:sp>
         <p:nvSpPr>
-          <p:cNvPr id="577031035" name="TextBox 15"/>
-          <p:cNvSpPr txBox="1"/>
-          <p:nvPr/>
-        </p:nvSpPr>
-        <p:spPr bwMode="auto">
-          <a:xfrm>
-            <a:off x="1888806" y="2700623"/>
-            <a:ext cx="2194560" cy="201168"/>
-          </a:xfrm>
-          <a:prstGeom prst="rect">
-            <a:avLst/>
-          </a:prstGeom>
-          <a:noFill/>
-        </p:spPr>
-        <p:txBody>
-          <a:bodyPr wrap="square" lIns="0" tIns="0" rIns="0" bIns="0">
-            <a:spAutoFit/>
-          </a:bodyPr>
-          <a:lstStyle/>
-          <a:p>
-            <a:pPr algn="ctr">
-              <a:defRPr/>
-            </a:pPr>
-            <a:r>
-              <a:rPr sz="700" b="0" i="0">
-                <a:solidFill>
-                  <a:srgbClr val="5B6B80"/>
-                </a:solidFill>
-                <a:latin typeface="Consolas"/>
-              </a:rPr>
-              <a:t>MAC seçimi</a:t>
-            </a:r>
-            <a:endParaRPr/>
-          </a:p>
-        </p:txBody>
-      </p:sp>
-      <p:sp>
-        <p:nvSpPr>
-          <p:cNvPr id="1288243430" name="TextBox 16"/>
-          <p:cNvSpPr txBox="1"/>
-          <p:nvPr/>
-        </p:nvSpPr>
-        <p:spPr bwMode="auto">
-          <a:xfrm>
-            <a:off x="4146232" y="2700623"/>
-            <a:ext cx="2194560" cy="201168"/>
-          </a:xfrm>
-          <a:prstGeom prst="rect">
-            <a:avLst/>
-          </a:prstGeom>
-          <a:noFill/>
-        </p:spPr>
-        <p:txBody>
-          <a:bodyPr wrap="square" lIns="0" tIns="0" rIns="0" bIns="0">
-            <a:spAutoFit/>
-          </a:bodyPr>
-          <a:lstStyle/>
-          <a:p>
-            <a:pPr algn="ctr">
-              <a:defRPr/>
-            </a:pPr>
-            <a:r>
-              <a:rPr sz="700" b="0" i="0">
-                <a:solidFill>
-                  <a:srgbClr val="5B6B80"/>
-                </a:solidFill>
-                <a:latin typeface="Consolas"/>
-              </a:rPr>
-              <a:t>PHY seçimi</a:t>
-            </a:r>
-            <a:endParaRPr/>
-          </a:p>
-        </p:txBody>
-      </p:sp>
-      <p:sp>
-        <p:nvSpPr>
-          <p:cNvPr id="2088267234" name="Rounded Rectangle 17"/>
+          <p:cNvPr id="595046934" name="Rounded Rectangle 17"/>
           <p:cNvSpPr/>
           <p:nvPr/>
         </p:nvSpPr>
@@ -12874,7 +12798,7 @@
       </p:sp>
       <p:sp>
         <p:nvSpPr>
-          <p:cNvPr id="499056383" name="TextBox 18"/>
+          <p:cNvPr id="569465263" name="TextBox 18"/>
           <p:cNvSpPr txBox="1"/>
           <p:nvPr/>
         </p:nvSpPr>
@@ -12912,45 +12836,7 @@
       </p:sp>
       <p:sp>
         <p:nvSpPr>
-          <p:cNvPr id="39499849" name="TextBox 19"/>
-          <p:cNvSpPr txBox="1"/>
-          <p:nvPr/>
-        </p:nvSpPr>
-        <p:spPr bwMode="auto">
-          <a:xfrm>
-            <a:off x="820102" y="3108245"/>
-            <a:ext cx="2977515" cy="164592"/>
-          </a:xfrm>
-          <a:prstGeom prst="rect">
-            <a:avLst/>
-          </a:prstGeom>
-          <a:noFill/>
-        </p:spPr>
-        <p:txBody>
-          <a:bodyPr wrap="square" lIns="0" tIns="0" rIns="0" bIns="0">
-            <a:spAutoFit/>
-          </a:bodyPr>
-          <a:lstStyle/>
-          <a:p>
-            <a:pPr>
-              <a:defRPr/>
-            </a:pPr>
-            <a:r>
-              <a:rPr sz="700" b="0" i="1">
-                <a:solidFill>
-                  <a:srgbClr val="5B6B80"/>
-                </a:solidFill>
-                <a:latin typeface="Calibri"/>
-              </a:rPr>
-              <a:t>yalnızca biri derlenir</a:t>
-            </a:r>
-            <a:endParaRPr/>
-          </a:p>
-        </p:txBody>
-      </p:sp>
-      <p:sp>
-        <p:nvSpPr>
-          <p:cNvPr id="665285581" name="Rounded Rectangle 20"/>
+          <p:cNvPr id="1329387361" name="Rounded Rectangle 20"/>
           <p:cNvSpPr/>
           <p:nvPr/>
         </p:nvSpPr>
@@ -13000,7 +12886,7 @@
       </p:sp>
       <p:sp>
         <p:nvSpPr>
-          <p:cNvPr id="180046994" name="TextBox 21"/>
+          <p:cNvPr id="1569223008" name="TextBox 21"/>
           <p:cNvSpPr txBox="1"/>
           <p:nvPr/>
         </p:nvSpPr>
@@ -13038,45 +12924,7 @@
       </p:sp>
       <p:sp>
         <p:nvSpPr>
-          <p:cNvPr id="1019636211" name="TextBox 22"/>
-          <p:cNvSpPr txBox="1"/>
-          <p:nvPr/>
-        </p:nvSpPr>
-        <p:spPr bwMode="auto">
-          <a:xfrm>
-            <a:off x="4431982" y="3108245"/>
-            <a:ext cx="2977515" cy="164592"/>
-          </a:xfrm>
-          <a:prstGeom prst="rect">
-            <a:avLst/>
-          </a:prstGeom>
-          <a:noFill/>
-        </p:spPr>
-        <p:txBody>
-          <a:bodyPr wrap="square" lIns="0" tIns="0" rIns="0" bIns="0">
-            <a:spAutoFit/>
-          </a:bodyPr>
-          <a:lstStyle/>
-          <a:p>
-            <a:pPr>
-              <a:defRPr/>
-            </a:pPr>
-            <a:r>
-              <a:rPr sz="700" b="0" i="1">
-                <a:solidFill>
-                  <a:srgbClr val="5B6B80"/>
-                </a:solidFill>
-                <a:latin typeface="Calibri"/>
-              </a:rPr>
-              <a:t>yalnızca biri derlenir</a:t>
-            </a:r>
-            <a:endParaRPr/>
-          </a:p>
-        </p:txBody>
-      </p:sp>
-      <p:sp>
-        <p:nvSpPr>
-          <p:cNvPr id="526835678" name="Rounded Rectangle 23"/>
+          <p:cNvPr id="561793625" name="Rounded Rectangle 23"/>
           <p:cNvSpPr/>
           <p:nvPr/>
         </p:nvSpPr>
@@ -13151,7 +12999,7 @@
       </p:sp>
       <p:sp>
         <p:nvSpPr>
-          <p:cNvPr id="208444840" name="Rounded Rectangle 24"/>
+          <p:cNvPr id="1721959228" name="Rounded Rectangle 24"/>
           <p:cNvSpPr/>
           <p:nvPr/>
         </p:nvSpPr>
@@ -13227,7 +13075,7 @@
       </p:sp>
       <p:sp>
         <p:nvSpPr>
-          <p:cNvPr id="1538035549" name="TextBox 25"/>
+          <p:cNvPr id="1421374307" name="TextBox 25"/>
           <p:cNvSpPr txBox="1"/>
           <p:nvPr/>
         </p:nvSpPr>
@@ -13265,7 +13113,7 @@
       </p:sp>
       <p:sp>
         <p:nvSpPr>
-          <p:cNvPr id="2014663630" name="Rounded Rectangle 26"/>
+          <p:cNvPr id="1065046718" name="Rounded Rectangle 26"/>
           <p:cNvSpPr/>
           <p:nvPr/>
         </p:nvSpPr>
@@ -13340,7 +13188,7 @@
       </p:sp>
       <p:sp>
         <p:nvSpPr>
-          <p:cNvPr id="1823980346" name="Rounded Rectangle 27"/>
+          <p:cNvPr id="285422275" name="Rounded Rectangle 27"/>
           <p:cNvSpPr/>
           <p:nvPr/>
         </p:nvSpPr>
@@ -13416,7 +13264,7 @@
       </p:sp>
       <p:sp>
         <p:nvSpPr>
-          <p:cNvPr id="1898738489" name="TextBox 28"/>
+          <p:cNvPr id="1500949588" name="TextBox 28"/>
           <p:cNvSpPr txBox="1"/>
           <p:nvPr/>
         </p:nvSpPr>
@@ -13454,7 +13302,7 @@
       </p:sp>
       <p:cxnSp>
         <p:nvCxnSpPr>
-          <p:cNvPr id="2000789219" name="Connector 29"/>
+          <p:cNvPr id="1630701335" name="Connector 29"/>
           <p:cNvCxnSpPr/>
           <p:nvPr/>
         </p:nvCxnSpPr>
@@ -13490,7 +13338,7 @@
       </p:cxnSp>
       <p:sp>
         <p:nvSpPr>
-          <p:cNvPr id="1281802411" name="Isosceles Triangle 30"/>
+          <p:cNvPr id="809676899" name="Isosceles Triangle 30"/>
           <p:cNvSpPr/>
           <p:nvPr/>
         </p:nvSpPr>
@@ -13539,7 +13387,7 @@
       </p:sp>
       <p:cxnSp>
         <p:nvCxnSpPr>
-          <p:cNvPr id="331449054" name="Connector 31"/>
+          <p:cNvPr id="560931179" name="Connector 31"/>
           <p:cNvCxnSpPr/>
           <p:nvPr/>
         </p:nvCxnSpPr>
@@ -13575,7 +13423,7 @@
       </p:cxnSp>
       <p:sp>
         <p:nvSpPr>
-          <p:cNvPr id="622660196" name="Isosceles Triangle 32"/>
+          <p:cNvPr id="1412541810" name="Isosceles Triangle 32"/>
           <p:cNvSpPr/>
           <p:nvPr/>
         </p:nvSpPr>
@@ -13624,7 +13472,7 @@
       </p:sp>
       <p:cxnSp>
         <p:nvCxnSpPr>
-          <p:cNvPr id="296294995" name="Connector 33"/>
+          <p:cNvPr id="1393413993" name="Connector 33"/>
           <p:cNvCxnSpPr/>
           <p:nvPr/>
         </p:nvCxnSpPr>
@@ -13660,7 +13508,7 @@
       </p:cxnSp>
       <p:sp>
         <p:nvSpPr>
-          <p:cNvPr id="880857417" name="Isosceles Triangle 34"/>
+          <p:cNvPr id="1980296184" name="Isosceles Triangle 34"/>
           <p:cNvSpPr/>
           <p:nvPr/>
         </p:nvSpPr>
@@ -13709,7 +13557,7 @@
       </p:sp>
       <p:cxnSp>
         <p:nvCxnSpPr>
-          <p:cNvPr id="209933347" name="Connector 35"/>
+          <p:cNvPr id="201813558" name="Connector 35"/>
           <p:cNvCxnSpPr/>
           <p:nvPr/>
         </p:nvCxnSpPr>
@@ -13745,7 +13593,7 @@
       </p:cxnSp>
       <p:sp>
         <p:nvSpPr>
-          <p:cNvPr id="458887326" name="Isosceles Triangle 36"/>
+          <p:cNvPr id="1343138575" name="Isosceles Triangle 36"/>
           <p:cNvSpPr/>
           <p:nvPr/>
         </p:nvSpPr>
@@ -13794,7 +13642,7 @@
       </p:sp>
       <p:sp>
         <p:nvSpPr>
-          <p:cNvPr id="892045872" name="Rounded Rectangle 37"/>
+          <p:cNvPr id="1993450793" name="Rounded Rectangle 37"/>
           <p:cNvSpPr/>
           <p:nvPr/>
         </p:nvSpPr>
@@ -13854,7 +13702,7 @@
       </p:sp>
       <p:sp>
         <p:nvSpPr>
-          <p:cNvPr id="191256941" name="Rounded Rectangle 38"/>
+          <p:cNvPr id="235391384" name="Rounded Rectangle 38"/>
           <p:cNvSpPr/>
           <p:nvPr/>
         </p:nvSpPr>
@@ -13914,7 +13762,7 @@
       </p:sp>
       <p:cxnSp>
         <p:nvCxnSpPr>
-          <p:cNvPr id="1297983422" name="Connector 39"/>
+          <p:cNvPr id="1369035978" name="Connector 39"/>
           <p:cNvCxnSpPr/>
           <p:nvPr/>
         </p:nvCxnSpPr>
@@ -13949,7 +13797,7 @@
       </p:cxnSp>
       <p:cxnSp>
         <p:nvCxnSpPr>
-          <p:cNvPr id="297294561" name="Connector 40"/>
+          <p:cNvPr id="2109835940" name="Connector 40"/>
           <p:cNvCxnSpPr/>
           <p:nvPr/>
         </p:nvCxnSpPr>
@@ -13984,7 +13832,7 @@
       </p:cxnSp>
       <p:cxnSp>
         <p:nvCxnSpPr>
-          <p:cNvPr id="901784097" name="Connector 41"/>
+          <p:cNvPr id="544790814" name="Connector 41"/>
           <p:cNvCxnSpPr/>
           <p:nvPr/>
         </p:nvCxnSpPr>
@@ -14019,7 +13867,7 @@
       </p:cxnSp>
       <p:cxnSp>
         <p:nvCxnSpPr>
-          <p:cNvPr id="908796491" name="Connector 42"/>
+          <p:cNvPr id="346453308" name="Connector 42"/>
           <p:cNvCxnSpPr/>
           <p:nvPr/>
         </p:nvCxnSpPr>
@@ -14054,7 +13902,7 @@
       </p:cxnSp>
       <p:sp>
         <p:nvSpPr>
-          <p:cNvPr id="1228893537" name="Isosceles Triangle 43"/>
+          <p:cNvPr id="2072052736" name="Isosceles Triangle 43"/>
           <p:cNvSpPr/>
           <p:nvPr/>
         </p:nvSpPr>
@@ -14103,7 +13951,7 @@
       </p:sp>
       <p:sp>
         <p:nvSpPr>
-          <p:cNvPr id="1839165407" name="Rounded Rectangle 44"/>
+          <p:cNvPr id="1983258917" name="Rounded Rectangle 44"/>
           <p:cNvSpPr/>
           <p:nvPr/>
         </p:nvSpPr>
@@ -14153,13 +14001,13 @@
       </p:sp>
       <p:sp>
         <p:nvSpPr>
-          <p:cNvPr id="1629871008" name="TextBox 45"/>
+          <p:cNvPr id="604785191" name="TextBox 45"/>
           <p:cNvSpPr txBox="1"/>
           <p:nvPr/>
         </p:nvSpPr>
         <p:spPr bwMode="auto">
           <a:xfrm>
-            <a:off x="820102" y="4372832"/>
+            <a:off x="962976" y="4468081"/>
             <a:ext cx="6589395" cy="182880"/>
           </a:xfrm>
           <a:prstGeom prst="rect">
@@ -14191,13 +14039,13 @@
       </p:sp>
       <p:sp>
         <p:nvSpPr>
-          <p:cNvPr id="444236341" name="Rounded Rectangle 46"/>
+          <p:cNvPr id="2062484194" name="Rounded Rectangle 46"/>
           <p:cNvSpPr/>
           <p:nvPr/>
         </p:nvSpPr>
         <p:spPr bwMode="auto">
           <a:xfrm>
-            <a:off x="1123711" y="4505563"/>
+            <a:off x="1028460" y="4934187"/>
             <a:ext cx="2144553" cy="361188"/>
           </a:xfrm>
           <a:prstGeom prst="roundRect">
@@ -14266,13 +14114,13 @@
       </p:sp>
       <p:cxnSp>
         <p:nvCxnSpPr>
-          <p:cNvPr id="1646697169" name="Connector 47"/>
+          <p:cNvPr id="1219071199" name="Connector 47"/>
           <p:cNvCxnSpPr/>
           <p:nvPr/>
         </p:nvCxnSpPr>
         <p:spPr bwMode="auto">
           <a:xfrm>
-            <a:off x="3268265" y="4686157"/>
+            <a:off x="3173014" y="5114781"/>
             <a:ext cx="395050" cy="0"/>
           </a:xfrm>
           <a:prstGeom prst="line">
@@ -14301,13 +14149,13 @@
       </p:cxnSp>
       <p:sp>
         <p:nvSpPr>
-          <p:cNvPr id="149735739" name="Isosceles Triangle 48"/>
+          <p:cNvPr id="289277701" name="Isosceles Triangle 48"/>
           <p:cNvSpPr/>
           <p:nvPr/>
         </p:nvSpPr>
         <p:spPr bwMode="auto">
           <a:xfrm rot="5400000">
-            <a:off x="3631311" y="4654153"/>
+            <a:off x="3488435" y="5082777"/>
             <a:ext cx="64008" cy="64008"/>
           </a:xfrm>
           <a:prstGeom prst="triangle">
@@ -14350,13 +14198,13 @@
       </p:sp>
       <p:sp>
         <p:nvSpPr>
-          <p:cNvPr id="1386936630" name="Rounded Rectangle 49"/>
+          <p:cNvPr id="1794171334" name="Rounded Rectangle 49"/>
           <p:cNvSpPr/>
           <p:nvPr/>
         </p:nvSpPr>
         <p:spPr bwMode="auto">
           <a:xfrm>
-            <a:off x="3663315" y="4505563"/>
+            <a:off x="3568064" y="4934187"/>
             <a:ext cx="2144553" cy="361188"/>
           </a:xfrm>
           <a:prstGeom prst="roundRect">
@@ -14425,13 +14273,13 @@
       </p:sp>
       <p:cxnSp>
         <p:nvCxnSpPr>
-          <p:cNvPr id="1856603330" name="Connector 50"/>
+          <p:cNvPr id="2047381140" name="Connector 50"/>
           <p:cNvCxnSpPr/>
           <p:nvPr/>
         </p:nvCxnSpPr>
         <p:spPr bwMode="auto">
           <a:xfrm>
-            <a:off x="5807868" y="4686157"/>
+            <a:off x="5712617" y="5114781"/>
             <a:ext cx="395050" cy="0"/>
           </a:xfrm>
           <a:prstGeom prst="line">
@@ -14460,13 +14308,13 @@
       </p:cxnSp>
       <p:sp>
         <p:nvSpPr>
-          <p:cNvPr id="470313008" name="Isosceles Triangle 51"/>
+          <p:cNvPr id="963628321" name="Isosceles Triangle 51"/>
           <p:cNvSpPr/>
           <p:nvPr/>
         </p:nvSpPr>
         <p:spPr bwMode="auto">
           <a:xfrm rot="5400000">
-            <a:off x="6170914" y="4654153"/>
+            <a:off x="6058494" y="5082777"/>
             <a:ext cx="64008" cy="64008"/>
           </a:xfrm>
           <a:prstGeom prst="triangle">
@@ -14509,13 +14357,13 @@
       </p:sp>
       <p:sp>
         <p:nvSpPr>
-          <p:cNvPr id="379150912" name="Rounded Rectangle 52"/>
+          <p:cNvPr id="492087326" name="Rounded Rectangle 52"/>
           <p:cNvSpPr/>
           <p:nvPr/>
         </p:nvSpPr>
         <p:spPr bwMode="auto">
           <a:xfrm>
-            <a:off x="6202918" y="4505563"/>
+            <a:off x="6107667" y="4934187"/>
             <a:ext cx="1185148" cy="361188"/>
           </a:xfrm>
           <a:prstGeom prst="roundRect">
@@ -14578,44 +14426,6 @@
                 <a:latin typeface="Calibri"/>
               </a:rPr>
               <a:t>opsiyonel</a:t>
-            </a:r>
-            <a:endParaRPr/>
-          </a:p>
-        </p:txBody>
-      </p:sp>
-      <p:sp>
-        <p:nvSpPr>
-          <p:cNvPr id="2068052795" name="TextBox 53"/>
-          <p:cNvSpPr txBox="1"/>
-          <p:nvPr/>
-        </p:nvSpPr>
-        <p:spPr bwMode="auto">
-          <a:xfrm>
-            <a:off x="502920" y="5989605"/>
-            <a:ext cx="11185855" cy="457200"/>
-          </a:xfrm>
-          <a:prstGeom prst="rect">
-            <a:avLst/>
-          </a:prstGeom>
-          <a:noFill/>
-        </p:spPr>
-        <p:txBody>
-          <a:bodyPr wrap="square" lIns="0" tIns="0" rIns="0" bIns="0">
-            <a:spAutoFit/>
-          </a:bodyPr>
-          <a:lstStyle/>
-          <a:p>
-            <a:pPr algn="ctr">
-              <a:defRPr/>
-            </a:pPr>
-            <a:r>
-              <a:rPr sz="1150" b="0" i="1">
-                <a:solidFill>
-                  <a:srgbClr val="5B6B80"/>
-                </a:solidFill>
-                <a:latin typeface="Calibri"/>
-              </a:rPr>
-              <a:t>Kesikli ok = derleme zamanı seçimi · düz ok = çalışma zamanı kullanımı.</a:t>
             </a:r>
             <a:endParaRPr/>
           </a:p>
@@ -14656,7 +14466,7 @@
       </p:grpSpPr>
       <p:pic>
         <p:nvPicPr>
-          <p:cNvPr id="1167989989" name="Picture 1" descr="sunu_arka_plan.png"/>
+          <p:cNvPr id="785664665" name="Picture 1" descr="sunu_arka_plan.png"/>
           <p:cNvPicPr>
             <a:picLocks noChangeAspect="1"/>
           </p:cNvPicPr>
@@ -14678,7 +14488,7 @@
       </p:pic>
       <p:sp>
         <p:nvSpPr>
-          <p:cNvPr id="1711755699" name="TextBox 2"/>
+          <p:cNvPr id="1390707097" name="TextBox 2"/>
           <p:cNvSpPr txBox="1"/>
           <p:nvPr/>
         </p:nvSpPr>
@@ -14716,7 +14526,7 @@
       </p:sp>
       <p:sp>
         <p:nvSpPr>
-          <p:cNvPr id="1353396727" name="TextBox 3"/>
+          <p:cNvPr id="799464844" name="TextBox 3"/>
           <p:cNvSpPr txBox="1"/>
           <p:nvPr/>
         </p:nvSpPr>
@@ -14754,7 +14564,7 @@
       </p:sp>
       <p:sp>
         <p:nvSpPr>
-          <p:cNvPr id="1771379647" name="TextBox 4"/>
+          <p:cNvPr id="5484405" name="TextBox 4"/>
           <p:cNvSpPr txBox="1"/>
           <p:nvPr/>
         </p:nvSpPr>
@@ -14792,7 +14602,7 @@
       </p:sp>
       <p:sp>
         <p:nvSpPr>
-          <p:cNvPr id="659981913" name="TextBox 5"/>
+          <p:cNvPr id="1084699854" name="TextBox 5"/>
           <p:cNvSpPr txBox="1"/>
           <p:nvPr/>
         </p:nvSpPr>
@@ -14830,7 +14640,7 @@
       </p:sp>
       <p:graphicFrame>
         <p:nvGraphicFramePr>
-          <p:cNvPr id="1095924376" name="Table 6"/>
+          <p:cNvPr id="202815918" name="Table 6"/>
           <p:cNvGraphicFramePr>
             <a:graphicFrameLocks xmlns:a="http://schemas.openxmlformats.org/drawingml/2006/main" noGrp="1"/>
           </p:cNvGraphicFramePr>
@@ -15368,7 +15178,7 @@
       </p:graphicFrame>
       <p:sp>
         <p:nvSpPr>
-          <p:cNvPr id="1970469351" name="Rounded Rectangle 7"/>
+          <p:cNvPr id="334617874" name="Rounded Rectangle 7"/>
           <p:cNvSpPr/>
           <p:nvPr/>
         </p:nvSpPr>
@@ -15428,7 +15238,7 @@
       </p:sp>
       <p:sp>
         <p:nvSpPr>
-          <p:cNvPr id="1750472376" name="Rounded Rectangle 8"/>
+          <p:cNvPr id="843088991" name="Rounded Rectangle 8"/>
           <p:cNvSpPr/>
           <p:nvPr/>
         </p:nvSpPr>
@@ -15488,7 +15298,7 @@
       </p:sp>
       <p:sp>
         <p:nvSpPr>
-          <p:cNvPr id="1799331739" name="Rounded Rectangle 9"/>
+          <p:cNvPr id="820430108" name="Rounded Rectangle 9"/>
           <p:cNvSpPr/>
           <p:nvPr/>
         </p:nvSpPr>
@@ -15548,7 +15358,7 @@
       </p:sp>
       <p:sp>
         <p:nvSpPr>
-          <p:cNvPr id="891289901" name="TextBox 10"/>
+          <p:cNvPr id="1064340945" name="TextBox 10"/>
           <p:cNvSpPr txBox="1"/>
           <p:nvPr/>
         </p:nvSpPr>
@@ -15646,7 +15456,7 @@
       </p:grpSpPr>
       <p:pic>
         <p:nvPicPr>
-          <p:cNvPr id="1689605381" name="Picture 1" descr="sunu_arka_plan.png"/>
+          <p:cNvPr id="1487986097" name="Picture 1" descr="sunu_arka_plan.png"/>
           <p:cNvPicPr>
             <a:picLocks noChangeAspect="1"/>
           </p:cNvPicPr>
@@ -15668,7 +15478,7 @@
       </p:pic>
       <p:sp>
         <p:nvSpPr>
-          <p:cNvPr id="143401501" name="TextBox 2"/>
+          <p:cNvPr id="2089602936" name="TextBox 2"/>
           <p:cNvSpPr txBox="1"/>
           <p:nvPr/>
         </p:nvSpPr>
@@ -15706,7 +15516,7 @@
       </p:sp>
       <p:sp>
         <p:nvSpPr>
-          <p:cNvPr id="1285880726" name="TextBox 3"/>
+          <p:cNvPr id="1549273764" name="TextBox 3"/>
           <p:cNvSpPr txBox="1"/>
           <p:nvPr/>
         </p:nvSpPr>
@@ -15744,7 +15554,7 @@
       </p:sp>
       <p:sp>
         <p:nvSpPr>
-          <p:cNvPr id="857093489" name="TextBox 4"/>
+          <p:cNvPr id="33688046" name="TextBox 4"/>
           <p:cNvSpPr txBox="1"/>
           <p:nvPr/>
         </p:nvSpPr>
@@ -15782,7 +15592,7 @@
       </p:sp>
       <p:sp>
         <p:nvSpPr>
-          <p:cNvPr id="21738277" name="TextBox 5"/>
+          <p:cNvPr id="731962150" name="TextBox 5"/>
           <p:cNvSpPr txBox="1"/>
           <p:nvPr/>
         </p:nvSpPr>
@@ -15820,7 +15630,7 @@
       </p:sp>
       <p:sp>
         <p:nvSpPr>
-          <p:cNvPr id="382595182" name="TextBox 6"/>
+          <p:cNvPr id="1925137489" name="TextBox 6"/>
           <p:cNvSpPr txBox="1"/>
           <p:nvPr/>
         </p:nvSpPr>
@@ -15858,7 +15668,7 @@
       </p:sp>
       <p:sp>
         <p:nvSpPr>
-          <p:cNvPr id="432520904" name="Rounded Rectangle 7"/>
+          <p:cNvPr id="825456305" name="Rounded Rectangle 7"/>
           <p:cNvSpPr/>
           <p:nvPr/>
         </p:nvSpPr>
@@ -15909,7 +15719,7 @@
       </p:sp>
       <p:sp>
         <p:nvSpPr>
-          <p:cNvPr id="1969122789" name="TextBox 8"/>
+          <p:cNvPr id="329916362" name="TextBox 8"/>
           <p:cNvSpPr txBox="1"/>
           <p:nvPr/>
         </p:nvSpPr>
@@ -15947,7 +15757,7 @@
       </p:sp>
       <p:sp>
         <p:nvSpPr>
-          <p:cNvPr id="1994216765" name="TextBox 9"/>
+          <p:cNvPr id="1737789223" name="TextBox 9"/>
           <p:cNvSpPr txBox="1"/>
           <p:nvPr/>
         </p:nvSpPr>
@@ -16003,7 +15813,7 @@
       </p:sp>
       <p:sp>
         <p:nvSpPr>
-          <p:cNvPr id="346295462" name="Rounded Rectangle 10"/>
+          <p:cNvPr id="576301691" name="Rounded Rectangle 10"/>
           <p:cNvSpPr/>
           <p:nvPr/>
         </p:nvSpPr>
@@ -16054,7 +15864,7 @@
       </p:sp>
       <p:sp>
         <p:nvSpPr>
-          <p:cNvPr id="2083755017" name="TextBox 11"/>
+          <p:cNvPr id="1771171055" name="TextBox 11"/>
           <p:cNvSpPr txBox="1"/>
           <p:nvPr/>
         </p:nvSpPr>
@@ -16092,7 +15902,7 @@
       </p:sp>
       <p:sp>
         <p:nvSpPr>
-          <p:cNvPr id="1514833007" name="TextBox 12"/>
+          <p:cNvPr id="1313441716" name="TextBox 12"/>
           <p:cNvSpPr txBox="1"/>
           <p:nvPr/>
         </p:nvSpPr>
@@ -16130,7 +15940,7 @@
       </p:sp>
       <p:sp>
         <p:nvSpPr>
-          <p:cNvPr id="101162726" name="Rounded Rectangle 13"/>
+          <p:cNvPr id="1150742834" name="Rounded Rectangle 13"/>
           <p:cNvSpPr/>
           <p:nvPr/>
         </p:nvSpPr>
@@ -16181,7 +15991,7 @@
       </p:sp>
       <p:sp>
         <p:nvSpPr>
-          <p:cNvPr id="242308976" name="TextBox 14"/>
+          <p:cNvPr id="1144901123" name="TextBox 14"/>
           <p:cNvSpPr txBox="1"/>
           <p:nvPr/>
         </p:nvSpPr>
@@ -16219,7 +16029,7 @@
       </p:sp>
       <p:sp>
         <p:nvSpPr>
-          <p:cNvPr id="865628473" name="TextBox 15"/>
+          <p:cNvPr id="1164134617" name="TextBox 15"/>
           <p:cNvSpPr txBox="1"/>
           <p:nvPr/>
         </p:nvSpPr>
@@ -16290,7 +16100,7 @@
       </p:grpSpPr>
       <p:pic>
         <p:nvPicPr>
-          <p:cNvPr id="1052348891" name="Picture 1" descr="sunu_arka_plan.png"/>
+          <p:cNvPr id="559830550" name="Picture 1" descr="sunu_arka_plan.png"/>
           <p:cNvPicPr>
             <a:picLocks noChangeAspect="1"/>
           </p:cNvPicPr>
@@ -16312,7 +16122,7 @@
       </p:pic>
       <p:sp>
         <p:nvSpPr>
-          <p:cNvPr id="1349560824" name="TextBox 2"/>
+          <p:cNvPr id="744478232" name="TextBox 2"/>
           <p:cNvSpPr txBox="1"/>
           <p:nvPr/>
         </p:nvSpPr>
@@ -16350,7 +16160,7 @@
       </p:sp>
       <p:sp>
         <p:nvSpPr>
-          <p:cNvPr id="2029728185" name="TextBox 3"/>
+          <p:cNvPr id="82701931" name="TextBox 3"/>
           <p:cNvSpPr txBox="1"/>
           <p:nvPr/>
         </p:nvSpPr>
@@ -16388,7 +16198,7 @@
       </p:sp>
       <p:sp>
         <p:nvSpPr>
-          <p:cNvPr id="646737081" name="TextBox 4"/>
+          <p:cNvPr id="1131642172" name="TextBox 4"/>
           <p:cNvSpPr txBox="1"/>
           <p:nvPr/>
         </p:nvSpPr>
@@ -16426,7 +16236,7 @@
       </p:sp>
       <p:sp>
         <p:nvSpPr>
-          <p:cNvPr id="251882173" name="TextBox 5"/>
+          <p:cNvPr id="1625872298" name="TextBox 5"/>
           <p:cNvSpPr txBox="1"/>
           <p:nvPr/>
         </p:nvSpPr>
@@ -16464,7 +16274,7 @@
       </p:sp>
       <p:sp>
         <p:nvSpPr>
-          <p:cNvPr id="1283146519" name="Rounded Rectangle 6"/>
+          <p:cNvPr id="38293022" name="Rounded Rectangle 6"/>
           <p:cNvSpPr/>
           <p:nvPr/>
         </p:nvSpPr>
@@ -16539,7 +16349,7 @@
       </p:sp>
       <p:cxnSp>
         <p:nvCxnSpPr>
-          <p:cNvPr id="1786218065" name="Connector 7"/>
+          <p:cNvPr id="1039331813" name="Connector 7"/>
           <p:cNvCxnSpPr/>
           <p:nvPr/>
         </p:nvCxnSpPr>
@@ -16574,7 +16384,7 @@
       </p:cxnSp>
       <p:sp>
         <p:nvSpPr>
-          <p:cNvPr id="2085849659" name="Isosceles Triangle 8"/>
+          <p:cNvPr id="379387023" name="Isosceles Triangle 8"/>
           <p:cNvSpPr/>
           <p:nvPr/>
         </p:nvSpPr>
@@ -16623,7 +16433,7 @@
       </p:sp>
       <p:sp>
         <p:nvSpPr>
-          <p:cNvPr id="244234185" name="Rounded Rectangle 9"/>
+          <p:cNvPr id="1481345417" name="Rounded Rectangle 9"/>
           <p:cNvSpPr/>
           <p:nvPr/>
         </p:nvSpPr>
@@ -16684,7 +16494,7 @@
       </p:sp>
       <p:cxnSp>
         <p:nvCxnSpPr>
-          <p:cNvPr id="887815519" name="Connector 10"/>
+          <p:cNvPr id="1144957103" name="Connector 10"/>
           <p:cNvCxnSpPr/>
           <p:nvPr/>
         </p:nvCxnSpPr>
@@ -16719,7 +16529,7 @@
       </p:cxnSp>
       <p:sp>
         <p:nvSpPr>
-          <p:cNvPr id="661846596" name="Isosceles Triangle 11"/>
+          <p:cNvPr id="1005713420" name="Isosceles Triangle 11"/>
           <p:cNvSpPr/>
           <p:nvPr/>
         </p:nvSpPr>
@@ -16768,7 +16578,7 @@
       </p:sp>
       <p:sp>
         <p:nvSpPr>
-          <p:cNvPr id="63760362" name="TextBox 12"/>
+          <p:cNvPr id="1028968061" name="TextBox 12"/>
           <p:cNvSpPr txBox="1"/>
           <p:nvPr/>
         </p:nvSpPr>
@@ -16806,7 +16616,7 @@
       </p:sp>
       <p:sp>
         <p:nvSpPr>
-          <p:cNvPr id="1810828033" name="Rounded Rectangle 13"/>
+          <p:cNvPr id="802519643" name="Rounded Rectangle 13"/>
           <p:cNvSpPr/>
           <p:nvPr/>
         </p:nvSpPr>
@@ -16881,7 +16691,7 @@
       </p:sp>
       <p:cxnSp>
         <p:nvCxnSpPr>
-          <p:cNvPr id="779004048" name="Connector 14"/>
+          <p:cNvPr id="697277687" name="Connector 14"/>
           <p:cNvCxnSpPr/>
           <p:nvPr/>
         </p:nvCxnSpPr>
@@ -16916,7 +16726,7 @@
       </p:cxnSp>
       <p:sp>
         <p:nvSpPr>
-          <p:cNvPr id="799402175" name="Isosceles Triangle 15"/>
+          <p:cNvPr id="1285843170" name="Isosceles Triangle 15"/>
           <p:cNvSpPr/>
           <p:nvPr/>
         </p:nvSpPr>
@@ -16965,7 +16775,7 @@
       </p:sp>
       <p:sp>
         <p:nvSpPr>
-          <p:cNvPr id="1038535565" name="TextBox 16"/>
+          <p:cNvPr id="1028444758" name="TextBox 16"/>
           <p:cNvSpPr txBox="1"/>
           <p:nvPr/>
         </p:nvSpPr>
@@ -17003,7 +16813,7 @@
       </p:sp>
       <p:sp>
         <p:nvSpPr>
-          <p:cNvPr id="971469170" name="Rounded Rectangle 17"/>
+          <p:cNvPr id="432962527" name="Rounded Rectangle 17"/>
           <p:cNvSpPr/>
           <p:nvPr/>
         </p:nvSpPr>
@@ -17064,7 +16874,7 @@
       </p:sp>
       <p:cxnSp>
         <p:nvCxnSpPr>
-          <p:cNvPr id="1318565715" name="Connector 18"/>
+          <p:cNvPr id="2607590" name="Connector 18"/>
           <p:cNvCxnSpPr/>
           <p:nvPr/>
         </p:nvCxnSpPr>
@@ -17100,7 +16910,7 @@
       </p:cxnSp>
       <p:sp>
         <p:nvSpPr>
-          <p:cNvPr id="393605109" name="Isosceles Triangle 19"/>
+          <p:cNvPr id="781776156" name="Isosceles Triangle 19"/>
           <p:cNvSpPr/>
           <p:nvPr/>
         </p:nvSpPr>
@@ -17149,7 +16959,7 @@
       </p:sp>
       <p:sp>
         <p:nvSpPr>
-          <p:cNvPr id="583697536" name="TextBox 20"/>
+          <p:cNvPr id="1433339556" name="TextBox 20"/>
           <p:cNvSpPr txBox="1"/>
           <p:nvPr/>
         </p:nvSpPr>
@@ -17187,7 +16997,7 @@
       </p:sp>
       <p:sp>
         <p:nvSpPr>
-          <p:cNvPr id="707444329" name="Rounded Rectangle 21"/>
+          <p:cNvPr id="253822265" name="Rounded Rectangle 21"/>
           <p:cNvSpPr/>
           <p:nvPr/>
         </p:nvSpPr>
@@ -17263,7 +17073,7 @@
       </p:sp>
       <p:cxnSp>
         <p:nvCxnSpPr>
-          <p:cNvPr id="535016546" name="Connector 22"/>
+          <p:cNvPr id="73374053" name="Connector 22"/>
           <p:cNvCxnSpPr/>
           <p:nvPr/>
         </p:nvCxnSpPr>
@@ -17298,7 +17108,7 @@
       </p:cxnSp>
       <p:sp>
         <p:nvSpPr>
-          <p:cNvPr id="918328707" name="Isosceles Triangle 23"/>
+          <p:cNvPr id="725143813" name="Isosceles Triangle 23"/>
           <p:cNvSpPr/>
           <p:nvPr/>
         </p:nvSpPr>
@@ -17347,7 +17157,7 @@
       </p:sp>
       <p:sp>
         <p:nvSpPr>
-          <p:cNvPr id="1414790261" name="TextBox 24"/>
+          <p:cNvPr id="711213394" name="TextBox 24"/>
           <p:cNvSpPr txBox="1"/>
           <p:nvPr/>
         </p:nvSpPr>
@@ -17385,7 +17195,7 @@
       </p:sp>
       <p:sp>
         <p:nvSpPr>
-          <p:cNvPr id="1268136635" name="Rounded Rectangle 25"/>
+          <p:cNvPr id="841212683" name="Rounded Rectangle 25"/>
           <p:cNvSpPr/>
           <p:nvPr/>
         </p:nvSpPr>
@@ -17460,7 +17270,7 @@
       </p:sp>
       <p:cxnSp>
         <p:nvCxnSpPr>
-          <p:cNvPr id="1143794035" name="Connector 26"/>
+          <p:cNvPr id="70080525" name="Connector 26"/>
           <p:cNvCxnSpPr/>
           <p:nvPr/>
         </p:nvCxnSpPr>
@@ -17495,7 +17305,7 @@
       </p:cxnSp>
       <p:sp>
         <p:nvSpPr>
-          <p:cNvPr id="127230027" name="Isosceles Triangle 27"/>
+          <p:cNvPr id="1095755052" name="Isosceles Triangle 27"/>
           <p:cNvSpPr/>
           <p:nvPr/>
         </p:nvSpPr>
@@ -17544,7 +17354,7 @@
       </p:sp>
       <p:sp>
         <p:nvSpPr>
-          <p:cNvPr id="587242934" name="TextBox 28"/>
+          <p:cNvPr id="1446031776" name="TextBox 28"/>
           <p:cNvSpPr txBox="1"/>
           <p:nvPr/>
         </p:nvSpPr>
@@ -17582,7 +17392,7 @@
       </p:sp>
       <p:sp>
         <p:nvSpPr>
-          <p:cNvPr id="406794148" name="Rounded Rectangle 29"/>
+          <p:cNvPr id="116696475" name="Rounded Rectangle 29"/>
           <p:cNvSpPr/>
           <p:nvPr/>
         </p:nvSpPr>
@@ -17643,7 +17453,7 @@
       </p:sp>
       <p:cxnSp>
         <p:nvCxnSpPr>
-          <p:cNvPr id="835288671" name="Connector 30"/>
+          <p:cNvPr id="1590384795" name="Connector 30"/>
           <p:cNvCxnSpPr/>
           <p:nvPr/>
         </p:nvCxnSpPr>
@@ -17678,7 +17488,7 @@
       </p:cxnSp>
       <p:sp>
         <p:nvSpPr>
-          <p:cNvPr id="2023163976" name="Isosceles Triangle 31"/>
+          <p:cNvPr id="614634117" name="Isosceles Triangle 31"/>
           <p:cNvSpPr/>
           <p:nvPr/>
         </p:nvSpPr>
@@ -17727,7 +17537,7 @@
       </p:sp>
       <p:sp>
         <p:nvSpPr>
-          <p:cNvPr id="1213390643" name="TextBox 32"/>
+          <p:cNvPr id="1984074459" name="TextBox 32"/>
           <p:cNvSpPr txBox="1"/>
           <p:nvPr/>
         </p:nvSpPr>
@@ -17765,7 +17575,7 @@
       </p:sp>
       <p:sp>
         <p:nvSpPr>
-          <p:cNvPr id="1979242037" name="Rounded Rectangle 33"/>
+          <p:cNvPr id="585878670" name="Rounded Rectangle 33"/>
           <p:cNvSpPr/>
           <p:nvPr/>
         </p:nvSpPr>
@@ -17840,7 +17650,7 @@
       </p:sp>
       <p:cxnSp>
         <p:nvCxnSpPr>
-          <p:cNvPr id="1195052120" name="Connector 34"/>
+          <p:cNvPr id="547115005" name="Connector 34"/>
           <p:cNvCxnSpPr/>
           <p:nvPr/>
         </p:nvCxnSpPr>
@@ -17875,7 +17685,7 @@
       </p:cxnSp>
       <p:sp>
         <p:nvSpPr>
-          <p:cNvPr id="1683887771" name="Isosceles Triangle 35"/>
+          <p:cNvPr id="646894350" name="Isosceles Triangle 35"/>
           <p:cNvSpPr/>
           <p:nvPr/>
         </p:nvSpPr>
@@ -17924,7 +17734,7 @@
       </p:sp>
       <p:sp>
         <p:nvSpPr>
-          <p:cNvPr id="2085528494" name="TextBox 36"/>
+          <p:cNvPr id="1874946145" name="TextBox 36"/>
           <p:cNvSpPr txBox="1"/>
           <p:nvPr/>
         </p:nvSpPr>
@@ -17962,7 +17772,7 @@
       </p:sp>
       <p:sp>
         <p:nvSpPr>
-          <p:cNvPr id="387066706" name="Rounded Rectangle 37"/>
+          <p:cNvPr id="359705175" name="Rounded Rectangle 37"/>
           <p:cNvSpPr/>
           <p:nvPr/>
         </p:nvSpPr>
@@ -18070,7 +17880,7 @@
       </p:grpSpPr>
       <p:pic>
         <p:nvPicPr>
-          <p:cNvPr id="761045279" name="Picture 1" descr="sunu_arka_plan.png"/>
+          <p:cNvPr id="1158901788" name="Picture 1" descr="sunu_arka_plan.png"/>
           <p:cNvPicPr>
             <a:picLocks noChangeAspect="1"/>
           </p:cNvPicPr>
@@ -18092,7 +17902,7 @@
       </p:pic>
       <p:sp>
         <p:nvSpPr>
-          <p:cNvPr id="777609316" name="TextBox 2"/>
+          <p:cNvPr id="1342610186" name="TextBox 2"/>
           <p:cNvSpPr txBox="1"/>
           <p:nvPr/>
         </p:nvSpPr>
@@ -18130,7 +17940,7 @@
       </p:sp>
       <p:sp>
         <p:nvSpPr>
-          <p:cNvPr id="1894273648" name="TextBox 3"/>
+          <p:cNvPr id="917568466" name="TextBox 3"/>
           <p:cNvSpPr txBox="1"/>
           <p:nvPr/>
         </p:nvSpPr>
@@ -18168,7 +17978,7 @@
       </p:sp>
       <p:sp>
         <p:nvSpPr>
-          <p:cNvPr id="696538939" name="TextBox 4"/>
+          <p:cNvPr id="1054393791" name="TextBox 4"/>
           <p:cNvSpPr txBox="1"/>
           <p:nvPr/>
         </p:nvSpPr>
@@ -18206,7 +18016,7 @@
       </p:sp>
       <p:sp>
         <p:nvSpPr>
-          <p:cNvPr id="542497763" name="TextBox 5"/>
+          <p:cNvPr id="750100809" name="TextBox 5"/>
           <p:cNvSpPr txBox="1"/>
           <p:nvPr/>
         </p:nvSpPr>
@@ -18244,7 +18054,7 @@
       </p:sp>
       <p:sp>
         <p:nvSpPr>
-          <p:cNvPr id="451095132" name="Rounded Rectangle 6"/>
+          <p:cNvPr id="541683555" name="Rounded Rectangle 6"/>
           <p:cNvSpPr/>
           <p:nvPr/>
         </p:nvSpPr>
@@ -18304,7 +18114,7 @@
       </p:sp>
       <p:cxnSp>
         <p:nvCxnSpPr>
-          <p:cNvPr id="2083676634" name="Connector 7"/>
+          <p:cNvPr id="384656572" name="Connector 7"/>
           <p:cNvCxnSpPr/>
           <p:nvPr/>
         </p:nvCxnSpPr>
@@ -18341,7 +18151,7 @@
       </p:cxnSp>
       <p:sp>
         <p:nvSpPr>
-          <p:cNvPr id="1805493160" name="Rounded Rectangle 8"/>
+          <p:cNvPr id="1136366287" name="Rounded Rectangle 8"/>
           <p:cNvSpPr/>
           <p:nvPr/>
         </p:nvSpPr>
@@ -18401,7 +18211,7 @@
       </p:sp>
       <p:cxnSp>
         <p:nvCxnSpPr>
-          <p:cNvPr id="641525616" name="Connector 9"/>
+          <p:cNvPr id="826912549" name="Connector 9"/>
           <p:cNvCxnSpPr/>
           <p:nvPr/>
         </p:nvCxnSpPr>
@@ -18438,7 +18248,7 @@
       </p:cxnSp>
       <p:cxnSp>
         <p:nvCxnSpPr>
-          <p:cNvPr id="1079238363" name="Connector 10"/>
+          <p:cNvPr id="1126472246" name="Connector 10"/>
           <p:cNvCxnSpPr/>
           <p:nvPr/>
         </p:nvCxnSpPr>
@@ -18473,7 +18283,7 @@
       </p:cxnSp>
       <p:sp>
         <p:nvSpPr>
-          <p:cNvPr id="183935677" name="Isosceles Triangle 11"/>
+          <p:cNvPr id="525063099" name="Isosceles Triangle 11"/>
           <p:cNvSpPr/>
           <p:nvPr/>
         </p:nvSpPr>
@@ -18522,7 +18332,7 @@
       </p:sp>
       <p:sp>
         <p:nvSpPr>
-          <p:cNvPr id="327882928" name="TextBox 12"/>
+          <p:cNvPr id="502461243" name="TextBox 12"/>
           <p:cNvSpPr txBox="1"/>
           <p:nvPr/>
         </p:nvSpPr>
@@ -18560,7 +18370,7 @@
       </p:sp>
       <p:cxnSp>
         <p:nvCxnSpPr>
-          <p:cNvPr id="1238849276" name="Connector 13"/>
+          <p:cNvPr id="608901788" name="Connector 13"/>
           <p:cNvCxnSpPr/>
           <p:nvPr/>
         </p:nvCxnSpPr>
@@ -18595,7 +18405,7 @@
       </p:cxnSp>
       <p:sp>
         <p:nvSpPr>
-          <p:cNvPr id="1253415530" name="Isosceles Triangle 14"/>
+          <p:cNvPr id="1907878073" name="Isosceles Triangle 14"/>
           <p:cNvSpPr/>
           <p:nvPr/>
         </p:nvSpPr>
@@ -18644,7 +18454,7 @@
       </p:sp>
       <p:sp>
         <p:nvSpPr>
-          <p:cNvPr id="626379146" name="TextBox 15"/>
+          <p:cNvPr id="542976718" name="TextBox 15"/>
           <p:cNvSpPr txBox="1"/>
           <p:nvPr/>
         </p:nvSpPr>
@@ -18682,7 +18492,7 @@
       </p:sp>
       <p:sp>
         <p:nvSpPr>
-          <p:cNvPr id="983394526" name="Rounded Rectangle 16"/>
+          <p:cNvPr id="156313543" name="Rounded Rectangle 16"/>
           <p:cNvSpPr/>
           <p:nvPr/>
         </p:nvSpPr>
@@ -18732,7 +18542,7 @@
       </p:sp>
       <p:sp>
         <p:nvSpPr>
-          <p:cNvPr id="1081604538" name="TextBox 17"/>
+          <p:cNvPr id="878717904" name="TextBox 17"/>
           <p:cNvSpPr txBox="1"/>
           <p:nvPr/>
         </p:nvSpPr>
@@ -18770,7 +18580,7 @@
       </p:sp>
       <p:cxnSp>
         <p:nvCxnSpPr>
-          <p:cNvPr id="1687448105" name="Connector 18"/>
+          <p:cNvPr id="1704574622" name="Connector 18"/>
           <p:cNvCxnSpPr/>
           <p:nvPr/>
         </p:nvCxnSpPr>
@@ -18805,7 +18615,7 @@
       </p:cxnSp>
       <p:sp>
         <p:nvSpPr>
-          <p:cNvPr id="1435508682" name="Isosceles Triangle 19"/>
+          <p:cNvPr id="144097713" name="Isosceles Triangle 19"/>
           <p:cNvSpPr/>
           <p:nvPr/>
         </p:nvSpPr>
@@ -18854,7 +18664,7 @@
       </p:sp>
       <p:sp>
         <p:nvSpPr>
-          <p:cNvPr id="1016789566" name="TextBox 20"/>
+          <p:cNvPr id="458695423" name="TextBox 20"/>
           <p:cNvSpPr txBox="1"/>
           <p:nvPr/>
         </p:nvSpPr>
@@ -18892,7 +18702,7 @@
       </p:sp>
       <p:cxnSp>
         <p:nvCxnSpPr>
-          <p:cNvPr id="604815273" name="Connector 21"/>
+          <p:cNvPr id="1269165229" name="Connector 21"/>
           <p:cNvCxnSpPr/>
           <p:nvPr/>
         </p:nvCxnSpPr>
@@ -18927,7 +18737,7 @@
       </p:cxnSp>
       <p:sp>
         <p:nvSpPr>
-          <p:cNvPr id="572257709" name="Isosceles Triangle 22"/>
+          <p:cNvPr id="993660505" name="Isosceles Triangle 22"/>
           <p:cNvSpPr/>
           <p:nvPr/>
         </p:nvSpPr>
@@ -18976,7 +18786,7 @@
       </p:sp>
       <p:sp>
         <p:nvSpPr>
-          <p:cNvPr id="940948829" name="TextBox 23"/>
+          <p:cNvPr id="103472819" name="TextBox 23"/>
           <p:cNvSpPr txBox="1"/>
           <p:nvPr/>
         </p:nvSpPr>
@@ -19014,7 +18824,7 @@
       </p:sp>
       <p:cxnSp>
         <p:nvCxnSpPr>
-          <p:cNvPr id="1314287952" name="Connector 24"/>
+          <p:cNvPr id="1384944689" name="Connector 24"/>
           <p:cNvCxnSpPr/>
           <p:nvPr/>
         </p:nvCxnSpPr>
@@ -19049,7 +18859,7 @@
       </p:cxnSp>
       <p:sp>
         <p:nvSpPr>
-          <p:cNvPr id="1926014305" name="Isosceles Triangle 25"/>
+          <p:cNvPr id="1163604223" name="Isosceles Triangle 25"/>
           <p:cNvSpPr/>
           <p:nvPr/>
         </p:nvSpPr>
@@ -19098,7 +18908,7 @@
       </p:sp>
       <p:sp>
         <p:nvSpPr>
-          <p:cNvPr id="1737525456" name="TextBox 26"/>
+          <p:cNvPr id="1857881391" name="TextBox 26"/>
           <p:cNvSpPr txBox="1"/>
           <p:nvPr/>
         </p:nvSpPr>
@@ -19136,7 +18946,7 @@
       </p:sp>
       <p:sp>
         <p:nvSpPr>
-          <p:cNvPr id="2072437372" name="Rounded Rectangle 27"/>
+          <p:cNvPr id="352169687" name="Rounded Rectangle 27"/>
           <p:cNvSpPr/>
           <p:nvPr/>
         </p:nvSpPr>
@@ -19212,7 +19022,7 @@
       </p:sp>
       <p:cxnSp>
         <p:nvCxnSpPr>
-          <p:cNvPr id="1789805436" name="Connector 28"/>
+          <p:cNvPr id="2093303863" name="Connector 28"/>
           <p:cNvCxnSpPr/>
           <p:nvPr/>
         </p:nvCxnSpPr>
@@ -19247,7 +19057,7 @@
       </p:cxnSp>
       <p:sp>
         <p:nvSpPr>
-          <p:cNvPr id="56242202" name="Isosceles Triangle 29"/>
+          <p:cNvPr id="438777875" name="Isosceles Triangle 29"/>
           <p:cNvSpPr/>
           <p:nvPr/>
         </p:nvSpPr>
@@ -19296,7 +19106,7 @@
       </p:sp>
       <p:sp>
         <p:nvSpPr>
-          <p:cNvPr id="2039333949" name="TextBox 30"/>
+          <p:cNvPr id="731806019" name="TextBox 30"/>
           <p:cNvSpPr txBox="1"/>
           <p:nvPr/>
         </p:nvSpPr>
@@ -19334,7 +19144,7 @@
       </p:sp>
       <p:pic>
         <p:nvPicPr>
-          <p:cNvPr id="2130784905" name="Picture 31" descr="08_eylul.png"/>
+          <p:cNvPr id="288144822" name="Picture 31" descr="08_eylul.png"/>
           <p:cNvPicPr>
             <a:picLocks noChangeAspect="1"/>
           </p:cNvPicPr>
@@ -19361,7 +19171,7 @@
       </p:pic>
       <p:sp>
         <p:nvSpPr>
-          <p:cNvPr id="426764332" name="TextBox 32"/>
+          <p:cNvPr id="130197953" name="TextBox 32"/>
           <p:cNvSpPr txBox="1"/>
           <p:nvPr/>
         </p:nvSpPr>
@@ -19399,7 +19209,7 @@
       </p:sp>
       <p:sp>
         <p:nvSpPr>
-          <p:cNvPr id="275154748" name="TextBox 33"/>
+          <p:cNvPr id="2114456324" name="TextBox 33"/>
           <p:cNvSpPr txBox="1"/>
           <p:nvPr/>
         </p:nvSpPr>
